--- a/design/templates/facet-light/template.pptx
+++ b/design/templates/facet-light/template.pptx
@@ -849,7 +849,7 @@
           <a:bodyPr/>
           <a:lstStyle/>
           <a:p>
-            <a:fld id="{784F70EA-3FD3-4955-90A7-9334D40F9408}" type="datetimeFigureOut">
+            <a:fld id="{9B28EAFD-CAE0-41EE-B184-026F7F5DC9D1}" type="datetimeFigureOut">
               <a:rPr lang="en-US" smtClean="0"/>
               <a:t>10/3/2026</a:t>
             </a:fld>
@@ -891,7 +891,7 @@
           <a:bodyPr/>
           <a:lstStyle/>
           <a:p>
-            <a:fld id="{41D0EC4C-452D-4CB3-8553-3AAC20353B0B}" type="slidenum">
+            <a:fld id="{DC138929-C395-43AB-82B0-A2EFC9DE35E2}" type="slidenum">
               <a:rPr lang="en-US" smtClean="0"/>
               <a:t>‹#›</a:t>
             </a:fld>
@@ -902,7 +902,7 @@
     </p:spTree>
     <p:extLst>
       <p:ext uri="{BB962C8B-B14F-4D97-AF65-F5344CB8AC3E}">
-        <p14:creationId xmlns:p14="http://schemas.microsoft.com/office/powerpoint/2010/main" val="3342531273"/>
+        <p14:creationId xmlns:p14="http://schemas.microsoft.com/office/powerpoint/2010/main" val="2241265951"/>
       </p:ext>
     </p:extLst>
   </p:cSld>
@@ -982,7 +982,7 @@
           <a:bodyPr/>
           <a:lstStyle/>
           <a:p>
-            <a:fld id="{784F70EA-3FD3-4955-90A7-9334D40F9408}" type="datetimeFigureOut">
+            <a:fld id="{9B28EAFD-CAE0-41EE-B184-026F7F5DC9D1}" type="datetimeFigureOut">
               <a:rPr lang="en-US" smtClean="0"/>
               <a:t>10/3/2026</a:t>
             </a:fld>
@@ -1024,7 +1024,7 @@
           <a:bodyPr/>
           <a:lstStyle/>
           <a:p>
-            <a:fld id="{41D0EC4C-452D-4CB3-8553-3AAC20353B0B}" type="slidenum">
+            <a:fld id="{DC138929-C395-43AB-82B0-A2EFC9DE35E2}" type="slidenum">
               <a:rPr lang="en-US" smtClean="0"/>
               <a:t>‹#›</a:t>
             </a:fld>
@@ -1037,7 +1037,7 @@
           <p:cNvPr id="6" name="body">
             <a:extLst>
               <a:ext uri="{FF2B5EF4-FFF2-40B4-BE49-F238E27FC236}">
-                <a16:creationId xmlns:a16="http://schemas.microsoft.com/office/drawing/2014/main" id="{C99302FB-4BF5-7C7B-CA65-85A9715EC8AF}"/>
+                <a16:creationId xmlns:a16="http://schemas.microsoft.com/office/drawing/2014/main" id="{A97E46AF-687D-504D-EDA1-0BF704BA85BA}"/>
               </a:ext>
             </a:extLst>
           </p:cNvPr>
@@ -1077,7 +1077,7 @@
           <p:cNvPr id="7" name="source">
             <a:extLst>
               <a:ext uri="{FF2B5EF4-FFF2-40B4-BE49-F238E27FC236}">
-                <a16:creationId xmlns:a16="http://schemas.microsoft.com/office/drawing/2014/main" id="{2543052C-9A70-62E7-10BD-55A129908450}"/>
+                <a16:creationId xmlns:a16="http://schemas.microsoft.com/office/drawing/2014/main" id="{0258A4C4-BD43-8C67-E0F4-66F40A09361E}"/>
               </a:ext>
             </a:extLst>
           </p:cNvPr>
@@ -1134,7 +1134,7 @@
     </p:spTree>
     <p:extLst>
       <p:ext uri="{BB962C8B-B14F-4D97-AF65-F5344CB8AC3E}">
-        <p14:creationId xmlns:p14="http://schemas.microsoft.com/office/powerpoint/2010/main" val="2523442784"/>
+        <p14:creationId xmlns:p14="http://schemas.microsoft.com/office/powerpoint/2010/main" val="2419853311"/>
       </p:ext>
     </p:extLst>
   </p:cSld>
@@ -1214,7 +1214,7 @@
           <a:bodyPr/>
           <a:lstStyle/>
           <a:p>
-            <a:fld id="{784F70EA-3FD3-4955-90A7-9334D40F9408}" type="datetimeFigureOut">
+            <a:fld id="{9B28EAFD-CAE0-41EE-B184-026F7F5DC9D1}" type="datetimeFigureOut">
               <a:rPr lang="en-US" smtClean="0"/>
               <a:t>10/3/2026</a:t>
             </a:fld>
@@ -1256,7 +1256,7 @@
           <a:bodyPr/>
           <a:lstStyle/>
           <a:p>
-            <a:fld id="{41D0EC4C-452D-4CB3-8553-3AAC20353B0B}" type="slidenum">
+            <a:fld id="{DC138929-C395-43AB-82B0-A2EFC9DE35E2}" type="slidenum">
               <a:rPr lang="en-US" smtClean="0"/>
               <a:t>‹#›</a:t>
             </a:fld>
@@ -1269,7 +1269,7 @@
           <p:cNvPr id="6" name="body">
             <a:extLst>
               <a:ext uri="{FF2B5EF4-FFF2-40B4-BE49-F238E27FC236}">
-                <a16:creationId xmlns:a16="http://schemas.microsoft.com/office/drawing/2014/main" id="{F5E884E2-2C36-45E4-1382-624482FA3668}"/>
+                <a16:creationId xmlns:a16="http://schemas.microsoft.com/office/drawing/2014/main" id="{D5EFE7E9-9230-60DB-BE81-E38BF103E489}"/>
               </a:ext>
             </a:extLst>
           </p:cNvPr>
@@ -1312,7 +1312,7 @@
     </p:spTree>
     <p:extLst>
       <p:ext uri="{BB962C8B-B14F-4D97-AF65-F5344CB8AC3E}">
-        <p14:creationId xmlns:p14="http://schemas.microsoft.com/office/powerpoint/2010/main" val="458354324"/>
+        <p14:creationId xmlns:p14="http://schemas.microsoft.com/office/powerpoint/2010/main" val="3702732227"/>
       </p:ext>
     </p:extLst>
   </p:cSld>
@@ -1388,7 +1388,7 @@
           <p:cNvPr id="6" name="section_number">
             <a:extLst>
               <a:ext uri="{FF2B5EF4-FFF2-40B4-BE49-F238E27FC236}">
-                <a16:creationId xmlns:a16="http://schemas.microsoft.com/office/drawing/2014/main" id="{8C94F5B5-8414-BFA7-97A4-4C9BB6FD5BEF}"/>
+                <a16:creationId xmlns:a16="http://schemas.microsoft.com/office/drawing/2014/main" id="{81AC0AEE-5228-C319-886D-573CC7941A23}"/>
               </a:ext>
             </a:extLst>
           </p:cNvPr>
@@ -1441,7 +1441,7 @@
           <p:cNvPr id="7" name="subtitle">
             <a:extLst>
               <a:ext uri="{FF2B5EF4-FFF2-40B4-BE49-F238E27FC236}">
-                <a16:creationId xmlns:a16="http://schemas.microsoft.com/office/drawing/2014/main" id="{48270DFB-BD89-BDDB-7B81-BA3BBCF1DF6F}"/>
+                <a16:creationId xmlns:a16="http://schemas.microsoft.com/office/drawing/2014/main" id="{3C7E24A3-1559-1E80-0A05-C3DCC1842EC1}"/>
               </a:ext>
             </a:extLst>
           </p:cNvPr>
@@ -1493,7 +1493,7 @@
           <p:cNvPr id="8" name="pattern">
             <a:extLst>
               <a:ext uri="{FF2B5EF4-FFF2-40B4-BE49-F238E27FC236}">
-                <a16:creationId xmlns:a16="http://schemas.microsoft.com/office/drawing/2014/main" id="{8A26D8DD-98EE-88B5-A20E-CBA50A8511B8}"/>
+                <a16:creationId xmlns:a16="http://schemas.microsoft.com/office/drawing/2014/main" id="{25ED660C-837C-7941-3F44-D76F7BBFB506}"/>
               </a:ext>
             </a:extLst>
           </p:cNvPr>
@@ -1549,7 +1549,7 @@
           <p:cNvPr id="9" name="pattern">
             <a:extLst>
               <a:ext uri="{FF2B5EF4-FFF2-40B4-BE49-F238E27FC236}">
-                <a16:creationId xmlns:a16="http://schemas.microsoft.com/office/drawing/2014/main" id="{778CAC01-2509-2998-22CD-4049A7FB606C}"/>
+                <a16:creationId xmlns:a16="http://schemas.microsoft.com/office/drawing/2014/main" id="{6BD68D6C-34F8-E8B8-186C-0704A8BF9644}"/>
               </a:ext>
             </a:extLst>
           </p:cNvPr>
@@ -1605,7 +1605,7 @@
           <p:cNvPr id="10" name="pattern">
             <a:extLst>
               <a:ext uri="{FF2B5EF4-FFF2-40B4-BE49-F238E27FC236}">
-                <a16:creationId xmlns:a16="http://schemas.microsoft.com/office/drawing/2014/main" id="{152EEE91-967D-401B-A04C-C03CB07AC44E}"/>
+                <a16:creationId xmlns:a16="http://schemas.microsoft.com/office/drawing/2014/main" id="{A26C590B-F172-AD54-80F2-DC9EC7BF3A1A}"/>
               </a:ext>
             </a:extLst>
           </p:cNvPr>
@@ -1661,7 +1661,7 @@
           <p:cNvPr id="11" name="pattern">
             <a:extLst>
               <a:ext uri="{FF2B5EF4-FFF2-40B4-BE49-F238E27FC236}">
-                <a16:creationId xmlns:a16="http://schemas.microsoft.com/office/drawing/2014/main" id="{B7F16017-DE08-B756-5351-F1128B250B4B}"/>
+                <a16:creationId xmlns:a16="http://schemas.microsoft.com/office/drawing/2014/main" id="{199FB7B7-EF05-D102-3D5C-20E6A599B3C3}"/>
               </a:ext>
             </a:extLst>
           </p:cNvPr>
@@ -1717,7 +1717,7 @@
           <p:cNvPr id="12" name="pattern">
             <a:extLst>
               <a:ext uri="{FF2B5EF4-FFF2-40B4-BE49-F238E27FC236}">
-                <a16:creationId xmlns:a16="http://schemas.microsoft.com/office/drawing/2014/main" id="{E12E6915-B791-2D85-82D8-8E4DE95BE353}"/>
+                <a16:creationId xmlns:a16="http://schemas.microsoft.com/office/drawing/2014/main" id="{B4BB9F3F-2426-E921-4389-B34077D4EC24}"/>
               </a:ext>
             </a:extLst>
           </p:cNvPr>
@@ -1773,7 +1773,7 @@
           <p:cNvPr id="13" name="pattern">
             <a:extLst>
               <a:ext uri="{FF2B5EF4-FFF2-40B4-BE49-F238E27FC236}">
-                <a16:creationId xmlns:a16="http://schemas.microsoft.com/office/drawing/2014/main" id="{8A615180-8574-EE2B-D919-5D0169F0AE62}"/>
+                <a16:creationId xmlns:a16="http://schemas.microsoft.com/office/drawing/2014/main" id="{243F2712-8120-BE57-150B-2F8A43BD67B7}"/>
               </a:ext>
             </a:extLst>
           </p:cNvPr>
@@ -1829,7 +1829,7 @@
           <p:cNvPr id="14" name="pattern">
             <a:extLst>
               <a:ext uri="{FF2B5EF4-FFF2-40B4-BE49-F238E27FC236}">
-                <a16:creationId xmlns:a16="http://schemas.microsoft.com/office/drawing/2014/main" id="{8EECDD8A-3BC6-E66B-D17C-B8951506DF74}"/>
+                <a16:creationId xmlns:a16="http://schemas.microsoft.com/office/drawing/2014/main" id="{A77279A8-55B2-DC8F-C61E-28C5E928A8FB}"/>
               </a:ext>
             </a:extLst>
           </p:cNvPr>
@@ -1885,7 +1885,7 @@
           <p:cNvPr id="15" name="pattern">
             <a:extLst>
               <a:ext uri="{FF2B5EF4-FFF2-40B4-BE49-F238E27FC236}">
-                <a16:creationId xmlns:a16="http://schemas.microsoft.com/office/drawing/2014/main" id="{B7757404-14E3-F601-4C5A-453C86B2391A}"/>
+                <a16:creationId xmlns:a16="http://schemas.microsoft.com/office/drawing/2014/main" id="{6289D8BE-AFE8-EAF0-7BE8-B918141DA1D2}"/>
               </a:ext>
             </a:extLst>
           </p:cNvPr>
@@ -1941,7 +1941,7 @@
           <p:cNvPr id="16" name="pattern">
             <a:extLst>
               <a:ext uri="{FF2B5EF4-FFF2-40B4-BE49-F238E27FC236}">
-                <a16:creationId xmlns:a16="http://schemas.microsoft.com/office/drawing/2014/main" id="{466F6214-6795-F85A-5A2B-D98AC1B62193}"/>
+                <a16:creationId xmlns:a16="http://schemas.microsoft.com/office/drawing/2014/main" id="{54D8397D-7229-D96C-1178-91DEE5977AA0}"/>
               </a:ext>
             </a:extLst>
           </p:cNvPr>
@@ -1997,7 +1997,7 @@
           <p:cNvPr id="17" name="pattern">
             <a:extLst>
               <a:ext uri="{FF2B5EF4-FFF2-40B4-BE49-F238E27FC236}">
-                <a16:creationId xmlns:a16="http://schemas.microsoft.com/office/drawing/2014/main" id="{D85F2D6C-B70C-E60C-46AB-F7394E580615}"/>
+                <a16:creationId xmlns:a16="http://schemas.microsoft.com/office/drawing/2014/main" id="{DDB44DF2-8117-9499-9A95-824E56B7E35A}"/>
               </a:ext>
             </a:extLst>
           </p:cNvPr>
@@ -2053,7 +2053,7 @@
           <p:cNvPr id="18" name="pattern">
             <a:extLst>
               <a:ext uri="{FF2B5EF4-FFF2-40B4-BE49-F238E27FC236}">
-                <a16:creationId xmlns:a16="http://schemas.microsoft.com/office/drawing/2014/main" id="{677E9536-B2A3-BEE6-ED43-BEBE135885BA}"/>
+                <a16:creationId xmlns:a16="http://schemas.microsoft.com/office/drawing/2014/main" id="{54D1617E-A750-5278-2857-B8E9B0C6737E}"/>
               </a:ext>
             </a:extLst>
           </p:cNvPr>
@@ -2109,7 +2109,7 @@
           <p:cNvPr id="19" name="pattern">
             <a:extLst>
               <a:ext uri="{FF2B5EF4-FFF2-40B4-BE49-F238E27FC236}">
-                <a16:creationId xmlns:a16="http://schemas.microsoft.com/office/drawing/2014/main" id="{CB98FCD2-DC95-F4B2-6E39-A5319C2AD5C0}"/>
+                <a16:creationId xmlns:a16="http://schemas.microsoft.com/office/drawing/2014/main" id="{24030445-1C2F-C82B-2E9C-78B689140293}"/>
               </a:ext>
             </a:extLst>
           </p:cNvPr>
@@ -2165,7 +2165,7 @@
           <p:cNvPr id="20" name="pattern">
             <a:extLst>
               <a:ext uri="{FF2B5EF4-FFF2-40B4-BE49-F238E27FC236}">
-                <a16:creationId xmlns:a16="http://schemas.microsoft.com/office/drawing/2014/main" id="{F29D3BC3-4377-189F-8BA7-26D5C0C6D25A}"/>
+                <a16:creationId xmlns:a16="http://schemas.microsoft.com/office/drawing/2014/main" id="{36861899-FAEA-7FE7-F752-F65C3E03F04D}"/>
               </a:ext>
             </a:extLst>
           </p:cNvPr>
@@ -2221,7 +2221,7 @@
           <p:cNvPr id="21" name="pattern">
             <a:extLst>
               <a:ext uri="{FF2B5EF4-FFF2-40B4-BE49-F238E27FC236}">
-                <a16:creationId xmlns:a16="http://schemas.microsoft.com/office/drawing/2014/main" id="{3D15FA4A-1E36-AAEA-434B-BA3B04D88979}"/>
+                <a16:creationId xmlns:a16="http://schemas.microsoft.com/office/drawing/2014/main" id="{FD20A8F4-A724-034A-29D8-3429914AEE28}"/>
               </a:ext>
             </a:extLst>
           </p:cNvPr>
@@ -2277,7 +2277,7 @@
           <p:cNvPr id="22" name="pattern">
             <a:extLst>
               <a:ext uri="{FF2B5EF4-FFF2-40B4-BE49-F238E27FC236}">
-                <a16:creationId xmlns:a16="http://schemas.microsoft.com/office/drawing/2014/main" id="{02F8E6F6-1B3F-8A40-4B83-D36973AF7C25}"/>
+                <a16:creationId xmlns:a16="http://schemas.microsoft.com/office/drawing/2014/main" id="{A8491821-A766-7365-239E-4F8FA3888E71}"/>
               </a:ext>
             </a:extLst>
           </p:cNvPr>
@@ -2333,7 +2333,7 @@
           <p:cNvPr id="23" name="pattern">
             <a:extLst>
               <a:ext uri="{FF2B5EF4-FFF2-40B4-BE49-F238E27FC236}">
-                <a16:creationId xmlns:a16="http://schemas.microsoft.com/office/drawing/2014/main" id="{FA8AE39A-D487-C515-9D54-5D8986A5F296}"/>
+                <a16:creationId xmlns:a16="http://schemas.microsoft.com/office/drawing/2014/main" id="{B4C3F78F-068C-7649-A4E6-4AC18DAB5DB6}"/>
               </a:ext>
             </a:extLst>
           </p:cNvPr>
@@ -2389,7 +2389,7 @@
           <p:cNvPr id="24" name="pattern">
             <a:extLst>
               <a:ext uri="{FF2B5EF4-FFF2-40B4-BE49-F238E27FC236}">
-                <a16:creationId xmlns:a16="http://schemas.microsoft.com/office/drawing/2014/main" id="{C64321CA-DF8A-8299-A13C-EEA7FD55CA9E}"/>
+                <a16:creationId xmlns:a16="http://schemas.microsoft.com/office/drawing/2014/main" id="{81FD2B7E-B98F-20A9-DEB2-A95060F91420}"/>
               </a:ext>
             </a:extLst>
           </p:cNvPr>
@@ -2445,7 +2445,7 @@
           <p:cNvPr id="25" name="pattern">
             <a:extLst>
               <a:ext uri="{FF2B5EF4-FFF2-40B4-BE49-F238E27FC236}">
-                <a16:creationId xmlns:a16="http://schemas.microsoft.com/office/drawing/2014/main" id="{A116761B-52CD-D365-9489-C2711F61C920}"/>
+                <a16:creationId xmlns:a16="http://schemas.microsoft.com/office/drawing/2014/main" id="{A7B28003-A200-9AC4-E1C6-C8A97FAF2265}"/>
               </a:ext>
             </a:extLst>
           </p:cNvPr>
@@ -2501,7 +2501,7 @@
           <p:cNvPr id="26" name="pattern">
             <a:extLst>
               <a:ext uri="{FF2B5EF4-FFF2-40B4-BE49-F238E27FC236}">
-                <a16:creationId xmlns:a16="http://schemas.microsoft.com/office/drawing/2014/main" id="{998A7BE9-87C9-9CF4-DFBF-3C37D30BB7D9}"/>
+                <a16:creationId xmlns:a16="http://schemas.microsoft.com/office/drawing/2014/main" id="{0111960A-2F09-53C8-84CC-1563135B30A6}"/>
               </a:ext>
             </a:extLst>
           </p:cNvPr>
@@ -2557,7 +2557,7 @@
           <p:cNvPr id="27" name="pattern">
             <a:extLst>
               <a:ext uri="{FF2B5EF4-FFF2-40B4-BE49-F238E27FC236}">
-                <a16:creationId xmlns:a16="http://schemas.microsoft.com/office/drawing/2014/main" id="{C7108ECF-D943-656B-0820-6593CA99D883}"/>
+                <a16:creationId xmlns:a16="http://schemas.microsoft.com/office/drawing/2014/main" id="{8FE60885-62FB-4408-031B-04CFBCF35D6A}"/>
               </a:ext>
             </a:extLst>
           </p:cNvPr>
@@ -2613,7 +2613,7 @@
           <p:cNvPr id="28" name="pattern">
             <a:extLst>
               <a:ext uri="{FF2B5EF4-FFF2-40B4-BE49-F238E27FC236}">
-                <a16:creationId xmlns:a16="http://schemas.microsoft.com/office/drawing/2014/main" id="{E079DC9C-E8BE-264A-78B3-A8BAE324C66B}"/>
+                <a16:creationId xmlns:a16="http://schemas.microsoft.com/office/drawing/2014/main" id="{6B8C2F74-CAA2-3E9F-E48D-5610FD26DA70}"/>
               </a:ext>
             </a:extLst>
           </p:cNvPr>
@@ -2669,7 +2669,7 @@
           <p:cNvPr id="29" name="pattern">
             <a:extLst>
               <a:ext uri="{FF2B5EF4-FFF2-40B4-BE49-F238E27FC236}">
-                <a16:creationId xmlns:a16="http://schemas.microsoft.com/office/drawing/2014/main" id="{0BD875CD-7EE7-905E-ED93-0402C2840577}"/>
+                <a16:creationId xmlns:a16="http://schemas.microsoft.com/office/drawing/2014/main" id="{97F21150-2DB7-7AC3-97CE-FF372088B55D}"/>
               </a:ext>
             </a:extLst>
           </p:cNvPr>
@@ -2725,7 +2725,7 @@
           <p:cNvPr id="30" name="pattern">
             <a:extLst>
               <a:ext uri="{FF2B5EF4-FFF2-40B4-BE49-F238E27FC236}">
-                <a16:creationId xmlns:a16="http://schemas.microsoft.com/office/drawing/2014/main" id="{670A6609-2179-F506-387B-89F799FCE3FD}"/>
+                <a16:creationId xmlns:a16="http://schemas.microsoft.com/office/drawing/2014/main" id="{35976413-EC7E-8210-AA97-ABA73F7E6C5F}"/>
               </a:ext>
             </a:extLst>
           </p:cNvPr>
@@ -2781,7 +2781,7 @@
           <p:cNvPr id="31" name="pattern">
             <a:extLst>
               <a:ext uri="{FF2B5EF4-FFF2-40B4-BE49-F238E27FC236}">
-                <a16:creationId xmlns:a16="http://schemas.microsoft.com/office/drawing/2014/main" id="{FCA3F3D6-1979-A97C-440E-1EE473727073}"/>
+                <a16:creationId xmlns:a16="http://schemas.microsoft.com/office/drawing/2014/main" id="{F104BFD3-AFF2-64FB-AABF-7B0F00E15A52}"/>
               </a:ext>
             </a:extLst>
           </p:cNvPr>
@@ -2837,7 +2837,7 @@
           <p:cNvPr id="32" name="pattern">
             <a:extLst>
               <a:ext uri="{FF2B5EF4-FFF2-40B4-BE49-F238E27FC236}">
-                <a16:creationId xmlns:a16="http://schemas.microsoft.com/office/drawing/2014/main" id="{861D67B8-7994-9490-34F1-E80C9FF49541}"/>
+                <a16:creationId xmlns:a16="http://schemas.microsoft.com/office/drawing/2014/main" id="{14DAF0A1-C45D-E6C6-893C-F2E5BFC95F98}"/>
               </a:ext>
             </a:extLst>
           </p:cNvPr>
@@ -2893,7 +2893,7 @@
           <p:cNvPr id="33" name="pattern">
             <a:extLst>
               <a:ext uri="{FF2B5EF4-FFF2-40B4-BE49-F238E27FC236}">
-                <a16:creationId xmlns:a16="http://schemas.microsoft.com/office/drawing/2014/main" id="{4963EE7D-FE2F-7691-298C-1375ED5E8F19}"/>
+                <a16:creationId xmlns:a16="http://schemas.microsoft.com/office/drawing/2014/main" id="{C0CC9248-E3D7-259A-B580-26A7C1FE6038}"/>
               </a:ext>
             </a:extLst>
           </p:cNvPr>
@@ -2949,7 +2949,7 @@
           <p:cNvPr id="34" name="pattern">
             <a:extLst>
               <a:ext uri="{FF2B5EF4-FFF2-40B4-BE49-F238E27FC236}">
-                <a16:creationId xmlns:a16="http://schemas.microsoft.com/office/drawing/2014/main" id="{022F879F-EC4A-1650-DCA9-974694E3B1D2}"/>
+                <a16:creationId xmlns:a16="http://schemas.microsoft.com/office/drawing/2014/main" id="{A308C804-58F6-0AD2-35CB-6347337B4771}"/>
               </a:ext>
             </a:extLst>
           </p:cNvPr>
@@ -3005,7 +3005,7 @@
           <p:cNvPr id="35" name="pattern">
             <a:extLst>
               <a:ext uri="{FF2B5EF4-FFF2-40B4-BE49-F238E27FC236}">
-                <a16:creationId xmlns:a16="http://schemas.microsoft.com/office/drawing/2014/main" id="{A138E775-F97F-8355-A874-2A054A6C6BDF}"/>
+                <a16:creationId xmlns:a16="http://schemas.microsoft.com/office/drawing/2014/main" id="{9C9D0621-63AB-55D6-9E46-CEE1C74B905B}"/>
               </a:ext>
             </a:extLst>
           </p:cNvPr>
@@ -3061,7 +3061,7 @@
           <p:cNvPr id="36" name="pattern">
             <a:extLst>
               <a:ext uri="{FF2B5EF4-FFF2-40B4-BE49-F238E27FC236}">
-                <a16:creationId xmlns:a16="http://schemas.microsoft.com/office/drawing/2014/main" id="{BA9A5FB6-9CFC-8AB0-053D-FC039DC9F257}"/>
+                <a16:creationId xmlns:a16="http://schemas.microsoft.com/office/drawing/2014/main" id="{37C7447B-C63E-EB97-3D09-347F527E1A36}"/>
               </a:ext>
             </a:extLst>
           </p:cNvPr>
@@ -3117,7 +3117,7 @@
           <p:cNvPr id="37" name="pattern">
             <a:extLst>
               <a:ext uri="{FF2B5EF4-FFF2-40B4-BE49-F238E27FC236}">
-                <a16:creationId xmlns:a16="http://schemas.microsoft.com/office/drawing/2014/main" id="{6EE9F58B-6EB2-3E01-2858-006648BF0E4B}"/>
+                <a16:creationId xmlns:a16="http://schemas.microsoft.com/office/drawing/2014/main" id="{D1B059D1-8ADA-7A2C-B49C-C80FCEF4F414}"/>
               </a:ext>
             </a:extLst>
           </p:cNvPr>
@@ -3173,7 +3173,7 @@
           <p:cNvPr id="38" name="pattern">
             <a:extLst>
               <a:ext uri="{FF2B5EF4-FFF2-40B4-BE49-F238E27FC236}">
-                <a16:creationId xmlns:a16="http://schemas.microsoft.com/office/drawing/2014/main" id="{D1DB5BA1-C207-7042-A651-432F0B653438}"/>
+                <a16:creationId xmlns:a16="http://schemas.microsoft.com/office/drawing/2014/main" id="{CA3CADD5-3A3F-E87D-70D6-9E9453B3DBDD}"/>
               </a:ext>
             </a:extLst>
           </p:cNvPr>
@@ -3229,7 +3229,7 @@
           <p:cNvPr id="39" name="pattern">
             <a:extLst>
               <a:ext uri="{FF2B5EF4-FFF2-40B4-BE49-F238E27FC236}">
-                <a16:creationId xmlns:a16="http://schemas.microsoft.com/office/drawing/2014/main" id="{A39A55D3-97AD-BD50-B063-3B3ABE46895A}"/>
+                <a16:creationId xmlns:a16="http://schemas.microsoft.com/office/drawing/2014/main" id="{D7010B54-E51D-9CD3-D401-539A477D08BF}"/>
               </a:ext>
             </a:extLst>
           </p:cNvPr>
@@ -3285,7 +3285,7 @@
           <p:cNvPr id="40" name="pattern">
             <a:extLst>
               <a:ext uri="{FF2B5EF4-FFF2-40B4-BE49-F238E27FC236}">
-                <a16:creationId xmlns:a16="http://schemas.microsoft.com/office/drawing/2014/main" id="{3D799916-B6D7-629A-D8C4-693AB415B498}"/>
+                <a16:creationId xmlns:a16="http://schemas.microsoft.com/office/drawing/2014/main" id="{2F9D738D-A7B3-49A6-6D2C-A9D624FF870E}"/>
               </a:ext>
             </a:extLst>
           </p:cNvPr>
@@ -3341,7 +3341,7 @@
           <p:cNvPr id="41" name="pattern">
             <a:extLst>
               <a:ext uri="{FF2B5EF4-FFF2-40B4-BE49-F238E27FC236}">
-                <a16:creationId xmlns:a16="http://schemas.microsoft.com/office/drawing/2014/main" id="{B61C4A56-EF1B-7F5E-0C64-9A8BC8A605B5}"/>
+                <a16:creationId xmlns:a16="http://schemas.microsoft.com/office/drawing/2014/main" id="{F5A90912-D887-9D94-280B-2B5BB23ACF72}"/>
               </a:ext>
             </a:extLst>
           </p:cNvPr>
@@ -3397,7 +3397,7 @@
           <p:cNvPr id="42" name="pattern">
             <a:extLst>
               <a:ext uri="{FF2B5EF4-FFF2-40B4-BE49-F238E27FC236}">
-                <a16:creationId xmlns:a16="http://schemas.microsoft.com/office/drawing/2014/main" id="{1A2813C7-7D28-E290-FE24-BB51D4D85365}"/>
+                <a16:creationId xmlns:a16="http://schemas.microsoft.com/office/drawing/2014/main" id="{ADB7B4C9-0B12-C161-FE1C-C1708814CD90}"/>
               </a:ext>
             </a:extLst>
           </p:cNvPr>
@@ -3453,7 +3453,7 @@
           <p:cNvPr id="43" name="pattern">
             <a:extLst>
               <a:ext uri="{FF2B5EF4-FFF2-40B4-BE49-F238E27FC236}">
-                <a16:creationId xmlns:a16="http://schemas.microsoft.com/office/drawing/2014/main" id="{1DDAE942-0AAC-11D2-DA80-1B2F93CE01F3}"/>
+                <a16:creationId xmlns:a16="http://schemas.microsoft.com/office/drawing/2014/main" id="{360EA3EF-9F09-AEF9-4DB0-AE2003C49FD4}"/>
               </a:ext>
             </a:extLst>
           </p:cNvPr>
@@ -3509,7 +3509,7 @@
           <p:cNvPr id="44" name="pattern">
             <a:extLst>
               <a:ext uri="{FF2B5EF4-FFF2-40B4-BE49-F238E27FC236}">
-                <a16:creationId xmlns:a16="http://schemas.microsoft.com/office/drawing/2014/main" id="{54CF97FE-FBA3-EB3F-7E40-3290F99EE925}"/>
+                <a16:creationId xmlns:a16="http://schemas.microsoft.com/office/drawing/2014/main" id="{42FDB45E-15D5-C511-963A-D413487D21B5}"/>
               </a:ext>
             </a:extLst>
           </p:cNvPr>
@@ -3565,7 +3565,7 @@
           <p:cNvPr id="45" name="pattern">
             <a:extLst>
               <a:ext uri="{FF2B5EF4-FFF2-40B4-BE49-F238E27FC236}">
-                <a16:creationId xmlns:a16="http://schemas.microsoft.com/office/drawing/2014/main" id="{3A33D67F-F3C3-B600-8CD7-1E9D27318231}"/>
+                <a16:creationId xmlns:a16="http://schemas.microsoft.com/office/drawing/2014/main" id="{BCD60FC3-656D-3597-F9A0-1351E39FB03E}"/>
               </a:ext>
             </a:extLst>
           </p:cNvPr>
@@ -3621,7 +3621,7 @@
           <p:cNvPr id="46" name="pattern">
             <a:extLst>
               <a:ext uri="{FF2B5EF4-FFF2-40B4-BE49-F238E27FC236}">
-                <a16:creationId xmlns:a16="http://schemas.microsoft.com/office/drawing/2014/main" id="{B0B30D11-530D-846E-D181-B87BB881F2BE}"/>
+                <a16:creationId xmlns:a16="http://schemas.microsoft.com/office/drawing/2014/main" id="{7EDA8BE1-183C-5FEB-483D-DF990C9C231B}"/>
               </a:ext>
             </a:extLst>
           </p:cNvPr>
@@ -3677,7 +3677,7 @@
           <p:cNvPr id="47" name="pattern">
             <a:extLst>
               <a:ext uri="{FF2B5EF4-FFF2-40B4-BE49-F238E27FC236}">
-                <a16:creationId xmlns:a16="http://schemas.microsoft.com/office/drawing/2014/main" id="{7F334B9C-DEC8-765E-C230-8EC9CEDAC20B}"/>
+                <a16:creationId xmlns:a16="http://schemas.microsoft.com/office/drawing/2014/main" id="{51AD0FC4-D4EA-0106-2039-945CF4BFB230}"/>
               </a:ext>
             </a:extLst>
           </p:cNvPr>
@@ -3733,7 +3733,7 @@
           <p:cNvPr id="48" name="pattern">
             <a:extLst>
               <a:ext uri="{FF2B5EF4-FFF2-40B4-BE49-F238E27FC236}">
-                <a16:creationId xmlns:a16="http://schemas.microsoft.com/office/drawing/2014/main" id="{D4402586-1EBC-DCD1-9E25-7D21328FE90C}"/>
+                <a16:creationId xmlns:a16="http://schemas.microsoft.com/office/drawing/2014/main" id="{C83F8451-32C3-E033-F952-9CD7CB615AA7}"/>
               </a:ext>
             </a:extLst>
           </p:cNvPr>
@@ -3789,7 +3789,7 @@
           <p:cNvPr id="49" name="pattern">
             <a:extLst>
               <a:ext uri="{FF2B5EF4-FFF2-40B4-BE49-F238E27FC236}">
-                <a16:creationId xmlns:a16="http://schemas.microsoft.com/office/drawing/2014/main" id="{4038BB01-EE75-B05B-8213-74708EAAC653}"/>
+                <a16:creationId xmlns:a16="http://schemas.microsoft.com/office/drawing/2014/main" id="{53EE948E-554B-2D2B-C6C4-410F23343904}"/>
               </a:ext>
             </a:extLst>
           </p:cNvPr>
@@ -3845,7 +3845,7 @@
           <p:cNvPr id="50" name="pattern">
             <a:extLst>
               <a:ext uri="{FF2B5EF4-FFF2-40B4-BE49-F238E27FC236}">
-                <a16:creationId xmlns:a16="http://schemas.microsoft.com/office/drawing/2014/main" id="{0555305B-5E83-E8DF-C454-683143E60B67}"/>
+                <a16:creationId xmlns:a16="http://schemas.microsoft.com/office/drawing/2014/main" id="{F69958CC-714A-F14B-92E0-765F4E1D3FC2}"/>
               </a:ext>
             </a:extLst>
           </p:cNvPr>
@@ -3901,7 +3901,7 @@
           <p:cNvPr id="51" name="pattern">
             <a:extLst>
               <a:ext uri="{FF2B5EF4-FFF2-40B4-BE49-F238E27FC236}">
-                <a16:creationId xmlns:a16="http://schemas.microsoft.com/office/drawing/2014/main" id="{32BC3797-1702-30DA-D130-2CB69C7CEAF7}"/>
+                <a16:creationId xmlns:a16="http://schemas.microsoft.com/office/drawing/2014/main" id="{24320D96-B137-4F87-E09F-E4574EA16DEB}"/>
               </a:ext>
             </a:extLst>
           </p:cNvPr>
@@ -3957,7 +3957,7 @@
           <p:cNvPr id="52" name="pattern">
             <a:extLst>
               <a:ext uri="{FF2B5EF4-FFF2-40B4-BE49-F238E27FC236}">
-                <a16:creationId xmlns:a16="http://schemas.microsoft.com/office/drawing/2014/main" id="{08BD37D9-8356-33D9-B080-C1F0CA875859}"/>
+                <a16:creationId xmlns:a16="http://schemas.microsoft.com/office/drawing/2014/main" id="{930D983F-8ABB-66D2-58EB-91DD45C56B0D}"/>
               </a:ext>
             </a:extLst>
           </p:cNvPr>
@@ -4013,7 +4013,7 @@
           <p:cNvPr id="53" name="pattern">
             <a:extLst>
               <a:ext uri="{FF2B5EF4-FFF2-40B4-BE49-F238E27FC236}">
-                <a16:creationId xmlns:a16="http://schemas.microsoft.com/office/drawing/2014/main" id="{5234D817-5DAB-9DEC-A4CA-689EAA19FF9D}"/>
+                <a16:creationId xmlns:a16="http://schemas.microsoft.com/office/drawing/2014/main" id="{C6AD7B95-3B8E-7BEE-12B1-856843B53B34}"/>
               </a:ext>
             </a:extLst>
           </p:cNvPr>
@@ -4069,7 +4069,7 @@
           <p:cNvPr id="54" name="pattern">
             <a:extLst>
               <a:ext uri="{FF2B5EF4-FFF2-40B4-BE49-F238E27FC236}">
-                <a16:creationId xmlns:a16="http://schemas.microsoft.com/office/drawing/2014/main" id="{77161B0F-95A7-7031-6E9C-1449E66E1014}"/>
+                <a16:creationId xmlns:a16="http://schemas.microsoft.com/office/drawing/2014/main" id="{BC604790-8AC6-D730-26E0-F5563D5A94E2}"/>
               </a:ext>
             </a:extLst>
           </p:cNvPr>
@@ -4125,7 +4125,7 @@
           <p:cNvPr id="55" name="pattern">
             <a:extLst>
               <a:ext uri="{FF2B5EF4-FFF2-40B4-BE49-F238E27FC236}">
-                <a16:creationId xmlns:a16="http://schemas.microsoft.com/office/drawing/2014/main" id="{A90CB30F-C774-D5ED-8745-6DBCF1D75BC0}"/>
+                <a16:creationId xmlns:a16="http://schemas.microsoft.com/office/drawing/2014/main" id="{E977B0BE-C451-AE23-0F9B-93CCA47AD6B5}"/>
               </a:ext>
             </a:extLst>
           </p:cNvPr>
@@ -4181,7 +4181,7 @@
           <p:cNvPr id="56" name="pattern">
             <a:extLst>
               <a:ext uri="{FF2B5EF4-FFF2-40B4-BE49-F238E27FC236}">
-                <a16:creationId xmlns:a16="http://schemas.microsoft.com/office/drawing/2014/main" id="{A74F71A9-65ED-03DC-0702-7233C15CDD91}"/>
+                <a16:creationId xmlns:a16="http://schemas.microsoft.com/office/drawing/2014/main" id="{11E0C2EB-A757-CA2C-59DD-663BB8B34044}"/>
               </a:ext>
             </a:extLst>
           </p:cNvPr>
@@ -4237,7 +4237,7 @@
           <p:cNvPr id="57" name="pattern">
             <a:extLst>
               <a:ext uri="{FF2B5EF4-FFF2-40B4-BE49-F238E27FC236}">
-                <a16:creationId xmlns:a16="http://schemas.microsoft.com/office/drawing/2014/main" id="{6C01246E-042E-3FD5-051E-4924084FF084}"/>
+                <a16:creationId xmlns:a16="http://schemas.microsoft.com/office/drawing/2014/main" id="{3F601167-6C1C-A523-273C-BE0D5F75AC8E}"/>
               </a:ext>
             </a:extLst>
           </p:cNvPr>
@@ -4293,7 +4293,7 @@
           <p:cNvPr id="58" name="pattern">
             <a:extLst>
               <a:ext uri="{FF2B5EF4-FFF2-40B4-BE49-F238E27FC236}">
-                <a16:creationId xmlns:a16="http://schemas.microsoft.com/office/drawing/2014/main" id="{DB5DB1E9-5D0A-296B-0136-AA05ABBD8A00}"/>
+                <a16:creationId xmlns:a16="http://schemas.microsoft.com/office/drawing/2014/main" id="{32D6462B-8858-3D6B-7585-CC29BFFA62CA}"/>
               </a:ext>
             </a:extLst>
           </p:cNvPr>
@@ -4349,7 +4349,7 @@
           <p:cNvPr id="59" name="pattern">
             <a:extLst>
               <a:ext uri="{FF2B5EF4-FFF2-40B4-BE49-F238E27FC236}">
-                <a16:creationId xmlns:a16="http://schemas.microsoft.com/office/drawing/2014/main" id="{89C4EF0C-3752-73B4-E6E1-1A38FE98F6D7}"/>
+                <a16:creationId xmlns:a16="http://schemas.microsoft.com/office/drawing/2014/main" id="{C8984D8F-44A9-71C7-8658-9C463489C8F8}"/>
               </a:ext>
             </a:extLst>
           </p:cNvPr>
@@ -4405,7 +4405,7 @@
           <p:cNvPr id="60" name="pattern">
             <a:extLst>
               <a:ext uri="{FF2B5EF4-FFF2-40B4-BE49-F238E27FC236}">
-                <a16:creationId xmlns:a16="http://schemas.microsoft.com/office/drawing/2014/main" id="{47040AA2-6389-9DFD-9401-0FAFE5F06C28}"/>
+                <a16:creationId xmlns:a16="http://schemas.microsoft.com/office/drawing/2014/main" id="{7F9C49F9-6C8F-B29F-A31E-8B014DFFB3C8}"/>
               </a:ext>
             </a:extLst>
           </p:cNvPr>
@@ -4461,7 +4461,7 @@
           <p:cNvPr id="61" name="pattern">
             <a:extLst>
               <a:ext uri="{FF2B5EF4-FFF2-40B4-BE49-F238E27FC236}">
-                <a16:creationId xmlns:a16="http://schemas.microsoft.com/office/drawing/2014/main" id="{1BB71FB0-38FA-7A63-7A31-C3D71384AB93}"/>
+                <a16:creationId xmlns:a16="http://schemas.microsoft.com/office/drawing/2014/main" id="{F1FF59A2-19CA-A3A2-1FA8-48B1EC9107BB}"/>
               </a:ext>
             </a:extLst>
           </p:cNvPr>
@@ -4517,7 +4517,7 @@
           <p:cNvPr id="62" name="pattern">
             <a:extLst>
               <a:ext uri="{FF2B5EF4-FFF2-40B4-BE49-F238E27FC236}">
-                <a16:creationId xmlns:a16="http://schemas.microsoft.com/office/drawing/2014/main" id="{99680DCB-387D-ED87-861A-FDB32F28150E}"/>
+                <a16:creationId xmlns:a16="http://schemas.microsoft.com/office/drawing/2014/main" id="{B2C8B92D-8B96-34A0-0E2A-67B429046E94}"/>
               </a:ext>
             </a:extLst>
           </p:cNvPr>
@@ -4573,7 +4573,7 @@
           <p:cNvPr id="63" name="pattern">
             <a:extLst>
               <a:ext uri="{FF2B5EF4-FFF2-40B4-BE49-F238E27FC236}">
-                <a16:creationId xmlns:a16="http://schemas.microsoft.com/office/drawing/2014/main" id="{D02C69D8-60BA-4D52-3C6A-DB4ECF9E2621}"/>
+                <a16:creationId xmlns:a16="http://schemas.microsoft.com/office/drawing/2014/main" id="{6048A2F8-2BD5-DD19-3837-0B05A6B26975}"/>
               </a:ext>
             </a:extLst>
           </p:cNvPr>
@@ -4629,7 +4629,7 @@
           <p:cNvPr id="64" name="pattern">
             <a:extLst>
               <a:ext uri="{FF2B5EF4-FFF2-40B4-BE49-F238E27FC236}">
-                <a16:creationId xmlns:a16="http://schemas.microsoft.com/office/drawing/2014/main" id="{D310814C-153B-9F19-B905-C80166395122}"/>
+                <a16:creationId xmlns:a16="http://schemas.microsoft.com/office/drawing/2014/main" id="{E420CEF9-F561-22BB-ADE1-64B9AC70EA91}"/>
               </a:ext>
             </a:extLst>
           </p:cNvPr>
@@ -4685,7 +4685,7 @@
           <p:cNvPr id="65" name="pattern">
             <a:extLst>
               <a:ext uri="{FF2B5EF4-FFF2-40B4-BE49-F238E27FC236}">
-                <a16:creationId xmlns:a16="http://schemas.microsoft.com/office/drawing/2014/main" id="{6B8B428E-EE62-8BB3-4989-EB3C1D59D881}"/>
+                <a16:creationId xmlns:a16="http://schemas.microsoft.com/office/drawing/2014/main" id="{EB20554C-6F49-EFCB-FAC7-3D97A0415D41}"/>
               </a:ext>
             </a:extLst>
           </p:cNvPr>
@@ -4741,7 +4741,7 @@
           <p:cNvPr id="66" name="pattern">
             <a:extLst>
               <a:ext uri="{FF2B5EF4-FFF2-40B4-BE49-F238E27FC236}">
-                <a16:creationId xmlns:a16="http://schemas.microsoft.com/office/drawing/2014/main" id="{35FF46CA-2865-3D15-E10F-71CFF0798EDE}"/>
+                <a16:creationId xmlns:a16="http://schemas.microsoft.com/office/drawing/2014/main" id="{F06FAD13-F37F-F6FF-4EEB-E7BC028B2001}"/>
               </a:ext>
             </a:extLst>
           </p:cNvPr>
@@ -4797,7 +4797,7 @@
           <p:cNvPr id="67" name="pattern">
             <a:extLst>
               <a:ext uri="{FF2B5EF4-FFF2-40B4-BE49-F238E27FC236}">
-                <a16:creationId xmlns:a16="http://schemas.microsoft.com/office/drawing/2014/main" id="{B8A7F35B-57FE-D2C1-EFDD-A67D84A011CA}"/>
+                <a16:creationId xmlns:a16="http://schemas.microsoft.com/office/drawing/2014/main" id="{419A8BA6-6106-154A-06FB-57907E2A8BD1}"/>
               </a:ext>
             </a:extLst>
           </p:cNvPr>
@@ -4853,7 +4853,7 @@
           <p:cNvPr id="68" name="pattern">
             <a:extLst>
               <a:ext uri="{FF2B5EF4-FFF2-40B4-BE49-F238E27FC236}">
-                <a16:creationId xmlns:a16="http://schemas.microsoft.com/office/drawing/2014/main" id="{154E9634-EB6B-EAB1-87DB-3F8E0C3981CC}"/>
+                <a16:creationId xmlns:a16="http://schemas.microsoft.com/office/drawing/2014/main" id="{AE4240AD-2564-CA6C-1F7A-BDFEF5FCCEED}"/>
               </a:ext>
             </a:extLst>
           </p:cNvPr>
@@ -4909,7 +4909,7 @@
           <p:cNvPr id="69" name="pattern">
             <a:extLst>
               <a:ext uri="{FF2B5EF4-FFF2-40B4-BE49-F238E27FC236}">
-                <a16:creationId xmlns:a16="http://schemas.microsoft.com/office/drawing/2014/main" id="{F73F3536-4CEC-3BEF-1A23-00EFEC0CA800}"/>
+                <a16:creationId xmlns:a16="http://schemas.microsoft.com/office/drawing/2014/main" id="{95DD4396-C89A-289B-3EB6-D5BFA8A8863B}"/>
               </a:ext>
             </a:extLst>
           </p:cNvPr>
@@ -4965,7 +4965,7 @@
           <p:cNvPr id="70" name="pattern">
             <a:extLst>
               <a:ext uri="{FF2B5EF4-FFF2-40B4-BE49-F238E27FC236}">
-                <a16:creationId xmlns:a16="http://schemas.microsoft.com/office/drawing/2014/main" id="{5967530B-C0C0-EED7-B2C3-19EC5FB1D719}"/>
+                <a16:creationId xmlns:a16="http://schemas.microsoft.com/office/drawing/2014/main" id="{F92AF7BC-3341-CB50-3F37-10DB8328BAEF}"/>
               </a:ext>
             </a:extLst>
           </p:cNvPr>
@@ -5021,7 +5021,7 @@
           <p:cNvPr id="71" name="pattern">
             <a:extLst>
               <a:ext uri="{FF2B5EF4-FFF2-40B4-BE49-F238E27FC236}">
-                <a16:creationId xmlns:a16="http://schemas.microsoft.com/office/drawing/2014/main" id="{07CFB7A1-B86A-96F1-6EB4-8C9137A282A8}"/>
+                <a16:creationId xmlns:a16="http://schemas.microsoft.com/office/drawing/2014/main" id="{A53EA75D-52CF-E172-D57C-83B3454815A7}"/>
               </a:ext>
             </a:extLst>
           </p:cNvPr>
@@ -5077,7 +5077,7 @@
           <p:cNvPr id="72" name="pattern">
             <a:extLst>
               <a:ext uri="{FF2B5EF4-FFF2-40B4-BE49-F238E27FC236}">
-                <a16:creationId xmlns:a16="http://schemas.microsoft.com/office/drawing/2014/main" id="{3A595D0F-AF2E-7CF6-095E-29C8E5810F90}"/>
+                <a16:creationId xmlns:a16="http://schemas.microsoft.com/office/drawing/2014/main" id="{7E1F3406-4D79-7280-8049-621713B6AC40}"/>
               </a:ext>
             </a:extLst>
           </p:cNvPr>
@@ -5133,7 +5133,7 @@
           <p:cNvPr id="73" name="pattern">
             <a:extLst>
               <a:ext uri="{FF2B5EF4-FFF2-40B4-BE49-F238E27FC236}">
-                <a16:creationId xmlns:a16="http://schemas.microsoft.com/office/drawing/2014/main" id="{6991B7F4-D809-D2D5-12AF-A16C3C464BC3}"/>
+                <a16:creationId xmlns:a16="http://schemas.microsoft.com/office/drawing/2014/main" id="{B88641C8-1C3B-937B-8D69-6E49AED23E88}"/>
               </a:ext>
             </a:extLst>
           </p:cNvPr>
@@ -5189,7 +5189,7 @@
           <p:cNvPr id="74" name="pattern">
             <a:extLst>
               <a:ext uri="{FF2B5EF4-FFF2-40B4-BE49-F238E27FC236}">
-                <a16:creationId xmlns:a16="http://schemas.microsoft.com/office/drawing/2014/main" id="{38594BCE-C17D-26FF-D767-EC5D643C4662}"/>
+                <a16:creationId xmlns:a16="http://schemas.microsoft.com/office/drawing/2014/main" id="{559CB5FC-1324-4C7D-0E0E-CA9094A30602}"/>
               </a:ext>
             </a:extLst>
           </p:cNvPr>
@@ -5245,7 +5245,7 @@
           <p:cNvPr id="75" name="pattern">
             <a:extLst>
               <a:ext uri="{FF2B5EF4-FFF2-40B4-BE49-F238E27FC236}">
-                <a16:creationId xmlns:a16="http://schemas.microsoft.com/office/drawing/2014/main" id="{B289164B-684F-2229-FCCD-2A002CAF74E7}"/>
+                <a16:creationId xmlns:a16="http://schemas.microsoft.com/office/drawing/2014/main" id="{D0115177-A8FE-B400-EDD5-FA9D4CFE7BAD}"/>
               </a:ext>
             </a:extLst>
           </p:cNvPr>
@@ -5301,7 +5301,7 @@
           <p:cNvPr id="76" name="pattern">
             <a:extLst>
               <a:ext uri="{FF2B5EF4-FFF2-40B4-BE49-F238E27FC236}">
-                <a16:creationId xmlns:a16="http://schemas.microsoft.com/office/drawing/2014/main" id="{02600D6B-9897-C04D-4950-9039CC4059F5}"/>
+                <a16:creationId xmlns:a16="http://schemas.microsoft.com/office/drawing/2014/main" id="{C3BA9889-A5B3-1041-9E93-8F13D9DF7FDA}"/>
               </a:ext>
             </a:extLst>
           </p:cNvPr>
@@ -5357,7 +5357,7 @@
           <p:cNvPr id="77" name="pattern">
             <a:extLst>
               <a:ext uri="{FF2B5EF4-FFF2-40B4-BE49-F238E27FC236}">
-                <a16:creationId xmlns:a16="http://schemas.microsoft.com/office/drawing/2014/main" id="{B00229FA-2A15-BF27-1A49-77FCB01C9C08}"/>
+                <a16:creationId xmlns:a16="http://schemas.microsoft.com/office/drawing/2014/main" id="{CC532F26-FB50-E91F-2202-F5EA27386647}"/>
               </a:ext>
             </a:extLst>
           </p:cNvPr>
@@ -5413,7 +5413,7 @@
           <p:cNvPr id="78" name="pattern">
             <a:extLst>
               <a:ext uri="{FF2B5EF4-FFF2-40B4-BE49-F238E27FC236}">
-                <a16:creationId xmlns:a16="http://schemas.microsoft.com/office/drawing/2014/main" id="{3C66FFBD-15CD-E9CF-DBAE-702D2D1ACF44}"/>
+                <a16:creationId xmlns:a16="http://schemas.microsoft.com/office/drawing/2014/main" id="{4F9F402A-BF2C-2BD7-06FC-F7C4AB18A7D9}"/>
               </a:ext>
             </a:extLst>
           </p:cNvPr>
@@ -5469,7 +5469,7 @@
           <p:cNvPr id="79" name="pattern">
             <a:extLst>
               <a:ext uri="{FF2B5EF4-FFF2-40B4-BE49-F238E27FC236}">
-                <a16:creationId xmlns:a16="http://schemas.microsoft.com/office/drawing/2014/main" id="{C7559B99-B552-543A-11AC-84779B512711}"/>
+                <a16:creationId xmlns:a16="http://schemas.microsoft.com/office/drawing/2014/main" id="{9094C406-0CF0-65EB-7064-071DA24C455D}"/>
               </a:ext>
             </a:extLst>
           </p:cNvPr>
@@ -5525,7 +5525,7 @@
           <p:cNvPr id="80" name="pattern">
             <a:extLst>
               <a:ext uri="{FF2B5EF4-FFF2-40B4-BE49-F238E27FC236}">
-                <a16:creationId xmlns:a16="http://schemas.microsoft.com/office/drawing/2014/main" id="{66A907B2-5FDA-FA3A-8F2C-DE686A60F19D}"/>
+                <a16:creationId xmlns:a16="http://schemas.microsoft.com/office/drawing/2014/main" id="{210A8FFF-0440-4ADB-F934-28CF2802A974}"/>
               </a:ext>
             </a:extLst>
           </p:cNvPr>
@@ -5581,7 +5581,7 @@
           <p:cNvPr id="81" name="pattern">
             <a:extLst>
               <a:ext uri="{FF2B5EF4-FFF2-40B4-BE49-F238E27FC236}">
-                <a16:creationId xmlns:a16="http://schemas.microsoft.com/office/drawing/2014/main" id="{115CB594-985C-2794-5FF8-53D0780DD842}"/>
+                <a16:creationId xmlns:a16="http://schemas.microsoft.com/office/drawing/2014/main" id="{755DD475-C3D9-C3F1-42E3-1A59853FDFA2}"/>
               </a:ext>
             </a:extLst>
           </p:cNvPr>
@@ -5637,7 +5637,7 @@
           <p:cNvPr id="82" name="pattern">
             <a:extLst>
               <a:ext uri="{FF2B5EF4-FFF2-40B4-BE49-F238E27FC236}">
-                <a16:creationId xmlns:a16="http://schemas.microsoft.com/office/drawing/2014/main" id="{1C6FF188-346F-275F-1DE9-F231A080E490}"/>
+                <a16:creationId xmlns:a16="http://schemas.microsoft.com/office/drawing/2014/main" id="{FE22BEAD-CA81-4EBE-F11D-69CEF8CB91A9}"/>
               </a:ext>
             </a:extLst>
           </p:cNvPr>
@@ -5693,7 +5693,7 @@
           <p:cNvPr id="83" name="pattern">
             <a:extLst>
               <a:ext uri="{FF2B5EF4-FFF2-40B4-BE49-F238E27FC236}">
-                <a16:creationId xmlns:a16="http://schemas.microsoft.com/office/drawing/2014/main" id="{CD930921-BC18-AD92-21DD-C263889CE913}"/>
+                <a16:creationId xmlns:a16="http://schemas.microsoft.com/office/drawing/2014/main" id="{82C4A7B6-3A45-18B3-6EB8-7B8B0C30F3C9}"/>
               </a:ext>
             </a:extLst>
           </p:cNvPr>
@@ -5749,7 +5749,7 @@
           <p:cNvPr id="84" name="pattern">
             <a:extLst>
               <a:ext uri="{FF2B5EF4-FFF2-40B4-BE49-F238E27FC236}">
-                <a16:creationId xmlns:a16="http://schemas.microsoft.com/office/drawing/2014/main" id="{98BAC04C-1ADA-4A47-2271-A087FFBB58BF}"/>
+                <a16:creationId xmlns:a16="http://schemas.microsoft.com/office/drawing/2014/main" id="{87D64AC3-7329-47D1-AB33-3F48B2F84E8F}"/>
               </a:ext>
             </a:extLst>
           </p:cNvPr>
@@ -5805,7 +5805,7 @@
           <p:cNvPr id="85" name="pattern">
             <a:extLst>
               <a:ext uri="{FF2B5EF4-FFF2-40B4-BE49-F238E27FC236}">
-                <a16:creationId xmlns:a16="http://schemas.microsoft.com/office/drawing/2014/main" id="{99CFF921-CE8C-5EA8-C519-787E9D57E36E}"/>
+                <a16:creationId xmlns:a16="http://schemas.microsoft.com/office/drawing/2014/main" id="{71CFF146-2610-0B21-7D36-572BE90A4322}"/>
               </a:ext>
             </a:extLst>
           </p:cNvPr>
@@ -5861,7 +5861,7 @@
           <p:cNvPr id="86" name="pattern">
             <a:extLst>
               <a:ext uri="{FF2B5EF4-FFF2-40B4-BE49-F238E27FC236}">
-                <a16:creationId xmlns:a16="http://schemas.microsoft.com/office/drawing/2014/main" id="{783142B9-CF45-21DE-5984-C0B552CD8EBE}"/>
+                <a16:creationId xmlns:a16="http://schemas.microsoft.com/office/drawing/2014/main" id="{783B49AC-DAAD-9BB8-7162-F9684B5E5B8E}"/>
               </a:ext>
             </a:extLst>
           </p:cNvPr>
@@ -5917,7 +5917,7 @@
           <p:cNvPr id="87" name="pattern">
             <a:extLst>
               <a:ext uri="{FF2B5EF4-FFF2-40B4-BE49-F238E27FC236}">
-                <a16:creationId xmlns:a16="http://schemas.microsoft.com/office/drawing/2014/main" id="{015B4A9C-5E8F-20DC-1261-83F03987AD5D}"/>
+                <a16:creationId xmlns:a16="http://schemas.microsoft.com/office/drawing/2014/main" id="{2C08F188-4E3C-F92B-5F01-28681BAA1F6B}"/>
               </a:ext>
             </a:extLst>
           </p:cNvPr>
@@ -5973,7 +5973,7 @@
           <p:cNvPr id="88" name="pattern">
             <a:extLst>
               <a:ext uri="{FF2B5EF4-FFF2-40B4-BE49-F238E27FC236}">
-                <a16:creationId xmlns:a16="http://schemas.microsoft.com/office/drawing/2014/main" id="{04A82ADB-7555-D582-D121-9A424D456DB1}"/>
+                <a16:creationId xmlns:a16="http://schemas.microsoft.com/office/drawing/2014/main" id="{70CDA57B-966F-A735-F366-846877DF8F1C}"/>
               </a:ext>
             </a:extLst>
           </p:cNvPr>
@@ -6029,7 +6029,7 @@
           <p:cNvPr id="89" name="pattern">
             <a:extLst>
               <a:ext uri="{FF2B5EF4-FFF2-40B4-BE49-F238E27FC236}">
-                <a16:creationId xmlns:a16="http://schemas.microsoft.com/office/drawing/2014/main" id="{5E9A9FED-DD82-0499-B50D-DB1A761A7DD4}"/>
+                <a16:creationId xmlns:a16="http://schemas.microsoft.com/office/drawing/2014/main" id="{1751931E-1D47-31A4-F377-1D6FFCC07325}"/>
               </a:ext>
             </a:extLst>
           </p:cNvPr>
@@ -6085,7 +6085,7 @@
           <p:cNvPr id="90" name="pattern">
             <a:extLst>
               <a:ext uri="{FF2B5EF4-FFF2-40B4-BE49-F238E27FC236}">
-                <a16:creationId xmlns:a16="http://schemas.microsoft.com/office/drawing/2014/main" id="{DA4A5310-656B-2BED-2E16-59E8FC04B91C}"/>
+                <a16:creationId xmlns:a16="http://schemas.microsoft.com/office/drawing/2014/main" id="{1FC51832-DD1F-4E8F-D824-05E7BC5F67C7}"/>
               </a:ext>
             </a:extLst>
           </p:cNvPr>
@@ -6141,7 +6141,7 @@
           <p:cNvPr id="91" name="pattern">
             <a:extLst>
               <a:ext uri="{FF2B5EF4-FFF2-40B4-BE49-F238E27FC236}">
-                <a16:creationId xmlns:a16="http://schemas.microsoft.com/office/drawing/2014/main" id="{617E1C6E-B794-A3EC-C0FC-E1FBA473C282}"/>
+                <a16:creationId xmlns:a16="http://schemas.microsoft.com/office/drawing/2014/main" id="{3892DCC2-A20E-ECF5-573D-74E2BD69F926}"/>
               </a:ext>
             </a:extLst>
           </p:cNvPr>
@@ -6197,7 +6197,7 @@
           <p:cNvPr id="92" name="pattern">
             <a:extLst>
               <a:ext uri="{FF2B5EF4-FFF2-40B4-BE49-F238E27FC236}">
-                <a16:creationId xmlns:a16="http://schemas.microsoft.com/office/drawing/2014/main" id="{36198F1B-5770-2C78-6835-4E0C39C65CB1}"/>
+                <a16:creationId xmlns:a16="http://schemas.microsoft.com/office/drawing/2014/main" id="{8BB3301B-9099-8FC5-57B2-0A010240FB07}"/>
               </a:ext>
             </a:extLst>
           </p:cNvPr>
@@ -6253,7 +6253,7 @@
           <p:cNvPr id="93" name="pattern">
             <a:extLst>
               <a:ext uri="{FF2B5EF4-FFF2-40B4-BE49-F238E27FC236}">
-                <a16:creationId xmlns:a16="http://schemas.microsoft.com/office/drawing/2014/main" id="{67AF1517-9F14-A3A6-424E-7A012EF3A3D1}"/>
+                <a16:creationId xmlns:a16="http://schemas.microsoft.com/office/drawing/2014/main" id="{850BE84D-6BB2-E5AF-8A6A-DF7D40321D6F}"/>
               </a:ext>
             </a:extLst>
           </p:cNvPr>
@@ -6309,7 +6309,7 @@
           <p:cNvPr id="94" name="pattern">
             <a:extLst>
               <a:ext uri="{FF2B5EF4-FFF2-40B4-BE49-F238E27FC236}">
-                <a16:creationId xmlns:a16="http://schemas.microsoft.com/office/drawing/2014/main" id="{3ED4128B-EAD0-1642-0B20-547E6AB188BE}"/>
+                <a16:creationId xmlns:a16="http://schemas.microsoft.com/office/drawing/2014/main" id="{EF22AD00-F2A3-960F-CF5A-C4665ED69C08}"/>
               </a:ext>
             </a:extLst>
           </p:cNvPr>
@@ -6365,7 +6365,7 @@
           <p:cNvPr id="95" name="pattern">
             <a:extLst>
               <a:ext uri="{FF2B5EF4-FFF2-40B4-BE49-F238E27FC236}">
-                <a16:creationId xmlns:a16="http://schemas.microsoft.com/office/drawing/2014/main" id="{6752644A-42D6-E559-1557-56F3F8E63FD5}"/>
+                <a16:creationId xmlns:a16="http://schemas.microsoft.com/office/drawing/2014/main" id="{745DE3AA-6E21-2518-CEE3-A4CBF8EC5887}"/>
               </a:ext>
             </a:extLst>
           </p:cNvPr>
@@ -6421,7 +6421,7 @@
           <p:cNvPr id="96" name="pattern">
             <a:extLst>
               <a:ext uri="{FF2B5EF4-FFF2-40B4-BE49-F238E27FC236}">
-                <a16:creationId xmlns:a16="http://schemas.microsoft.com/office/drawing/2014/main" id="{7CA5585C-89F4-0FC1-BE1A-6F148D67DE78}"/>
+                <a16:creationId xmlns:a16="http://schemas.microsoft.com/office/drawing/2014/main" id="{E910148F-62F1-D0FF-2C94-BBABAB463640}"/>
               </a:ext>
             </a:extLst>
           </p:cNvPr>
@@ -6477,7 +6477,7 @@
           <p:cNvPr id="97" name="pattern">
             <a:extLst>
               <a:ext uri="{FF2B5EF4-FFF2-40B4-BE49-F238E27FC236}">
-                <a16:creationId xmlns:a16="http://schemas.microsoft.com/office/drawing/2014/main" id="{39D08E8F-CDF1-1964-3064-A84D279ADCEE}"/>
+                <a16:creationId xmlns:a16="http://schemas.microsoft.com/office/drawing/2014/main" id="{8F7A8FBF-DD20-DCE8-020C-CBF122671386}"/>
               </a:ext>
             </a:extLst>
           </p:cNvPr>
@@ -6533,7 +6533,7 @@
           <p:cNvPr id="98" name="pattern">
             <a:extLst>
               <a:ext uri="{FF2B5EF4-FFF2-40B4-BE49-F238E27FC236}">
-                <a16:creationId xmlns:a16="http://schemas.microsoft.com/office/drawing/2014/main" id="{D69A6854-7F64-944B-7259-33241652C42F}"/>
+                <a16:creationId xmlns:a16="http://schemas.microsoft.com/office/drawing/2014/main" id="{EB4A5303-F488-54EA-C524-7EFA2FD09C51}"/>
               </a:ext>
             </a:extLst>
           </p:cNvPr>
@@ -6589,7 +6589,7 @@
           <p:cNvPr id="99" name="pattern">
             <a:extLst>
               <a:ext uri="{FF2B5EF4-FFF2-40B4-BE49-F238E27FC236}">
-                <a16:creationId xmlns:a16="http://schemas.microsoft.com/office/drawing/2014/main" id="{B4AB4C66-C13E-C297-9C04-8A8536E9AB0E}"/>
+                <a16:creationId xmlns:a16="http://schemas.microsoft.com/office/drawing/2014/main" id="{C88A0619-03C5-8161-7B13-FD46884D7AD5}"/>
               </a:ext>
             </a:extLst>
           </p:cNvPr>
@@ -6645,7 +6645,7 @@
           <p:cNvPr id="100" name="pattern">
             <a:extLst>
               <a:ext uri="{FF2B5EF4-FFF2-40B4-BE49-F238E27FC236}">
-                <a16:creationId xmlns:a16="http://schemas.microsoft.com/office/drawing/2014/main" id="{FEBF4BC3-EACD-579E-8197-B9EB8C09C317}"/>
+                <a16:creationId xmlns:a16="http://schemas.microsoft.com/office/drawing/2014/main" id="{CE3955FC-FABB-ECF9-0B19-811777F5CD60}"/>
               </a:ext>
             </a:extLst>
           </p:cNvPr>
@@ -6701,7 +6701,7 @@
           <p:cNvPr id="101" name="pattern">
             <a:extLst>
               <a:ext uri="{FF2B5EF4-FFF2-40B4-BE49-F238E27FC236}">
-                <a16:creationId xmlns:a16="http://schemas.microsoft.com/office/drawing/2014/main" id="{D2314BEF-13A4-DFCA-40C0-FF314673CC5A}"/>
+                <a16:creationId xmlns:a16="http://schemas.microsoft.com/office/drawing/2014/main" id="{45B5B861-A481-9978-C0ED-42BEAF2D89ED}"/>
               </a:ext>
             </a:extLst>
           </p:cNvPr>
@@ -6757,7 +6757,7 @@
           <p:cNvPr id="102" name="pattern">
             <a:extLst>
               <a:ext uri="{FF2B5EF4-FFF2-40B4-BE49-F238E27FC236}">
-                <a16:creationId xmlns:a16="http://schemas.microsoft.com/office/drawing/2014/main" id="{69298ADE-540D-074A-F882-8659B478AC9D}"/>
+                <a16:creationId xmlns:a16="http://schemas.microsoft.com/office/drawing/2014/main" id="{FC942755-6893-7BD5-D806-6E76C86D2522}"/>
               </a:ext>
             </a:extLst>
           </p:cNvPr>
@@ -6813,7 +6813,7 @@
           <p:cNvPr id="103" name="pattern">
             <a:extLst>
               <a:ext uri="{FF2B5EF4-FFF2-40B4-BE49-F238E27FC236}">
-                <a16:creationId xmlns:a16="http://schemas.microsoft.com/office/drawing/2014/main" id="{56D96AF2-30FF-FB99-46EF-746B8F4EF57C}"/>
+                <a16:creationId xmlns:a16="http://schemas.microsoft.com/office/drawing/2014/main" id="{8EDF93C5-ECF9-4122-D0A4-3C8A9D89CE7D}"/>
               </a:ext>
             </a:extLst>
           </p:cNvPr>
@@ -6869,7 +6869,7 @@
           <p:cNvPr id="104" name="pattern">
             <a:extLst>
               <a:ext uri="{FF2B5EF4-FFF2-40B4-BE49-F238E27FC236}">
-                <a16:creationId xmlns:a16="http://schemas.microsoft.com/office/drawing/2014/main" id="{0B5B28DD-A611-E9C1-AA2E-F46A92E5FE8A}"/>
+                <a16:creationId xmlns:a16="http://schemas.microsoft.com/office/drawing/2014/main" id="{4A38AF32-2425-42B0-43AB-4C30F4E1A92E}"/>
               </a:ext>
             </a:extLst>
           </p:cNvPr>
@@ -6925,7 +6925,7 @@
           <p:cNvPr id="105" name="pattern">
             <a:extLst>
               <a:ext uri="{FF2B5EF4-FFF2-40B4-BE49-F238E27FC236}">
-                <a16:creationId xmlns:a16="http://schemas.microsoft.com/office/drawing/2014/main" id="{3D9C718A-620A-A754-6803-EA016090E816}"/>
+                <a16:creationId xmlns:a16="http://schemas.microsoft.com/office/drawing/2014/main" id="{31AE9B51-AC33-B692-C80B-145B7A4EA460}"/>
               </a:ext>
             </a:extLst>
           </p:cNvPr>
@@ -6981,7 +6981,7 @@
           <p:cNvPr id="106" name="pattern">
             <a:extLst>
               <a:ext uri="{FF2B5EF4-FFF2-40B4-BE49-F238E27FC236}">
-                <a16:creationId xmlns:a16="http://schemas.microsoft.com/office/drawing/2014/main" id="{F81F24F7-83C0-102C-953C-B692664B24EB}"/>
+                <a16:creationId xmlns:a16="http://schemas.microsoft.com/office/drawing/2014/main" id="{5FDE79B1-8634-7819-50CC-A22F4286EC06}"/>
               </a:ext>
             </a:extLst>
           </p:cNvPr>
@@ -7037,7 +7037,7 @@
           <p:cNvPr id="107" name="pattern">
             <a:extLst>
               <a:ext uri="{FF2B5EF4-FFF2-40B4-BE49-F238E27FC236}">
-                <a16:creationId xmlns:a16="http://schemas.microsoft.com/office/drawing/2014/main" id="{CBB651F2-69AB-3E61-B041-90EE38BD50BD}"/>
+                <a16:creationId xmlns:a16="http://schemas.microsoft.com/office/drawing/2014/main" id="{DB9A03D1-0061-0406-C396-0BB81FC6D541}"/>
               </a:ext>
             </a:extLst>
           </p:cNvPr>
@@ -7093,7 +7093,7 @@
           <p:cNvPr id="108" name="pattern">
             <a:extLst>
               <a:ext uri="{FF2B5EF4-FFF2-40B4-BE49-F238E27FC236}">
-                <a16:creationId xmlns:a16="http://schemas.microsoft.com/office/drawing/2014/main" id="{6B65B8A3-9C5A-477F-6E57-EEF285FE1721}"/>
+                <a16:creationId xmlns:a16="http://schemas.microsoft.com/office/drawing/2014/main" id="{B6182A64-CB20-68C6-842E-2EB4BFE11911}"/>
               </a:ext>
             </a:extLst>
           </p:cNvPr>
@@ -7149,7 +7149,7 @@
           <p:cNvPr id="109" name="pattern">
             <a:extLst>
               <a:ext uri="{FF2B5EF4-FFF2-40B4-BE49-F238E27FC236}">
-                <a16:creationId xmlns:a16="http://schemas.microsoft.com/office/drawing/2014/main" id="{A50ECEF2-B171-B8E6-750B-97B35D9D27B5}"/>
+                <a16:creationId xmlns:a16="http://schemas.microsoft.com/office/drawing/2014/main" id="{482EBCB2-CA95-D00C-BB80-D6E7905F93D6}"/>
               </a:ext>
             </a:extLst>
           </p:cNvPr>
@@ -7205,7 +7205,7 @@
           <p:cNvPr id="110" name="pattern">
             <a:extLst>
               <a:ext uri="{FF2B5EF4-FFF2-40B4-BE49-F238E27FC236}">
-                <a16:creationId xmlns:a16="http://schemas.microsoft.com/office/drawing/2014/main" id="{93CD5EC3-C702-426D-6DCB-6D4BE1A40D0F}"/>
+                <a16:creationId xmlns:a16="http://schemas.microsoft.com/office/drawing/2014/main" id="{0E16BD39-70E3-5F26-22A2-B3A7BC14421B}"/>
               </a:ext>
             </a:extLst>
           </p:cNvPr>
@@ -7261,7 +7261,7 @@
           <p:cNvPr id="111" name="pattern">
             <a:extLst>
               <a:ext uri="{FF2B5EF4-FFF2-40B4-BE49-F238E27FC236}">
-                <a16:creationId xmlns:a16="http://schemas.microsoft.com/office/drawing/2014/main" id="{3339BE1F-A5E2-9D85-5D9D-6BE1603E716A}"/>
+                <a16:creationId xmlns:a16="http://schemas.microsoft.com/office/drawing/2014/main" id="{761E11A1-5B41-9DEA-CEA0-44DBABD51964}"/>
               </a:ext>
             </a:extLst>
           </p:cNvPr>
@@ -7317,7 +7317,7 @@
           <p:cNvPr id="112" name="pattern">
             <a:extLst>
               <a:ext uri="{FF2B5EF4-FFF2-40B4-BE49-F238E27FC236}">
-                <a16:creationId xmlns:a16="http://schemas.microsoft.com/office/drawing/2014/main" id="{466E2A8E-5BA1-F8E3-22B5-C5BC5A801E0F}"/>
+                <a16:creationId xmlns:a16="http://schemas.microsoft.com/office/drawing/2014/main" id="{982FCDE1-4EBE-24A0-D224-7B16E08F2F75}"/>
               </a:ext>
             </a:extLst>
           </p:cNvPr>
@@ -7373,7 +7373,7 @@
           <p:cNvPr id="113" name="pattern">
             <a:extLst>
               <a:ext uri="{FF2B5EF4-FFF2-40B4-BE49-F238E27FC236}">
-                <a16:creationId xmlns:a16="http://schemas.microsoft.com/office/drawing/2014/main" id="{77E73CDF-F58D-2535-AC95-A1BA7119B45E}"/>
+                <a16:creationId xmlns:a16="http://schemas.microsoft.com/office/drawing/2014/main" id="{6B3B8C08-0430-C14D-70FD-6B68B9270EAF}"/>
               </a:ext>
             </a:extLst>
           </p:cNvPr>
@@ -7429,7 +7429,7 @@
           <p:cNvPr id="114" name="pattern">
             <a:extLst>
               <a:ext uri="{FF2B5EF4-FFF2-40B4-BE49-F238E27FC236}">
-                <a16:creationId xmlns:a16="http://schemas.microsoft.com/office/drawing/2014/main" id="{1819A82E-FE97-1ABB-CF68-2326B5DB3E7E}"/>
+                <a16:creationId xmlns:a16="http://schemas.microsoft.com/office/drawing/2014/main" id="{D5419DD3-455E-AB1E-2720-F7D20E4B9623}"/>
               </a:ext>
             </a:extLst>
           </p:cNvPr>
@@ -7485,7 +7485,7 @@
           <p:cNvPr id="115" name="pattern">
             <a:extLst>
               <a:ext uri="{FF2B5EF4-FFF2-40B4-BE49-F238E27FC236}">
-                <a16:creationId xmlns:a16="http://schemas.microsoft.com/office/drawing/2014/main" id="{157DB7A3-35D5-0F4C-0D5A-FAFC58E5F187}"/>
+                <a16:creationId xmlns:a16="http://schemas.microsoft.com/office/drawing/2014/main" id="{E08E88D3-3272-B256-E836-C1FEB181FC45}"/>
               </a:ext>
             </a:extLst>
           </p:cNvPr>
@@ -7541,7 +7541,7 @@
           <p:cNvPr id="116" name="pattern">
             <a:extLst>
               <a:ext uri="{FF2B5EF4-FFF2-40B4-BE49-F238E27FC236}">
-                <a16:creationId xmlns:a16="http://schemas.microsoft.com/office/drawing/2014/main" id="{0868BF19-B490-1A5B-7D39-7C93C0022023}"/>
+                <a16:creationId xmlns:a16="http://schemas.microsoft.com/office/drawing/2014/main" id="{51F8AAF2-A728-9E38-F52A-418277258991}"/>
               </a:ext>
             </a:extLst>
           </p:cNvPr>
@@ -7597,7 +7597,7 @@
           <p:cNvPr id="117" name="pattern">
             <a:extLst>
               <a:ext uri="{FF2B5EF4-FFF2-40B4-BE49-F238E27FC236}">
-                <a16:creationId xmlns:a16="http://schemas.microsoft.com/office/drawing/2014/main" id="{77CB5C80-CB0C-5221-C3A2-C102670DE1A9}"/>
+                <a16:creationId xmlns:a16="http://schemas.microsoft.com/office/drawing/2014/main" id="{62ACEF5B-6A35-8DDD-99F9-1AA6C5F91158}"/>
               </a:ext>
             </a:extLst>
           </p:cNvPr>
@@ -7653,7 +7653,7 @@
           <p:cNvPr id="118" name="pattern">
             <a:extLst>
               <a:ext uri="{FF2B5EF4-FFF2-40B4-BE49-F238E27FC236}">
-                <a16:creationId xmlns:a16="http://schemas.microsoft.com/office/drawing/2014/main" id="{4645F35F-3BD6-471A-EE17-3F032D780335}"/>
+                <a16:creationId xmlns:a16="http://schemas.microsoft.com/office/drawing/2014/main" id="{E88C3906-AFE6-540A-AE37-D7B096DA04D7}"/>
               </a:ext>
             </a:extLst>
           </p:cNvPr>
@@ -7709,7 +7709,7 @@
           <p:cNvPr id="119" name="pattern">
             <a:extLst>
               <a:ext uri="{FF2B5EF4-FFF2-40B4-BE49-F238E27FC236}">
-                <a16:creationId xmlns:a16="http://schemas.microsoft.com/office/drawing/2014/main" id="{CB91E212-4C7C-25D6-5964-C7F8390EFD6F}"/>
+                <a16:creationId xmlns:a16="http://schemas.microsoft.com/office/drawing/2014/main" id="{5479BD61-B43B-7414-3F94-D5C3AA17B15D}"/>
               </a:ext>
             </a:extLst>
           </p:cNvPr>
@@ -7765,7 +7765,7 @@
           <p:cNvPr id="120" name="pattern">
             <a:extLst>
               <a:ext uri="{FF2B5EF4-FFF2-40B4-BE49-F238E27FC236}">
-                <a16:creationId xmlns:a16="http://schemas.microsoft.com/office/drawing/2014/main" id="{3B1BE5CB-C332-42BC-102B-FFC64F382F8B}"/>
+                <a16:creationId xmlns:a16="http://schemas.microsoft.com/office/drawing/2014/main" id="{17F378AF-38C4-F95D-362A-483119874084}"/>
               </a:ext>
             </a:extLst>
           </p:cNvPr>
@@ -7821,7 +7821,7 @@
           <p:cNvPr id="121" name="pattern">
             <a:extLst>
               <a:ext uri="{FF2B5EF4-FFF2-40B4-BE49-F238E27FC236}">
-                <a16:creationId xmlns:a16="http://schemas.microsoft.com/office/drawing/2014/main" id="{A9A14A48-D0C0-2491-B24C-1E958B8DB6D9}"/>
+                <a16:creationId xmlns:a16="http://schemas.microsoft.com/office/drawing/2014/main" id="{74A0AB09-E531-9F15-CFFB-EDBA68DBEB2D}"/>
               </a:ext>
             </a:extLst>
           </p:cNvPr>
@@ -7877,7 +7877,7 @@
           <p:cNvPr id="122" name="pattern">
             <a:extLst>
               <a:ext uri="{FF2B5EF4-FFF2-40B4-BE49-F238E27FC236}">
-                <a16:creationId xmlns:a16="http://schemas.microsoft.com/office/drawing/2014/main" id="{08620136-AAE8-B82B-9FC9-8D2749D0530E}"/>
+                <a16:creationId xmlns:a16="http://schemas.microsoft.com/office/drawing/2014/main" id="{C20EC97A-6A20-41E9-3F6D-921203AD4FED}"/>
               </a:ext>
             </a:extLst>
           </p:cNvPr>
@@ -7933,7 +7933,7 @@
           <p:cNvPr id="123" name="pattern">
             <a:extLst>
               <a:ext uri="{FF2B5EF4-FFF2-40B4-BE49-F238E27FC236}">
-                <a16:creationId xmlns:a16="http://schemas.microsoft.com/office/drawing/2014/main" id="{C9AF1473-50F0-F353-AEFE-7969DFC09237}"/>
+                <a16:creationId xmlns:a16="http://schemas.microsoft.com/office/drawing/2014/main" id="{A5E9CDAF-CAF5-8F82-8D52-464FFF97C6B5}"/>
               </a:ext>
             </a:extLst>
           </p:cNvPr>
@@ -7989,7 +7989,7 @@
           <p:cNvPr id="124" name="pattern">
             <a:extLst>
               <a:ext uri="{FF2B5EF4-FFF2-40B4-BE49-F238E27FC236}">
-                <a16:creationId xmlns:a16="http://schemas.microsoft.com/office/drawing/2014/main" id="{2DB41F47-8126-C054-4F29-3B892C0E504E}"/>
+                <a16:creationId xmlns:a16="http://schemas.microsoft.com/office/drawing/2014/main" id="{F506D1ED-B40B-C569-85BA-705A8A0F30B7}"/>
               </a:ext>
             </a:extLst>
           </p:cNvPr>
@@ -8045,7 +8045,7 @@
           <p:cNvPr id="125" name="pattern">
             <a:extLst>
               <a:ext uri="{FF2B5EF4-FFF2-40B4-BE49-F238E27FC236}">
-                <a16:creationId xmlns:a16="http://schemas.microsoft.com/office/drawing/2014/main" id="{18DD8F01-7F3C-CE53-962E-0F559A379233}"/>
+                <a16:creationId xmlns:a16="http://schemas.microsoft.com/office/drawing/2014/main" id="{CD72A51F-A84E-F953-9698-5F5B49A14139}"/>
               </a:ext>
             </a:extLst>
           </p:cNvPr>
@@ -8101,7 +8101,7 @@
           <p:cNvPr id="126" name="pattern">
             <a:extLst>
               <a:ext uri="{FF2B5EF4-FFF2-40B4-BE49-F238E27FC236}">
-                <a16:creationId xmlns:a16="http://schemas.microsoft.com/office/drawing/2014/main" id="{BDC97040-8FA3-5D55-85CC-DDD7735FFE0E}"/>
+                <a16:creationId xmlns:a16="http://schemas.microsoft.com/office/drawing/2014/main" id="{7DAE6025-56BC-7B9D-DF7E-8EBCFB74E9A3}"/>
               </a:ext>
             </a:extLst>
           </p:cNvPr>
@@ -8157,7 +8157,7 @@
           <p:cNvPr id="127" name="pattern">
             <a:extLst>
               <a:ext uri="{FF2B5EF4-FFF2-40B4-BE49-F238E27FC236}">
-                <a16:creationId xmlns:a16="http://schemas.microsoft.com/office/drawing/2014/main" id="{089326BB-68D2-4E5E-98C9-F6113EEE44B0}"/>
+                <a16:creationId xmlns:a16="http://schemas.microsoft.com/office/drawing/2014/main" id="{249871B9-5930-09E8-9CB3-42AD7653317D}"/>
               </a:ext>
             </a:extLst>
           </p:cNvPr>
@@ -8213,7 +8213,7 @@
           <p:cNvPr id="128" name="pattern">
             <a:extLst>
               <a:ext uri="{FF2B5EF4-FFF2-40B4-BE49-F238E27FC236}">
-                <a16:creationId xmlns:a16="http://schemas.microsoft.com/office/drawing/2014/main" id="{0F9C5FC2-9CE2-D651-0A17-334214BD8959}"/>
+                <a16:creationId xmlns:a16="http://schemas.microsoft.com/office/drawing/2014/main" id="{240792F3-E7B5-821D-9FF8-24A2E589FE1D}"/>
               </a:ext>
             </a:extLst>
           </p:cNvPr>
@@ -8269,7 +8269,7 @@
           <p:cNvPr id="129" name="pattern">
             <a:extLst>
               <a:ext uri="{FF2B5EF4-FFF2-40B4-BE49-F238E27FC236}">
-                <a16:creationId xmlns:a16="http://schemas.microsoft.com/office/drawing/2014/main" id="{D3F5C66B-56A1-832E-F0D1-468E9B9C4450}"/>
+                <a16:creationId xmlns:a16="http://schemas.microsoft.com/office/drawing/2014/main" id="{5165C4A5-1CE0-6465-48DD-7E4B5C441561}"/>
               </a:ext>
             </a:extLst>
           </p:cNvPr>
@@ -8325,7 +8325,7 @@
           <p:cNvPr id="130" name="pattern">
             <a:extLst>
               <a:ext uri="{FF2B5EF4-FFF2-40B4-BE49-F238E27FC236}">
-                <a16:creationId xmlns:a16="http://schemas.microsoft.com/office/drawing/2014/main" id="{E7054A89-52B6-450A-9358-E45F1326B9C9}"/>
+                <a16:creationId xmlns:a16="http://schemas.microsoft.com/office/drawing/2014/main" id="{E7149AD0-9819-360C-6823-A08D800738B5}"/>
               </a:ext>
             </a:extLst>
           </p:cNvPr>
@@ -8381,7 +8381,7 @@
           <p:cNvPr id="131" name="pattern">
             <a:extLst>
               <a:ext uri="{FF2B5EF4-FFF2-40B4-BE49-F238E27FC236}">
-                <a16:creationId xmlns:a16="http://schemas.microsoft.com/office/drawing/2014/main" id="{78405BF8-9ECA-B9D9-2E24-DCED28EBBF80}"/>
+                <a16:creationId xmlns:a16="http://schemas.microsoft.com/office/drawing/2014/main" id="{0223F372-980E-971F-2E00-57B491DA5F32}"/>
               </a:ext>
             </a:extLst>
           </p:cNvPr>
@@ -8437,7 +8437,7 @@
           <p:cNvPr id="132" name="pattern">
             <a:extLst>
               <a:ext uri="{FF2B5EF4-FFF2-40B4-BE49-F238E27FC236}">
-                <a16:creationId xmlns:a16="http://schemas.microsoft.com/office/drawing/2014/main" id="{FB6F5DCE-9F57-ABF9-AFD2-C37EF6627D07}"/>
+                <a16:creationId xmlns:a16="http://schemas.microsoft.com/office/drawing/2014/main" id="{6D70A8B7-583F-7331-2D9A-F9EBAD0EAD68}"/>
               </a:ext>
             </a:extLst>
           </p:cNvPr>
@@ -8493,7 +8493,7 @@
           <p:cNvPr id="133" name="pattern">
             <a:extLst>
               <a:ext uri="{FF2B5EF4-FFF2-40B4-BE49-F238E27FC236}">
-                <a16:creationId xmlns:a16="http://schemas.microsoft.com/office/drawing/2014/main" id="{B9C9B5E7-A4E3-030A-A30C-53608A60BD9D}"/>
+                <a16:creationId xmlns:a16="http://schemas.microsoft.com/office/drawing/2014/main" id="{531E3ABD-AAF9-259E-3744-6BB4609D8117}"/>
               </a:ext>
             </a:extLst>
           </p:cNvPr>
@@ -8549,7 +8549,7 @@
           <p:cNvPr id="134" name="pattern">
             <a:extLst>
               <a:ext uri="{FF2B5EF4-FFF2-40B4-BE49-F238E27FC236}">
-                <a16:creationId xmlns:a16="http://schemas.microsoft.com/office/drawing/2014/main" id="{63F12FB9-F548-B7DA-2903-91C3D8207FCF}"/>
+                <a16:creationId xmlns:a16="http://schemas.microsoft.com/office/drawing/2014/main" id="{BF16D464-5865-C8D4-3927-B9A3A698852C}"/>
               </a:ext>
             </a:extLst>
           </p:cNvPr>
@@ -8605,7 +8605,7 @@
           <p:cNvPr id="135" name="pattern">
             <a:extLst>
               <a:ext uri="{FF2B5EF4-FFF2-40B4-BE49-F238E27FC236}">
-                <a16:creationId xmlns:a16="http://schemas.microsoft.com/office/drawing/2014/main" id="{7AD227A6-54DE-798E-19B8-78C0FD9B8D7D}"/>
+                <a16:creationId xmlns:a16="http://schemas.microsoft.com/office/drawing/2014/main" id="{9BCB984D-D612-45AB-F625-FD61AA54E482}"/>
               </a:ext>
             </a:extLst>
           </p:cNvPr>
@@ -8659,7 +8659,7 @@
     </p:spTree>
     <p:extLst>
       <p:ext uri="{BB962C8B-B14F-4D97-AF65-F5344CB8AC3E}">
-        <p14:creationId xmlns:p14="http://schemas.microsoft.com/office/powerpoint/2010/main" val="3194265300"/>
+        <p14:creationId xmlns:p14="http://schemas.microsoft.com/office/powerpoint/2010/main" val="2046629036"/>
       </p:ext>
     </p:extLst>
   </p:cSld>
@@ -8739,7 +8739,7 @@
           <a:bodyPr/>
           <a:lstStyle/>
           <a:p>
-            <a:fld id="{784F70EA-3FD3-4955-90A7-9334D40F9408}" type="datetimeFigureOut">
+            <a:fld id="{9B28EAFD-CAE0-41EE-B184-026F7F5DC9D1}" type="datetimeFigureOut">
               <a:rPr lang="en-US" smtClean="0"/>
               <a:t>10/3/2026</a:t>
             </a:fld>
@@ -8781,7 +8781,7 @@
           <a:bodyPr/>
           <a:lstStyle/>
           <a:p>
-            <a:fld id="{41D0EC4C-452D-4CB3-8553-3AAC20353B0B}" type="slidenum">
+            <a:fld id="{DC138929-C395-43AB-82B0-A2EFC9DE35E2}" type="slidenum">
               <a:rPr lang="en-US" smtClean="0"/>
               <a:t>‹#›</a:t>
             </a:fld>
@@ -8794,7 +8794,7 @@
           <p:cNvPr id="6" name="item_1_title">
             <a:extLst>
               <a:ext uri="{FF2B5EF4-FFF2-40B4-BE49-F238E27FC236}">
-                <a16:creationId xmlns:a16="http://schemas.microsoft.com/office/drawing/2014/main" id="{49026F26-CF06-BB11-1756-B5936A5DAA6F}"/>
+                <a16:creationId xmlns:a16="http://schemas.microsoft.com/office/drawing/2014/main" id="{DF2C6DE3-54E2-350E-2FA8-673C7130FAAA}"/>
               </a:ext>
             </a:extLst>
           </p:cNvPr>
@@ -8822,7 +8822,7 @@
               </a:spcBef>
               <a:buFontTx/>
               <a:buNone/>
-              <a:defRPr sz="2200" b="1">
+              <a:defRPr sz="2000" b="1">
                 <a:solidFill>
                   <a:schemeClr val="accent1">
                     <a:lumMod val="50000"/>
@@ -8846,7 +8846,7 @@
           <p:cNvPr id="7" name="item_1">
             <a:extLst>
               <a:ext uri="{FF2B5EF4-FFF2-40B4-BE49-F238E27FC236}">
-                <a16:creationId xmlns:a16="http://schemas.microsoft.com/office/drawing/2014/main" id="{533CDB13-B20C-B4F0-B319-23FFE47EEE42}"/>
+                <a16:creationId xmlns:a16="http://schemas.microsoft.com/office/drawing/2014/main" id="{887BF53E-2823-4C9F-39D9-24F41FC16EA0}"/>
               </a:ext>
             </a:extLst>
           </p:cNvPr>
@@ -8894,7 +8894,7 @@
           <p:cNvPr id="8" name="item_2_title">
             <a:extLst>
               <a:ext uri="{FF2B5EF4-FFF2-40B4-BE49-F238E27FC236}">
-                <a16:creationId xmlns:a16="http://schemas.microsoft.com/office/drawing/2014/main" id="{2BCA8E88-48DD-E037-1A57-4681A65D860F}"/>
+                <a16:creationId xmlns:a16="http://schemas.microsoft.com/office/drawing/2014/main" id="{BDCF33E0-7C18-A1E6-29E1-24BE80FC2D35}"/>
               </a:ext>
             </a:extLst>
           </p:cNvPr>
@@ -8925,7 +8925,7 @@
               </a:spcBef>
               <a:buFontTx/>
               <a:buNone/>
-              <a:defRPr sz="2200" b="1">
+              <a:defRPr sz="2000" b="1">
                 <a:solidFill>
                   <a:schemeClr val="accent1">
                     <a:lumMod val="50000"/>
@@ -8949,7 +8949,7 @@
           <p:cNvPr id="9" name="item_2">
             <a:extLst>
               <a:ext uri="{FF2B5EF4-FFF2-40B4-BE49-F238E27FC236}">
-                <a16:creationId xmlns:a16="http://schemas.microsoft.com/office/drawing/2014/main" id="{C4F0BEAA-0093-1438-1B30-DD2F44EEB9AC}"/>
+                <a16:creationId xmlns:a16="http://schemas.microsoft.com/office/drawing/2014/main" id="{ED73AB1E-D089-A0A2-6F55-E8148E436293}"/>
               </a:ext>
             </a:extLst>
           </p:cNvPr>
@@ -8997,7 +8997,7 @@
           <p:cNvPr id="10" name="item_3_title">
             <a:extLst>
               <a:ext uri="{FF2B5EF4-FFF2-40B4-BE49-F238E27FC236}">
-                <a16:creationId xmlns:a16="http://schemas.microsoft.com/office/drawing/2014/main" id="{3BE86A38-A114-DEB6-6A03-792B221F65EE}"/>
+                <a16:creationId xmlns:a16="http://schemas.microsoft.com/office/drawing/2014/main" id="{BA674BBD-A584-CFF0-A844-AD0B06C074CC}"/>
               </a:ext>
             </a:extLst>
           </p:cNvPr>
@@ -9028,7 +9028,7 @@
               </a:spcBef>
               <a:buFontTx/>
               <a:buNone/>
-              <a:defRPr sz="2200" b="1">
+              <a:defRPr sz="2000" b="1">
                 <a:solidFill>
                   <a:schemeClr val="accent1">
                     <a:lumMod val="50000"/>
@@ -9052,7 +9052,7 @@
           <p:cNvPr id="11" name="item_3">
             <a:extLst>
               <a:ext uri="{FF2B5EF4-FFF2-40B4-BE49-F238E27FC236}">
-                <a16:creationId xmlns:a16="http://schemas.microsoft.com/office/drawing/2014/main" id="{3FC924AC-110F-97B2-2AFF-0F7427A6D59C}"/>
+                <a16:creationId xmlns:a16="http://schemas.microsoft.com/office/drawing/2014/main" id="{A21D0425-A5A7-4B80-DCAE-99762F2300CE}"/>
               </a:ext>
             </a:extLst>
           </p:cNvPr>
@@ -9100,7 +9100,7 @@
           <p:cNvPr id="12" name="item_4_title">
             <a:extLst>
               <a:ext uri="{FF2B5EF4-FFF2-40B4-BE49-F238E27FC236}">
-                <a16:creationId xmlns:a16="http://schemas.microsoft.com/office/drawing/2014/main" id="{17E01E67-CA96-B3F8-4832-8520FDFE3F5B}"/>
+                <a16:creationId xmlns:a16="http://schemas.microsoft.com/office/drawing/2014/main" id="{1D8156A5-A5B6-E6AF-CDDC-E3537281F432}"/>
               </a:ext>
             </a:extLst>
           </p:cNvPr>
@@ -9131,7 +9131,7 @@
               </a:spcBef>
               <a:buFontTx/>
               <a:buNone/>
-              <a:defRPr sz="2200" b="1">
+              <a:defRPr sz="2000" b="1">
                 <a:solidFill>
                   <a:schemeClr val="accent1">
                     <a:lumMod val="50000"/>
@@ -9155,7 +9155,7 @@
           <p:cNvPr id="13" name="item_4">
             <a:extLst>
               <a:ext uri="{FF2B5EF4-FFF2-40B4-BE49-F238E27FC236}">
-                <a16:creationId xmlns:a16="http://schemas.microsoft.com/office/drawing/2014/main" id="{ACB2F2E2-7FDF-F113-08EB-B7F81106E400}"/>
+                <a16:creationId xmlns:a16="http://schemas.microsoft.com/office/drawing/2014/main" id="{EFD7DBCC-BCAA-74E1-73F3-598CED9A59D1}"/>
               </a:ext>
             </a:extLst>
           </p:cNvPr>
@@ -9203,7 +9203,7 @@
           <p:cNvPr id="14" name="source">
             <a:extLst>
               <a:ext uri="{FF2B5EF4-FFF2-40B4-BE49-F238E27FC236}">
-                <a16:creationId xmlns:a16="http://schemas.microsoft.com/office/drawing/2014/main" id="{1F9C8181-915D-31F7-3D0A-BB5168AE61A8}"/>
+                <a16:creationId xmlns:a16="http://schemas.microsoft.com/office/drawing/2014/main" id="{976B0C87-9389-CDA7-8EEB-E2D64305AEAF}"/>
               </a:ext>
             </a:extLst>
           </p:cNvPr>
@@ -9260,7 +9260,7 @@
     </p:spTree>
     <p:extLst>
       <p:ext uri="{BB962C8B-B14F-4D97-AF65-F5344CB8AC3E}">
-        <p14:creationId xmlns:p14="http://schemas.microsoft.com/office/powerpoint/2010/main" val="3390805125"/>
+        <p14:creationId xmlns:p14="http://schemas.microsoft.com/office/powerpoint/2010/main" val="1817239394"/>
       </p:ext>
     </p:extLst>
   </p:cSld>
@@ -9340,7 +9340,7 @@
           <a:bodyPr/>
           <a:lstStyle/>
           <a:p>
-            <a:fld id="{784F70EA-3FD3-4955-90A7-9334D40F9408}" type="datetimeFigureOut">
+            <a:fld id="{9B28EAFD-CAE0-41EE-B184-026F7F5DC9D1}" type="datetimeFigureOut">
               <a:rPr lang="en-US" smtClean="0"/>
               <a:t>10/3/2026</a:t>
             </a:fld>
@@ -9382,7 +9382,7 @@
           <a:bodyPr/>
           <a:lstStyle/>
           <a:p>
-            <a:fld id="{41D0EC4C-452D-4CB3-8553-3AAC20353B0B}" type="slidenum">
+            <a:fld id="{DC138929-C395-43AB-82B0-A2EFC9DE35E2}" type="slidenum">
               <a:rPr lang="en-US" smtClean="0"/>
               <a:t>‹#›</a:t>
             </a:fld>
@@ -9395,7 +9395,7 @@
           <p:cNvPr id="6" name="body">
             <a:extLst>
               <a:ext uri="{FF2B5EF4-FFF2-40B4-BE49-F238E27FC236}">
-                <a16:creationId xmlns:a16="http://schemas.microsoft.com/office/drawing/2014/main" id="{6BF67B85-D985-5E19-5ECD-4DF9CAEC7073}"/>
+                <a16:creationId xmlns:a16="http://schemas.microsoft.com/office/drawing/2014/main" id="{1D306FB2-6929-9F70-186E-1823C385B834}"/>
               </a:ext>
             </a:extLst>
           </p:cNvPr>
@@ -9440,7 +9440,7 @@
           <p:cNvPr id="7" name="source">
             <a:extLst>
               <a:ext uri="{FF2B5EF4-FFF2-40B4-BE49-F238E27FC236}">
-                <a16:creationId xmlns:a16="http://schemas.microsoft.com/office/drawing/2014/main" id="{837C8745-7D5F-3E17-6AC7-DCBB03996E93}"/>
+                <a16:creationId xmlns:a16="http://schemas.microsoft.com/office/drawing/2014/main" id="{39FAD188-1D52-F50B-3BF8-E400B037BE49}"/>
               </a:ext>
             </a:extLst>
           </p:cNvPr>
@@ -9497,7 +9497,7 @@
     </p:spTree>
     <p:extLst>
       <p:ext uri="{BB962C8B-B14F-4D97-AF65-F5344CB8AC3E}">
-        <p14:creationId xmlns:p14="http://schemas.microsoft.com/office/powerpoint/2010/main" val="726284757"/>
+        <p14:creationId xmlns:p14="http://schemas.microsoft.com/office/powerpoint/2010/main" val="479551985"/>
       </p:ext>
     </p:extLst>
   </p:cSld>
@@ -9577,7 +9577,7 @@
           <a:bodyPr/>
           <a:lstStyle/>
           <a:p>
-            <a:fld id="{784F70EA-3FD3-4955-90A7-9334D40F9408}" type="datetimeFigureOut">
+            <a:fld id="{9B28EAFD-CAE0-41EE-B184-026F7F5DC9D1}" type="datetimeFigureOut">
               <a:rPr lang="en-US" smtClean="0"/>
               <a:t>10/3/2026</a:t>
             </a:fld>
@@ -9619,7 +9619,7 @@
           <a:bodyPr/>
           <a:lstStyle/>
           <a:p>
-            <a:fld id="{41D0EC4C-452D-4CB3-8553-3AAC20353B0B}" type="slidenum">
+            <a:fld id="{DC138929-C395-43AB-82B0-A2EFC9DE35E2}" type="slidenum">
               <a:rPr lang="en-US" smtClean="0"/>
               <a:t>‹#›</a:t>
             </a:fld>
@@ -9632,7 +9632,7 @@
           <p:cNvPr id="6" name="item_1_title">
             <a:extLst>
               <a:ext uri="{FF2B5EF4-FFF2-40B4-BE49-F238E27FC236}">
-                <a16:creationId xmlns:a16="http://schemas.microsoft.com/office/drawing/2014/main" id="{E9778E85-33FA-6B59-02C0-A4F3D8F244AF}"/>
+                <a16:creationId xmlns:a16="http://schemas.microsoft.com/office/drawing/2014/main" id="{9F2721EF-8DD2-504A-B4CE-56C27B32B93A}"/>
               </a:ext>
             </a:extLst>
           </p:cNvPr>
@@ -9645,8 +9645,8 @@
         </p:nvSpPr>
         <p:spPr>
           <a:xfrm>
-            <a:off x="853677" y="2364972"/>
-            <a:ext cx="3857479" cy="356920"/>
+            <a:off x="831634" y="2339424"/>
+            <a:ext cx="3901565" cy="371948"/>
           </a:xfrm>
         </p:spPr>
         <p:txBody>
@@ -9660,7 +9660,7 @@
               </a:spcBef>
               <a:buFontTx/>
               <a:buNone/>
-              <a:defRPr sz="2200" b="1">
+              <a:defRPr sz="2000" b="1">
                 <a:solidFill>
                   <a:schemeClr val="accent1">
                     <a:lumMod val="50000"/>
@@ -9684,7 +9684,7 @@
           <p:cNvPr id="7" name="item_1">
             <a:extLst>
               <a:ext uri="{FF2B5EF4-FFF2-40B4-BE49-F238E27FC236}">
-                <a16:creationId xmlns:a16="http://schemas.microsoft.com/office/drawing/2014/main" id="{D4F2F93F-A142-562D-D907-05ABF4AD3FFE}"/>
+                <a16:creationId xmlns:a16="http://schemas.microsoft.com/office/drawing/2014/main" id="{2B399000-024B-068D-1145-34FCB4A74F84}"/>
               </a:ext>
             </a:extLst>
           </p:cNvPr>
@@ -9697,8 +9697,8 @@
         </p:nvSpPr>
         <p:spPr>
           <a:xfrm>
-            <a:off x="853677" y="2721892"/>
-            <a:ext cx="3857479" cy="856608"/>
+            <a:off x="831634" y="2711373"/>
+            <a:ext cx="3901565" cy="892675"/>
           </a:xfrm>
           <a:prstGeom prst="rect">
             <a:avLst/>
@@ -9732,7 +9732,7 @@
           <p:cNvPr id="8" name="item_2_title">
             <a:extLst>
               <a:ext uri="{FF2B5EF4-FFF2-40B4-BE49-F238E27FC236}">
-                <a16:creationId xmlns:a16="http://schemas.microsoft.com/office/drawing/2014/main" id="{AD76B02B-2B45-A58D-911F-211466271700}"/>
+                <a16:creationId xmlns:a16="http://schemas.microsoft.com/office/drawing/2014/main" id="{B9B2FB8B-B118-87CF-6A41-47E49F455AD3}"/>
               </a:ext>
             </a:extLst>
           </p:cNvPr>
@@ -9745,8 +9745,8 @@
         </p:nvSpPr>
         <p:spPr>
           <a:xfrm>
-            <a:off x="5240182" y="2364972"/>
-            <a:ext cx="3857479" cy="356920"/>
+            <a:off x="5218139" y="2339424"/>
+            <a:ext cx="3901565" cy="371948"/>
           </a:xfrm>
           <a:prstGeom prst="rect">
             <a:avLst/>
@@ -9763,7 +9763,7 @@
               </a:spcBef>
               <a:buFontTx/>
               <a:buNone/>
-              <a:defRPr sz="2200" b="1">
+              <a:defRPr sz="2000" b="1">
                 <a:solidFill>
                   <a:schemeClr val="accent1">
                     <a:lumMod val="50000"/>
@@ -9787,7 +9787,7 @@
           <p:cNvPr id="9" name="item_2">
             <a:extLst>
               <a:ext uri="{FF2B5EF4-FFF2-40B4-BE49-F238E27FC236}">
-                <a16:creationId xmlns:a16="http://schemas.microsoft.com/office/drawing/2014/main" id="{D439CC92-8317-B467-1037-0F3014D43390}"/>
+                <a16:creationId xmlns:a16="http://schemas.microsoft.com/office/drawing/2014/main" id="{225A9FD1-0185-73C0-8174-939477DC5AF8}"/>
               </a:ext>
             </a:extLst>
           </p:cNvPr>
@@ -9800,8 +9800,8 @@
         </p:nvSpPr>
         <p:spPr>
           <a:xfrm>
-            <a:off x="5240182" y="2721892"/>
-            <a:ext cx="3857479" cy="856608"/>
+            <a:off x="5218139" y="2711373"/>
+            <a:ext cx="3901565" cy="892675"/>
           </a:xfrm>
           <a:prstGeom prst="rect">
             <a:avLst/>
@@ -9835,7 +9835,7 @@
           <p:cNvPr id="10" name="item_3_title">
             <a:extLst>
               <a:ext uri="{FF2B5EF4-FFF2-40B4-BE49-F238E27FC236}">
-                <a16:creationId xmlns:a16="http://schemas.microsoft.com/office/drawing/2014/main" id="{3AFFC751-0BC2-2698-3356-A03F632A9A44}"/>
+                <a16:creationId xmlns:a16="http://schemas.microsoft.com/office/drawing/2014/main" id="{1119F258-A331-1869-72B8-1CCF1720CAC1}"/>
               </a:ext>
             </a:extLst>
           </p:cNvPr>
@@ -9848,8 +9848,8 @@
         </p:nvSpPr>
         <p:spPr>
           <a:xfrm>
-            <a:off x="853677" y="4191650"/>
-            <a:ext cx="3857479" cy="356920"/>
+            <a:off x="831634" y="4166103"/>
+            <a:ext cx="3901565" cy="371948"/>
           </a:xfrm>
           <a:prstGeom prst="rect">
             <a:avLst/>
@@ -9866,7 +9866,7 @@
               </a:spcBef>
               <a:buFontTx/>
               <a:buNone/>
-              <a:defRPr sz="2200" b="1">
+              <a:defRPr sz="2000" b="1">
                 <a:solidFill>
                   <a:schemeClr val="accent1">
                     <a:lumMod val="50000"/>
@@ -9890,7 +9890,7 @@
           <p:cNvPr id="11" name="item_3">
             <a:extLst>
               <a:ext uri="{FF2B5EF4-FFF2-40B4-BE49-F238E27FC236}">
-                <a16:creationId xmlns:a16="http://schemas.microsoft.com/office/drawing/2014/main" id="{B8EB7106-2194-0375-9C6E-5AC5366A1FF0}"/>
+                <a16:creationId xmlns:a16="http://schemas.microsoft.com/office/drawing/2014/main" id="{D45D37B4-9D66-269B-CBB3-B04A41129DEE}"/>
               </a:ext>
             </a:extLst>
           </p:cNvPr>
@@ -9903,8 +9903,8 @@
         </p:nvSpPr>
         <p:spPr>
           <a:xfrm>
-            <a:off x="853677" y="4548570"/>
-            <a:ext cx="3857479" cy="856608"/>
+            <a:off x="831634" y="4538052"/>
+            <a:ext cx="3901565" cy="892675"/>
           </a:xfrm>
           <a:prstGeom prst="rect">
             <a:avLst/>
@@ -9938,7 +9938,7 @@
           <p:cNvPr id="12" name="item_4_title">
             <a:extLst>
               <a:ext uri="{FF2B5EF4-FFF2-40B4-BE49-F238E27FC236}">
-                <a16:creationId xmlns:a16="http://schemas.microsoft.com/office/drawing/2014/main" id="{98A162F5-80BE-1EAE-DC18-93755FB7E9BC}"/>
+                <a16:creationId xmlns:a16="http://schemas.microsoft.com/office/drawing/2014/main" id="{A691EB70-42E0-4889-6EF5-091FF535C417}"/>
               </a:ext>
             </a:extLst>
           </p:cNvPr>
@@ -9951,8 +9951,8 @@
         </p:nvSpPr>
         <p:spPr>
           <a:xfrm>
-            <a:off x="5240182" y="4191650"/>
-            <a:ext cx="3857479" cy="356920"/>
+            <a:off x="5218139" y="4166103"/>
+            <a:ext cx="3901565" cy="371948"/>
           </a:xfrm>
           <a:prstGeom prst="rect">
             <a:avLst/>
@@ -9969,7 +9969,7 @@
               </a:spcBef>
               <a:buFontTx/>
               <a:buNone/>
-              <a:defRPr sz="2200" b="1">
+              <a:defRPr sz="2000" b="1">
                 <a:solidFill>
                   <a:schemeClr val="accent1">
                     <a:lumMod val="50000"/>
@@ -9993,7 +9993,7 @@
           <p:cNvPr id="13" name="item_4">
             <a:extLst>
               <a:ext uri="{FF2B5EF4-FFF2-40B4-BE49-F238E27FC236}">
-                <a16:creationId xmlns:a16="http://schemas.microsoft.com/office/drawing/2014/main" id="{8AB0A192-5A53-50BF-568E-41424745B5E5}"/>
+                <a16:creationId xmlns:a16="http://schemas.microsoft.com/office/drawing/2014/main" id="{8510CBF8-C60D-6970-0E23-C29D13B8FC00}"/>
               </a:ext>
             </a:extLst>
           </p:cNvPr>
@@ -10006,8 +10006,8 @@
         </p:nvSpPr>
         <p:spPr>
           <a:xfrm>
-            <a:off x="5240182" y="4548570"/>
-            <a:ext cx="3857479" cy="856608"/>
+            <a:off x="5218139" y="4538052"/>
+            <a:ext cx="3901565" cy="892675"/>
           </a:xfrm>
           <a:prstGeom prst="rect">
             <a:avLst/>
@@ -10041,7 +10041,7 @@
           <p:cNvPr id="14" name="source">
             <a:extLst>
               <a:ext uri="{FF2B5EF4-FFF2-40B4-BE49-F238E27FC236}">
-                <a16:creationId xmlns:a16="http://schemas.microsoft.com/office/drawing/2014/main" id="{5CE99F02-92BF-157A-207F-74313597B88F}"/>
+                <a16:creationId xmlns:a16="http://schemas.microsoft.com/office/drawing/2014/main" id="{19B400BA-02FD-4169-90D1-7E069F736F56}"/>
               </a:ext>
             </a:extLst>
           </p:cNvPr>
@@ -10098,7 +10098,7 @@
     </p:spTree>
     <p:extLst>
       <p:ext uri="{BB962C8B-B14F-4D97-AF65-F5344CB8AC3E}">
-        <p14:creationId xmlns:p14="http://schemas.microsoft.com/office/powerpoint/2010/main" val="3242946439"/>
+        <p14:creationId xmlns:p14="http://schemas.microsoft.com/office/powerpoint/2010/main" val="2005723420"/>
       </p:ext>
     </p:extLst>
   </p:cSld>
@@ -10178,7 +10178,7 @@
           <a:bodyPr/>
           <a:lstStyle/>
           <a:p>
-            <a:fld id="{784F70EA-3FD3-4955-90A7-9334D40F9408}" type="datetimeFigureOut">
+            <a:fld id="{9B28EAFD-CAE0-41EE-B184-026F7F5DC9D1}" type="datetimeFigureOut">
               <a:rPr lang="en-US" smtClean="0"/>
               <a:t>10/3/2026</a:t>
             </a:fld>
@@ -10220,7 +10220,7 @@
           <a:bodyPr/>
           <a:lstStyle/>
           <a:p>
-            <a:fld id="{41D0EC4C-452D-4CB3-8553-3AAC20353B0B}" type="slidenum">
+            <a:fld id="{DC138929-C395-43AB-82B0-A2EFC9DE35E2}" type="slidenum">
               <a:rPr lang="en-US" smtClean="0"/>
               <a:t>‹#›</a:t>
             </a:fld>
@@ -10233,7 +10233,7 @@
           <p:cNvPr id="6" name="body">
             <a:extLst>
               <a:ext uri="{FF2B5EF4-FFF2-40B4-BE49-F238E27FC236}">
-                <a16:creationId xmlns:a16="http://schemas.microsoft.com/office/drawing/2014/main" id="{3E85B029-6D67-73B4-6091-26E481BFA122}"/>
+                <a16:creationId xmlns:a16="http://schemas.microsoft.com/office/drawing/2014/main" id="{E268C9EE-9161-98CB-2BC7-1D2943F8852A}"/>
               </a:ext>
             </a:extLst>
           </p:cNvPr>
@@ -10273,7 +10273,7 @@
           <p:cNvPr id="7" name="kpi_value_1">
             <a:extLst>
               <a:ext uri="{FF2B5EF4-FFF2-40B4-BE49-F238E27FC236}">
-                <a16:creationId xmlns:a16="http://schemas.microsoft.com/office/drawing/2014/main" id="{4A69FB34-251E-9859-2249-C57CF8A33356}"/>
+                <a16:creationId xmlns:a16="http://schemas.microsoft.com/office/drawing/2014/main" id="{A46CB8D6-711B-29C9-6536-E20C6A638BCE}"/>
               </a:ext>
             </a:extLst>
           </p:cNvPr>
@@ -10328,7 +10328,7 @@
           <p:cNvPr id="8" name="kpi_label_1">
             <a:extLst>
               <a:ext uri="{FF2B5EF4-FFF2-40B4-BE49-F238E27FC236}">
-                <a16:creationId xmlns:a16="http://schemas.microsoft.com/office/drawing/2014/main" id="{82C87AA3-88FB-FA09-97AB-424431E71302}"/>
+                <a16:creationId xmlns:a16="http://schemas.microsoft.com/office/drawing/2014/main" id="{CFB8D306-DCCE-4BC3-7ECA-589CBA8448A4}"/>
               </a:ext>
             </a:extLst>
           </p:cNvPr>
@@ -10359,7 +10359,7 @@
               </a:spcBef>
               <a:buFontTx/>
               <a:buNone/>
-              <a:defRPr sz="1800"/>
+              <a:defRPr sz="2000"/>
             </a:lvl1pPr>
           </a:lstStyle>
           <a:p>
@@ -10376,7 +10376,7 @@
           <p:cNvPr id="9" name="source">
             <a:extLst>
               <a:ext uri="{FF2B5EF4-FFF2-40B4-BE49-F238E27FC236}">
-                <a16:creationId xmlns:a16="http://schemas.microsoft.com/office/drawing/2014/main" id="{EB678289-8898-08E0-4823-7AABD56A4921}"/>
+                <a16:creationId xmlns:a16="http://schemas.microsoft.com/office/drawing/2014/main" id="{0E86D159-3CDC-E989-2635-B4E3B5926C9A}"/>
               </a:ext>
             </a:extLst>
           </p:cNvPr>
@@ -10433,7 +10433,7 @@
     </p:spTree>
     <p:extLst>
       <p:ext uri="{BB962C8B-B14F-4D97-AF65-F5344CB8AC3E}">
-        <p14:creationId xmlns:p14="http://schemas.microsoft.com/office/powerpoint/2010/main" val="1036439416"/>
+        <p14:creationId xmlns:p14="http://schemas.microsoft.com/office/powerpoint/2010/main" val="1000725704"/>
       </p:ext>
     </p:extLst>
   </p:cSld>
@@ -10513,7 +10513,7 @@
           <a:bodyPr/>
           <a:lstStyle/>
           <a:p>
-            <a:fld id="{784F70EA-3FD3-4955-90A7-9334D40F9408}" type="datetimeFigureOut">
+            <a:fld id="{9B28EAFD-CAE0-41EE-B184-026F7F5DC9D1}" type="datetimeFigureOut">
               <a:rPr lang="en-US" smtClean="0"/>
               <a:t>10/3/2026</a:t>
             </a:fld>
@@ -10555,7 +10555,7 @@
           <a:bodyPr/>
           <a:lstStyle/>
           <a:p>
-            <a:fld id="{41D0EC4C-452D-4CB3-8553-3AAC20353B0B}" type="slidenum">
+            <a:fld id="{DC138929-C395-43AB-82B0-A2EFC9DE35E2}" type="slidenum">
               <a:rPr lang="en-US" smtClean="0"/>
               <a:t>‹#›</a:t>
             </a:fld>
@@ -10568,7 +10568,7 @@
           <p:cNvPr id="6" name="body">
             <a:extLst>
               <a:ext uri="{FF2B5EF4-FFF2-40B4-BE49-F238E27FC236}">
-                <a16:creationId xmlns:a16="http://schemas.microsoft.com/office/drawing/2014/main" id="{B36E0A4C-6E01-23F2-3325-7BD33E98F1C5}"/>
+                <a16:creationId xmlns:a16="http://schemas.microsoft.com/office/drawing/2014/main" id="{80C0633C-F83D-31E0-FD13-C23E0F74432A}"/>
               </a:ext>
             </a:extLst>
           </p:cNvPr>
@@ -10608,7 +10608,7 @@
           <p:cNvPr id="7" name="kpi_value_1">
             <a:extLst>
               <a:ext uri="{FF2B5EF4-FFF2-40B4-BE49-F238E27FC236}">
-                <a16:creationId xmlns:a16="http://schemas.microsoft.com/office/drawing/2014/main" id="{BFBAFCA3-E9E7-5851-6F73-D4B3C5EC9EC5}"/>
+                <a16:creationId xmlns:a16="http://schemas.microsoft.com/office/drawing/2014/main" id="{AAC884EF-710B-566E-4338-0988DA34ADB6}"/>
               </a:ext>
             </a:extLst>
           </p:cNvPr>
@@ -10621,111 +10621,8 @@
         </p:nvSpPr>
         <p:spPr>
           <a:xfrm>
-            <a:off x="853676" y="2364973"/>
-            <a:ext cx="3945650" cy="1466635"/>
-          </a:xfrm>
-          <a:prstGeom prst="rect">
-            <a:avLst/>
-          </a:prstGeom>
-        </p:spPr>
-        <p:txBody>
-          <a:bodyPr wrap="square" anchor="t">
-            <a:noAutofit/>
-          </a:bodyPr>
-          <a:lstStyle>
-            <a:lvl1pPr marL="0" indent="0">
-              <a:spcBef>
-                <a:spcPts val="0"/>
-              </a:spcBef>
-              <a:buFontTx/>
-              <a:buNone/>
-              <a:defRPr sz="8400" b="1">
-                <a:solidFill>
-                  <a:schemeClr val="accent1">
-                    <a:lumMod val="50000"/>
-                  </a:schemeClr>
-                </a:solidFill>
-                <a:latin typeface="+mj-lt"/>
-              </a:defRPr>
-            </a:lvl1pPr>
-          </a:lstStyle>
-          <a:p>
-            <a:pPr lvl="0"/>
-            <a:r>
-              <a:rPr lang="en-US"/>
-              <a:t>kpi_value_1</a:t>
-            </a:r>
-          </a:p>
-        </p:txBody>
-      </p:sp>
-      <p:sp>
-        <p:nvSpPr>
-          <p:cNvPr id="8" name="kpi_label_1">
-            <a:extLst>
-              <a:ext uri="{FF2B5EF4-FFF2-40B4-BE49-F238E27FC236}">
-                <a16:creationId xmlns:a16="http://schemas.microsoft.com/office/drawing/2014/main" id="{C74DED02-0F21-A556-4F3D-401EDF32B759}"/>
-              </a:ext>
-            </a:extLst>
-          </p:cNvPr>
-          <p:cNvSpPr>
-            <a:spLocks noGrp="1"/>
-          </p:cNvSpPr>
-          <p:nvPr>
-            <p:ph type="body" sz="quarter" idx="15" hasCustomPrompt="1"/>
-          </p:nvPr>
-        </p:nvSpPr>
-        <p:spPr>
-          <a:xfrm>
-            <a:off x="853676" y="3831608"/>
-            <a:ext cx="3945650" cy="814797"/>
-          </a:xfrm>
-          <a:prstGeom prst="rect">
-            <a:avLst/>
-          </a:prstGeom>
-        </p:spPr>
-        <p:txBody>
-          <a:bodyPr wrap="square" anchor="t">
-            <a:noAutofit/>
-          </a:bodyPr>
-          <a:lstStyle>
-            <a:lvl1pPr marL="0" indent="0">
-              <a:spcBef>
-                <a:spcPts val="0"/>
-              </a:spcBef>
-              <a:buFontTx/>
-              <a:buNone/>
-              <a:defRPr sz="1800"/>
-            </a:lvl1pPr>
-          </a:lstStyle>
-          <a:p>
-            <a:pPr lvl="0"/>
-            <a:r>
-              <a:rPr lang="en-US"/>
-              <a:t>kpi_label_1</a:t>
-            </a:r>
-          </a:p>
-        </p:txBody>
-      </p:sp>
-      <p:sp>
-        <p:nvSpPr>
-          <p:cNvPr id="9" name="kpi_value_2">
-            <a:extLst>
-              <a:ext uri="{FF2B5EF4-FFF2-40B4-BE49-F238E27FC236}">
-                <a16:creationId xmlns:a16="http://schemas.microsoft.com/office/drawing/2014/main" id="{4A7DDC68-0A23-9800-91F8-838A7F634106}"/>
-              </a:ext>
-            </a:extLst>
-          </p:cNvPr>
-          <p:cNvSpPr>
-            <a:spLocks noGrp="1"/>
-          </p:cNvSpPr>
-          <p:nvPr>
-            <p:ph type="body" sz="quarter" idx="16" hasCustomPrompt="1"/>
-          </p:nvPr>
-        </p:nvSpPr>
-        <p:spPr>
-          <a:xfrm>
-            <a:off x="5328352" y="2364973"/>
-            <a:ext cx="3769308" cy="536233"/>
+            <a:off x="831633" y="2339424"/>
+            <a:ext cx="3989736" cy="1499482"/>
           </a:xfrm>
           <a:prstGeom prst="rect">
             <a:avLst/>
@@ -10756,31 +10653,31 @@
             <a:pPr lvl="0"/>
             <a:r>
               <a:rPr lang="en-US"/>
-              <a:t>kpi_value_2</a:t>
+              <a:t>kpi_value_1</a:t>
             </a:r>
           </a:p>
         </p:txBody>
       </p:sp>
       <p:sp>
         <p:nvSpPr>
-          <p:cNvPr id="10" name="kpi_label_2">
-            <a:extLst>
-              <a:ext uri="{FF2B5EF4-FFF2-40B4-BE49-F238E27FC236}">
-                <a16:creationId xmlns:a16="http://schemas.microsoft.com/office/drawing/2014/main" id="{DAC34156-220E-4786-B746-95C3EC304BBF}"/>
-              </a:ext>
-            </a:extLst>
-          </p:cNvPr>
-          <p:cNvSpPr>
-            <a:spLocks noGrp="1"/>
-          </p:cNvSpPr>
-          <p:nvPr>
-            <p:ph type="body" sz="quarter" idx="17" hasCustomPrompt="1"/>
-          </p:nvPr>
-        </p:nvSpPr>
-        <p:spPr>
-          <a:xfrm>
-            <a:off x="5328352" y="2901206"/>
-            <a:ext cx="3769308" cy="297907"/>
+          <p:cNvPr id="8" name="kpi_label_1">
+            <a:extLst>
+              <a:ext uri="{FF2B5EF4-FFF2-40B4-BE49-F238E27FC236}">
+                <a16:creationId xmlns:a16="http://schemas.microsoft.com/office/drawing/2014/main" id="{E4890A66-1BBB-E0F8-9729-A2E9EA84A0A8}"/>
+              </a:ext>
+            </a:extLst>
+          </p:cNvPr>
+          <p:cNvSpPr>
+            <a:spLocks noGrp="1"/>
+          </p:cNvSpPr>
+          <p:nvPr>
+            <p:ph type="body" sz="quarter" idx="15" hasCustomPrompt="1"/>
+          </p:nvPr>
+        </p:nvSpPr>
+        <p:spPr>
+          <a:xfrm>
+            <a:off x="831633" y="3838906"/>
+            <a:ext cx="3989736" cy="833046"/>
           </a:xfrm>
           <a:prstGeom prst="rect">
             <a:avLst/>
@@ -10797,38 +10694,38 @@
               </a:spcBef>
               <a:buFontTx/>
               <a:buNone/>
-              <a:defRPr sz="1800"/>
+              <a:defRPr sz="2000"/>
             </a:lvl1pPr>
           </a:lstStyle>
           <a:p>
             <a:pPr lvl="0"/>
             <a:r>
               <a:rPr lang="en-US"/>
-              <a:t>kpi_label_2</a:t>
+              <a:t>kpi_label_1</a:t>
             </a:r>
           </a:p>
         </p:txBody>
       </p:sp>
       <p:sp>
         <p:nvSpPr>
-          <p:cNvPr id="11" name="kpi_value_3">
-            <a:extLst>
-              <a:ext uri="{FF2B5EF4-FFF2-40B4-BE49-F238E27FC236}">
-                <a16:creationId xmlns:a16="http://schemas.microsoft.com/office/drawing/2014/main" id="{57899088-FCC2-D631-AD4A-6B34F2700580}"/>
-              </a:ext>
-            </a:extLst>
-          </p:cNvPr>
-          <p:cNvSpPr>
-            <a:spLocks noGrp="1"/>
-          </p:cNvSpPr>
-          <p:nvPr>
-            <p:ph type="body" sz="quarter" idx="18" hasCustomPrompt="1"/>
-          </p:nvPr>
-        </p:nvSpPr>
-        <p:spPr>
-          <a:xfrm>
-            <a:off x="5328353" y="3812264"/>
-            <a:ext cx="1620141" cy="536233"/>
+          <p:cNvPr id="9" name="kpi_value_2">
+            <a:extLst>
+              <a:ext uri="{FF2B5EF4-FFF2-40B4-BE49-F238E27FC236}">
+                <a16:creationId xmlns:a16="http://schemas.microsoft.com/office/drawing/2014/main" id="{53D12DEB-BD6F-DD85-4E33-0004FB5DB431}"/>
+              </a:ext>
+            </a:extLst>
+          </p:cNvPr>
+          <p:cNvSpPr>
+            <a:spLocks noGrp="1"/>
+          </p:cNvSpPr>
+          <p:nvPr>
+            <p:ph type="body" sz="quarter" idx="16" hasCustomPrompt="1"/>
+          </p:nvPr>
+        </p:nvSpPr>
+        <p:spPr>
+          <a:xfrm>
+            <a:off x="5306309" y="2339425"/>
+            <a:ext cx="3813394" cy="569081"/>
           </a:xfrm>
           <a:prstGeom prst="rect">
             <a:avLst/>
@@ -10859,31 +10756,31 @@
             <a:pPr lvl="0"/>
             <a:r>
               <a:rPr lang="en-US"/>
-              <a:t>kpi_value_3</a:t>
+              <a:t>kpi_value_2</a:t>
             </a:r>
           </a:p>
         </p:txBody>
       </p:sp>
       <p:sp>
         <p:nvSpPr>
-          <p:cNvPr id="12" name="kpi_label_3">
-            <a:extLst>
-              <a:ext uri="{FF2B5EF4-FFF2-40B4-BE49-F238E27FC236}">
-                <a16:creationId xmlns:a16="http://schemas.microsoft.com/office/drawing/2014/main" id="{270ED93F-2513-B8D6-2833-013014CB24F0}"/>
-              </a:ext>
-            </a:extLst>
-          </p:cNvPr>
-          <p:cNvSpPr>
-            <a:spLocks noGrp="1"/>
-          </p:cNvSpPr>
-          <p:nvPr>
-            <p:ph type="body" sz="quarter" idx="19" hasCustomPrompt="1"/>
-          </p:nvPr>
-        </p:nvSpPr>
-        <p:spPr>
-          <a:xfrm>
-            <a:off x="5328353" y="4348498"/>
-            <a:ext cx="1620141" cy="297907"/>
+          <p:cNvPr id="10" name="kpi_label_2">
+            <a:extLst>
+              <a:ext uri="{FF2B5EF4-FFF2-40B4-BE49-F238E27FC236}">
+                <a16:creationId xmlns:a16="http://schemas.microsoft.com/office/drawing/2014/main" id="{71A19FEF-30E4-AD89-166D-8C7F37C6A60C}"/>
+              </a:ext>
+            </a:extLst>
+          </p:cNvPr>
+          <p:cNvSpPr>
+            <a:spLocks noGrp="1"/>
+          </p:cNvSpPr>
+          <p:nvPr>
+            <p:ph type="body" sz="quarter" idx="17" hasCustomPrompt="1"/>
+          </p:nvPr>
+        </p:nvSpPr>
+        <p:spPr>
+          <a:xfrm>
+            <a:off x="5306309" y="2908505"/>
+            <a:ext cx="3813394" cy="316156"/>
           </a:xfrm>
           <a:prstGeom prst="rect">
             <a:avLst/>
@@ -10900,38 +10797,38 @@
               </a:spcBef>
               <a:buFontTx/>
               <a:buNone/>
-              <a:defRPr sz="1800"/>
+              <a:defRPr sz="2000"/>
             </a:lvl1pPr>
           </a:lstStyle>
           <a:p>
             <a:pPr lvl="0"/>
             <a:r>
               <a:rPr lang="en-US"/>
-              <a:t>kpi_label_3</a:t>
+              <a:t>kpi_label_2</a:t>
             </a:r>
           </a:p>
         </p:txBody>
       </p:sp>
       <p:sp>
         <p:nvSpPr>
-          <p:cNvPr id="13" name="kpi_value_4">
-            <a:extLst>
-              <a:ext uri="{FF2B5EF4-FFF2-40B4-BE49-F238E27FC236}">
-                <a16:creationId xmlns:a16="http://schemas.microsoft.com/office/drawing/2014/main" id="{FECAAB5C-E5AE-0693-9AC2-8707AC610B29}"/>
-              </a:ext>
-            </a:extLst>
-          </p:cNvPr>
-          <p:cNvSpPr>
-            <a:spLocks noGrp="1"/>
-          </p:cNvSpPr>
-          <p:nvPr>
-            <p:ph type="body" sz="quarter" idx="20" hasCustomPrompt="1"/>
-          </p:nvPr>
-        </p:nvSpPr>
-        <p:spPr>
-          <a:xfrm>
-            <a:off x="7477520" y="3812264"/>
-            <a:ext cx="1620141" cy="536233"/>
+          <p:cNvPr id="11" name="kpi_value_3">
+            <a:extLst>
+              <a:ext uri="{FF2B5EF4-FFF2-40B4-BE49-F238E27FC236}">
+                <a16:creationId xmlns:a16="http://schemas.microsoft.com/office/drawing/2014/main" id="{7277008D-5631-AEF7-2B87-B25E398A99C1}"/>
+              </a:ext>
+            </a:extLst>
+          </p:cNvPr>
+          <p:cNvSpPr>
+            <a:spLocks noGrp="1"/>
+          </p:cNvSpPr>
+          <p:nvPr>
+            <p:ph type="body" sz="quarter" idx="18" hasCustomPrompt="1"/>
+          </p:nvPr>
+        </p:nvSpPr>
+        <p:spPr>
+          <a:xfrm>
+            <a:off x="5306310" y="3786717"/>
+            <a:ext cx="1664227" cy="569081"/>
           </a:xfrm>
           <a:prstGeom prst="rect">
             <a:avLst/>
@@ -10962,31 +10859,31 @@
             <a:pPr lvl="0"/>
             <a:r>
               <a:rPr lang="en-US"/>
-              <a:t>kpi_value_4</a:t>
+              <a:t>kpi_value_3</a:t>
             </a:r>
           </a:p>
         </p:txBody>
       </p:sp>
       <p:sp>
         <p:nvSpPr>
-          <p:cNvPr id="14" name="kpi_label_4">
-            <a:extLst>
-              <a:ext uri="{FF2B5EF4-FFF2-40B4-BE49-F238E27FC236}">
-                <a16:creationId xmlns:a16="http://schemas.microsoft.com/office/drawing/2014/main" id="{DB203F5D-1124-678B-2466-34994CF92AB9}"/>
-              </a:ext>
-            </a:extLst>
-          </p:cNvPr>
-          <p:cNvSpPr>
-            <a:spLocks noGrp="1"/>
-          </p:cNvSpPr>
-          <p:nvPr>
-            <p:ph type="body" sz="quarter" idx="21" hasCustomPrompt="1"/>
-          </p:nvPr>
-        </p:nvSpPr>
-        <p:spPr>
-          <a:xfrm>
-            <a:off x="7477520" y="4348498"/>
-            <a:ext cx="1620141" cy="297907"/>
+          <p:cNvPr id="12" name="kpi_label_3">
+            <a:extLst>
+              <a:ext uri="{FF2B5EF4-FFF2-40B4-BE49-F238E27FC236}">
+                <a16:creationId xmlns:a16="http://schemas.microsoft.com/office/drawing/2014/main" id="{754AFC53-664E-8BFE-0EBA-307D141CE68C}"/>
+              </a:ext>
+            </a:extLst>
+          </p:cNvPr>
+          <p:cNvSpPr>
+            <a:spLocks noGrp="1"/>
+          </p:cNvSpPr>
+          <p:nvPr>
+            <p:ph type="body" sz="quarter" idx="19" hasCustomPrompt="1"/>
+          </p:nvPr>
+        </p:nvSpPr>
+        <p:spPr>
+          <a:xfrm>
+            <a:off x="5306310" y="4355796"/>
+            <a:ext cx="1664227" cy="316156"/>
           </a:xfrm>
           <a:prstGeom prst="rect">
             <a:avLst/>
@@ -11003,7 +10900,110 @@
               </a:spcBef>
               <a:buFontTx/>
               <a:buNone/>
-              <a:defRPr sz="1800"/>
+              <a:defRPr sz="2000"/>
+            </a:lvl1pPr>
+          </a:lstStyle>
+          <a:p>
+            <a:pPr lvl="0"/>
+            <a:r>
+              <a:rPr lang="en-US"/>
+              <a:t>kpi_label_3</a:t>
+            </a:r>
+          </a:p>
+        </p:txBody>
+      </p:sp>
+      <p:sp>
+        <p:nvSpPr>
+          <p:cNvPr id="13" name="kpi_value_4">
+            <a:extLst>
+              <a:ext uri="{FF2B5EF4-FFF2-40B4-BE49-F238E27FC236}">
+                <a16:creationId xmlns:a16="http://schemas.microsoft.com/office/drawing/2014/main" id="{1D059EBC-BEB7-F057-E94A-2CBB9C850E8A}"/>
+              </a:ext>
+            </a:extLst>
+          </p:cNvPr>
+          <p:cNvSpPr>
+            <a:spLocks noGrp="1"/>
+          </p:cNvSpPr>
+          <p:nvPr>
+            <p:ph type="body" sz="quarter" idx="20" hasCustomPrompt="1"/>
+          </p:nvPr>
+        </p:nvSpPr>
+        <p:spPr>
+          <a:xfrm>
+            <a:off x="7455477" y="3786717"/>
+            <a:ext cx="1664227" cy="569081"/>
+          </a:xfrm>
+          <a:prstGeom prst="rect">
+            <a:avLst/>
+          </a:prstGeom>
+        </p:spPr>
+        <p:txBody>
+          <a:bodyPr wrap="square" anchor="t">
+            <a:noAutofit/>
+          </a:bodyPr>
+          <a:lstStyle>
+            <a:lvl1pPr marL="0" indent="0">
+              <a:spcBef>
+                <a:spcPts val="0"/>
+              </a:spcBef>
+              <a:buFontTx/>
+              <a:buNone/>
+              <a:defRPr sz="6000" b="1">
+                <a:solidFill>
+                  <a:schemeClr val="accent1">
+                    <a:lumMod val="50000"/>
+                  </a:schemeClr>
+                </a:solidFill>
+                <a:latin typeface="+mj-lt"/>
+              </a:defRPr>
+            </a:lvl1pPr>
+          </a:lstStyle>
+          <a:p>
+            <a:pPr lvl="0"/>
+            <a:r>
+              <a:rPr lang="en-US"/>
+              <a:t>kpi_value_4</a:t>
+            </a:r>
+          </a:p>
+        </p:txBody>
+      </p:sp>
+      <p:sp>
+        <p:nvSpPr>
+          <p:cNvPr id="14" name="kpi_label_4">
+            <a:extLst>
+              <a:ext uri="{FF2B5EF4-FFF2-40B4-BE49-F238E27FC236}">
+                <a16:creationId xmlns:a16="http://schemas.microsoft.com/office/drawing/2014/main" id="{F0677470-4278-BFED-467E-8BE23CCC76C1}"/>
+              </a:ext>
+            </a:extLst>
+          </p:cNvPr>
+          <p:cNvSpPr>
+            <a:spLocks noGrp="1"/>
+          </p:cNvSpPr>
+          <p:nvPr>
+            <p:ph type="body" sz="quarter" idx="21" hasCustomPrompt="1"/>
+          </p:nvPr>
+        </p:nvSpPr>
+        <p:spPr>
+          <a:xfrm>
+            <a:off x="7455477" y="4355796"/>
+            <a:ext cx="1664227" cy="316156"/>
+          </a:xfrm>
+          <a:prstGeom prst="rect">
+            <a:avLst/>
+          </a:prstGeom>
+        </p:spPr>
+        <p:txBody>
+          <a:bodyPr wrap="square" anchor="t">
+            <a:noAutofit/>
+          </a:bodyPr>
+          <a:lstStyle>
+            <a:lvl1pPr marL="0" indent="0">
+              <a:spcBef>
+                <a:spcPts val="0"/>
+              </a:spcBef>
+              <a:buFontTx/>
+              <a:buNone/>
+              <a:defRPr sz="2000"/>
             </a:lvl1pPr>
           </a:lstStyle>
           <a:p>
@@ -11020,7 +11020,7 @@
           <p:cNvPr id="15" name="source">
             <a:extLst>
               <a:ext uri="{FF2B5EF4-FFF2-40B4-BE49-F238E27FC236}">
-                <a16:creationId xmlns:a16="http://schemas.microsoft.com/office/drawing/2014/main" id="{3F488775-CF87-1F4F-88CB-BF1301C9C94C}"/>
+                <a16:creationId xmlns:a16="http://schemas.microsoft.com/office/drawing/2014/main" id="{EAEA321E-0F0A-467C-DB07-0AACFA86C1A8}"/>
               </a:ext>
             </a:extLst>
           </p:cNvPr>
@@ -11077,7 +11077,7 @@
     </p:spTree>
     <p:extLst>
       <p:ext uri="{BB962C8B-B14F-4D97-AF65-F5344CB8AC3E}">
-        <p14:creationId xmlns:p14="http://schemas.microsoft.com/office/powerpoint/2010/main" val="4100906377"/>
+        <p14:creationId xmlns:p14="http://schemas.microsoft.com/office/powerpoint/2010/main" val="821304757"/>
       </p:ext>
     </p:extLst>
   </p:cSld>
@@ -11157,7 +11157,7 @@
           <a:bodyPr/>
           <a:lstStyle/>
           <a:p>
-            <a:fld id="{784F70EA-3FD3-4955-90A7-9334D40F9408}" type="datetimeFigureOut">
+            <a:fld id="{9B28EAFD-CAE0-41EE-B184-026F7F5DC9D1}" type="datetimeFigureOut">
               <a:rPr lang="en-US" smtClean="0"/>
               <a:t>10/3/2026</a:t>
             </a:fld>
@@ -11199,7 +11199,7 @@
           <a:bodyPr/>
           <a:lstStyle/>
           <a:p>
-            <a:fld id="{41D0EC4C-452D-4CB3-8553-3AAC20353B0B}" type="slidenum">
+            <a:fld id="{DC138929-C395-43AB-82B0-A2EFC9DE35E2}" type="slidenum">
               <a:rPr lang="en-US" smtClean="0"/>
               <a:t>‹#›</a:t>
             </a:fld>
@@ -11212,7 +11212,7 @@
           <p:cNvPr id="6" name="body">
             <a:extLst>
               <a:ext uri="{FF2B5EF4-FFF2-40B4-BE49-F238E27FC236}">
-                <a16:creationId xmlns:a16="http://schemas.microsoft.com/office/drawing/2014/main" id="{AA952065-B194-216C-0169-6D8ECFD0C5FB}"/>
+                <a16:creationId xmlns:a16="http://schemas.microsoft.com/office/drawing/2014/main" id="{B73A0542-F048-E169-BEA0-31C4481A7B41}"/>
               </a:ext>
             </a:extLst>
           </p:cNvPr>
@@ -11252,7 +11252,7 @@
           <p:cNvPr id="7" name="kpi_value_1">
             <a:extLst>
               <a:ext uri="{FF2B5EF4-FFF2-40B4-BE49-F238E27FC236}">
-                <a16:creationId xmlns:a16="http://schemas.microsoft.com/office/drawing/2014/main" id="{DDAAEF77-5808-5C0D-7D0F-1FE4A387B14E}"/>
+                <a16:creationId xmlns:a16="http://schemas.microsoft.com/office/drawing/2014/main" id="{52AC9A3D-4BFE-AC5F-1F98-9143F76315A1}"/>
               </a:ext>
             </a:extLst>
           </p:cNvPr>
@@ -11265,8 +11265,8 @@
         </p:nvSpPr>
         <p:spPr>
           <a:xfrm>
-            <a:off x="853677" y="2364972"/>
-            <a:ext cx="3857479" cy="1109886"/>
+            <a:off x="831634" y="2339425"/>
+            <a:ext cx="3901565" cy="1134743"/>
           </a:xfrm>
           <a:prstGeom prst="rect">
             <a:avLst/>
@@ -11307,7 +11307,7 @@
           <p:cNvPr id="8" name="kpi_label_1">
             <a:extLst>
               <a:ext uri="{FF2B5EF4-FFF2-40B4-BE49-F238E27FC236}">
-                <a16:creationId xmlns:a16="http://schemas.microsoft.com/office/drawing/2014/main" id="{554CDE39-7BAF-B662-BD17-C5ACBCA47978}"/>
+                <a16:creationId xmlns:a16="http://schemas.microsoft.com/office/drawing/2014/main" id="{644322AD-F9CF-538B-6611-57A66861A9CF}"/>
               </a:ext>
             </a:extLst>
           </p:cNvPr>
@@ -11320,8 +11320,8 @@
         </p:nvSpPr>
         <p:spPr>
           <a:xfrm>
-            <a:off x="853677" y="3474859"/>
-            <a:ext cx="3857479" cy="616603"/>
+            <a:off x="831634" y="3474168"/>
+            <a:ext cx="3901565" cy="630413"/>
           </a:xfrm>
           <a:prstGeom prst="rect">
             <a:avLst/>
@@ -11338,7 +11338,7 @@
               </a:spcBef>
               <a:buFontTx/>
               <a:buNone/>
-              <a:defRPr sz="1800"/>
+              <a:defRPr sz="2000"/>
             </a:lvl1pPr>
           </a:lstStyle>
           <a:p>
@@ -11355,7 +11355,7 @@
           <p:cNvPr id="9" name="kpi_value_2">
             <a:extLst>
               <a:ext uri="{FF2B5EF4-FFF2-40B4-BE49-F238E27FC236}">
-                <a16:creationId xmlns:a16="http://schemas.microsoft.com/office/drawing/2014/main" id="{E05E4E63-1B27-A837-1BA6-18EF8780FC81}"/>
+                <a16:creationId xmlns:a16="http://schemas.microsoft.com/office/drawing/2014/main" id="{F4341C05-A184-5987-A745-91065040E8AE}"/>
               </a:ext>
             </a:extLst>
           </p:cNvPr>
@@ -11368,8 +11368,8 @@
         </p:nvSpPr>
         <p:spPr>
           <a:xfrm>
-            <a:off x="5240182" y="2364972"/>
-            <a:ext cx="3857479" cy="1109886"/>
+            <a:off x="5218139" y="2339425"/>
+            <a:ext cx="3901565" cy="1134743"/>
           </a:xfrm>
           <a:prstGeom prst="rect">
             <a:avLst/>
@@ -11410,7 +11410,7 @@
           <p:cNvPr id="10" name="kpi_label_2">
             <a:extLst>
               <a:ext uri="{FF2B5EF4-FFF2-40B4-BE49-F238E27FC236}">
-                <a16:creationId xmlns:a16="http://schemas.microsoft.com/office/drawing/2014/main" id="{7B41224E-433A-6D3D-88ED-1032E5905413}"/>
+                <a16:creationId xmlns:a16="http://schemas.microsoft.com/office/drawing/2014/main" id="{AE5CD82D-6D9D-B81B-0381-6835B9FEABEB}"/>
               </a:ext>
             </a:extLst>
           </p:cNvPr>
@@ -11423,8 +11423,8 @@
         </p:nvSpPr>
         <p:spPr>
           <a:xfrm>
-            <a:off x="5240182" y="3474859"/>
-            <a:ext cx="3857479" cy="616603"/>
+            <a:off x="5218139" y="3474168"/>
+            <a:ext cx="3901565" cy="630413"/>
           </a:xfrm>
           <a:prstGeom prst="rect">
             <a:avLst/>
@@ -11441,7 +11441,7 @@
               </a:spcBef>
               <a:buFontTx/>
               <a:buNone/>
-              <a:defRPr sz="1800"/>
+              <a:defRPr sz="2000"/>
             </a:lvl1pPr>
           </a:lstStyle>
           <a:p>
@@ -11458,7 +11458,7 @@
           <p:cNvPr id="11" name="source">
             <a:extLst>
               <a:ext uri="{FF2B5EF4-FFF2-40B4-BE49-F238E27FC236}">
-                <a16:creationId xmlns:a16="http://schemas.microsoft.com/office/drawing/2014/main" id="{93D73D66-F869-668E-E236-8936C839A534}"/>
+                <a16:creationId xmlns:a16="http://schemas.microsoft.com/office/drawing/2014/main" id="{2CCDDE24-86F7-3120-8BD4-8AFD53193FBB}"/>
               </a:ext>
             </a:extLst>
           </p:cNvPr>
@@ -11515,7 +11515,7 @@
     </p:spTree>
     <p:extLst>
       <p:ext uri="{BB962C8B-B14F-4D97-AF65-F5344CB8AC3E}">
-        <p14:creationId xmlns:p14="http://schemas.microsoft.com/office/powerpoint/2010/main" val="1906366933"/>
+        <p14:creationId xmlns:p14="http://schemas.microsoft.com/office/powerpoint/2010/main" val="2475302628"/>
       </p:ext>
     </p:extLst>
   </p:cSld>
@@ -11595,7 +11595,7 @@
           <a:bodyPr/>
           <a:lstStyle/>
           <a:p>
-            <a:fld id="{784F70EA-3FD3-4955-90A7-9334D40F9408}" type="datetimeFigureOut">
+            <a:fld id="{9B28EAFD-CAE0-41EE-B184-026F7F5DC9D1}" type="datetimeFigureOut">
               <a:rPr lang="en-US" smtClean="0"/>
               <a:t>10/3/2026</a:t>
             </a:fld>
@@ -11637,7 +11637,7 @@
           <a:bodyPr/>
           <a:lstStyle/>
           <a:p>
-            <a:fld id="{41D0EC4C-452D-4CB3-8553-3AAC20353B0B}" type="slidenum">
+            <a:fld id="{DC138929-C395-43AB-82B0-A2EFC9DE35E2}" type="slidenum">
               <a:rPr lang="en-US" smtClean="0"/>
               <a:t>‹#›</a:t>
             </a:fld>
@@ -11650,7 +11650,7 @@
           <p:cNvPr id="6" name="body">
             <a:extLst>
               <a:ext uri="{FF2B5EF4-FFF2-40B4-BE49-F238E27FC236}">
-                <a16:creationId xmlns:a16="http://schemas.microsoft.com/office/drawing/2014/main" id="{00D8EDEF-3E0C-103C-C314-C917A360D6FB}"/>
+                <a16:creationId xmlns:a16="http://schemas.microsoft.com/office/drawing/2014/main" id="{5928330E-90FD-377E-3F66-9E88EC8BC16C}"/>
               </a:ext>
             </a:extLst>
           </p:cNvPr>
@@ -11690,7 +11690,7 @@
           <p:cNvPr id="7" name="kpi_value_1">
             <a:extLst>
               <a:ext uri="{FF2B5EF4-FFF2-40B4-BE49-F238E27FC236}">
-                <a16:creationId xmlns:a16="http://schemas.microsoft.com/office/drawing/2014/main" id="{2AFA38CB-8D28-BDC8-AAA6-F53AFA424102}"/>
+                <a16:creationId xmlns:a16="http://schemas.microsoft.com/office/drawing/2014/main" id="{CEC82595-980B-F359-F5B6-83245B1313AB}"/>
               </a:ext>
             </a:extLst>
           </p:cNvPr>
@@ -11721,7 +11721,7 @@
               </a:spcBef>
               <a:buFontTx/>
               <a:buNone/>
-              <a:defRPr sz="4000" b="1">
+              <a:defRPr sz="6000" b="1">
                 <a:solidFill>
                   <a:schemeClr val="accent1">
                     <a:lumMod val="50000"/>
@@ -11745,7 +11745,7 @@
           <p:cNvPr id="8" name="kpi_label_1">
             <a:extLst>
               <a:ext uri="{FF2B5EF4-FFF2-40B4-BE49-F238E27FC236}">
-                <a16:creationId xmlns:a16="http://schemas.microsoft.com/office/drawing/2014/main" id="{C7E30030-3B96-0FF3-E995-5BCB7AF3FE07}"/>
+                <a16:creationId xmlns:a16="http://schemas.microsoft.com/office/drawing/2014/main" id="{FC03D620-0A72-05EC-2BBD-3039A97CE9B4}"/>
               </a:ext>
             </a:extLst>
           </p:cNvPr>
@@ -11776,7 +11776,7 @@
               </a:spcBef>
               <a:buFontTx/>
               <a:buNone/>
-              <a:defRPr sz="1800"/>
+              <a:defRPr sz="2000"/>
             </a:lvl1pPr>
           </a:lstStyle>
           <a:p>
@@ -11793,7 +11793,7 @@
           <p:cNvPr id="9" name="kpi_value_2">
             <a:extLst>
               <a:ext uri="{FF2B5EF4-FFF2-40B4-BE49-F238E27FC236}">
-                <a16:creationId xmlns:a16="http://schemas.microsoft.com/office/drawing/2014/main" id="{81813ABA-7574-DBCD-F31A-3F42FD6ADA8D}"/>
+                <a16:creationId xmlns:a16="http://schemas.microsoft.com/office/drawing/2014/main" id="{27044939-73CB-60E4-21E1-FAE625DCFC48}"/>
               </a:ext>
             </a:extLst>
           </p:cNvPr>
@@ -11824,7 +11824,7 @@
               </a:spcBef>
               <a:buFontTx/>
               <a:buNone/>
-              <a:defRPr sz="4000" b="1">
+              <a:defRPr sz="6000" b="1">
                 <a:solidFill>
                   <a:schemeClr val="accent1">
                     <a:lumMod val="50000"/>
@@ -11848,7 +11848,7 @@
           <p:cNvPr id="10" name="kpi_label_2">
             <a:extLst>
               <a:ext uri="{FF2B5EF4-FFF2-40B4-BE49-F238E27FC236}">
-                <a16:creationId xmlns:a16="http://schemas.microsoft.com/office/drawing/2014/main" id="{F88BAB3C-BC76-15ED-210D-62FEDE8DE84F}"/>
+                <a16:creationId xmlns:a16="http://schemas.microsoft.com/office/drawing/2014/main" id="{4D991886-DC7A-9613-CB13-DFEAA9E5F6E3}"/>
               </a:ext>
             </a:extLst>
           </p:cNvPr>
@@ -11879,7 +11879,7 @@
               </a:spcBef>
               <a:buFontTx/>
               <a:buNone/>
-              <a:defRPr sz="1800"/>
+              <a:defRPr sz="2000"/>
             </a:lvl1pPr>
           </a:lstStyle>
           <a:p>
@@ -11896,7 +11896,7 @@
           <p:cNvPr id="11" name="kpi_value_3">
             <a:extLst>
               <a:ext uri="{FF2B5EF4-FFF2-40B4-BE49-F238E27FC236}">
-                <a16:creationId xmlns:a16="http://schemas.microsoft.com/office/drawing/2014/main" id="{FC79BE02-DC4B-4099-CF83-8F0841316646}"/>
+                <a16:creationId xmlns:a16="http://schemas.microsoft.com/office/drawing/2014/main" id="{50D839BB-AD78-87B5-381B-1F3FD5D0F48D}"/>
               </a:ext>
             </a:extLst>
           </p:cNvPr>
@@ -11927,7 +11927,7 @@
               </a:spcBef>
               <a:buFontTx/>
               <a:buNone/>
-              <a:defRPr sz="4000" b="1">
+              <a:defRPr sz="6000" b="1">
                 <a:solidFill>
                   <a:schemeClr val="accent1">
                     <a:lumMod val="50000"/>
@@ -11951,7 +11951,7 @@
           <p:cNvPr id="12" name="kpi_label_3">
             <a:extLst>
               <a:ext uri="{FF2B5EF4-FFF2-40B4-BE49-F238E27FC236}">
-                <a16:creationId xmlns:a16="http://schemas.microsoft.com/office/drawing/2014/main" id="{CA00440F-83AE-3327-D7EA-82E6B0706C04}"/>
+                <a16:creationId xmlns:a16="http://schemas.microsoft.com/office/drawing/2014/main" id="{608700F8-36EF-B1E4-59BA-1723A551EEFF}"/>
               </a:ext>
             </a:extLst>
           </p:cNvPr>
@@ -11982,7 +11982,7 @@
               </a:spcBef>
               <a:buFontTx/>
               <a:buNone/>
-              <a:defRPr sz="1800"/>
+              <a:defRPr sz="2000"/>
             </a:lvl1pPr>
           </a:lstStyle>
           <a:p>
@@ -11999,7 +11999,7 @@
           <p:cNvPr id="13" name="kpi_value_4">
             <a:extLst>
               <a:ext uri="{FF2B5EF4-FFF2-40B4-BE49-F238E27FC236}">
-                <a16:creationId xmlns:a16="http://schemas.microsoft.com/office/drawing/2014/main" id="{5836DFB6-2580-28D7-4F4C-51BD4C71142A}"/>
+                <a16:creationId xmlns:a16="http://schemas.microsoft.com/office/drawing/2014/main" id="{DA662FB7-4A8F-8457-94A5-7190662712E5}"/>
               </a:ext>
             </a:extLst>
           </p:cNvPr>
@@ -12030,7 +12030,7 @@
               </a:spcBef>
               <a:buFontTx/>
               <a:buNone/>
-              <a:defRPr sz="4000" b="1">
+              <a:defRPr sz="6000" b="1">
                 <a:solidFill>
                   <a:schemeClr val="accent1">
                     <a:lumMod val="50000"/>
@@ -12054,7 +12054,7 @@
           <p:cNvPr id="14" name="kpi_label_4">
             <a:extLst>
               <a:ext uri="{FF2B5EF4-FFF2-40B4-BE49-F238E27FC236}">
-                <a16:creationId xmlns:a16="http://schemas.microsoft.com/office/drawing/2014/main" id="{93623C2C-3858-3F1E-684C-9F25A95CC7C3}"/>
+                <a16:creationId xmlns:a16="http://schemas.microsoft.com/office/drawing/2014/main" id="{D2705D1D-540B-5808-3D25-3688F00A663F}"/>
               </a:ext>
             </a:extLst>
           </p:cNvPr>
@@ -12085,7 +12085,7 @@
               </a:spcBef>
               <a:buFontTx/>
               <a:buNone/>
-              <a:defRPr sz="1800"/>
+              <a:defRPr sz="2000"/>
             </a:lvl1pPr>
           </a:lstStyle>
           <a:p>
@@ -12102,7 +12102,7 @@
           <p:cNvPr id="15" name="source">
             <a:extLst>
               <a:ext uri="{FF2B5EF4-FFF2-40B4-BE49-F238E27FC236}">
-                <a16:creationId xmlns:a16="http://schemas.microsoft.com/office/drawing/2014/main" id="{2A7E5026-42A6-F4A8-3200-8F419223A919}"/>
+                <a16:creationId xmlns:a16="http://schemas.microsoft.com/office/drawing/2014/main" id="{DF650AC5-B9E0-12E2-E5B8-AA6CEAC3824D}"/>
               </a:ext>
             </a:extLst>
           </p:cNvPr>
@@ -12159,7 +12159,7 @@
     </p:spTree>
     <p:extLst>
       <p:ext uri="{BB962C8B-B14F-4D97-AF65-F5344CB8AC3E}">
-        <p14:creationId xmlns:p14="http://schemas.microsoft.com/office/powerpoint/2010/main" val="1728760170"/>
+        <p14:creationId xmlns:p14="http://schemas.microsoft.com/office/powerpoint/2010/main" val="1881430433"/>
       </p:ext>
     </p:extLst>
   </p:cSld>
@@ -12239,7 +12239,7 @@
           <a:bodyPr/>
           <a:lstStyle/>
           <a:p>
-            <a:fld id="{784F70EA-3FD3-4955-90A7-9334D40F9408}" type="datetimeFigureOut">
+            <a:fld id="{9B28EAFD-CAE0-41EE-B184-026F7F5DC9D1}" type="datetimeFigureOut">
               <a:rPr lang="en-US" smtClean="0"/>
               <a:t>10/3/2026</a:t>
             </a:fld>
@@ -12281,7 +12281,7 @@
           <a:bodyPr/>
           <a:lstStyle/>
           <a:p>
-            <a:fld id="{41D0EC4C-452D-4CB3-8553-3AAC20353B0B}" type="slidenum">
+            <a:fld id="{DC138929-C395-43AB-82B0-A2EFC9DE35E2}" type="slidenum">
               <a:rPr lang="en-US" smtClean="0"/>
               <a:t>‹#›</a:t>
             </a:fld>
@@ -12294,7 +12294,7 @@
           <p:cNvPr id="6" name="item_1_title">
             <a:extLst>
               <a:ext uri="{FF2B5EF4-FFF2-40B4-BE49-F238E27FC236}">
-                <a16:creationId xmlns:a16="http://schemas.microsoft.com/office/drawing/2014/main" id="{54BDBA87-AFF5-F5A9-95A3-453A7BEC4829}"/>
+                <a16:creationId xmlns:a16="http://schemas.microsoft.com/office/drawing/2014/main" id="{F60B6ADC-2635-502E-9CEC-D96909C5FB66}"/>
               </a:ext>
             </a:extLst>
           </p:cNvPr>
@@ -12322,7 +12322,7 @@
               </a:spcBef>
               <a:buFontTx/>
               <a:buNone/>
-              <a:defRPr sz="2200" b="1">
+              <a:defRPr sz="2000" b="1">
                 <a:solidFill>
                   <a:schemeClr val="accent1">
                     <a:lumMod val="50000"/>
@@ -12346,7 +12346,7 @@
           <p:cNvPr id="7" name="item_1">
             <a:extLst>
               <a:ext uri="{FF2B5EF4-FFF2-40B4-BE49-F238E27FC236}">
-                <a16:creationId xmlns:a16="http://schemas.microsoft.com/office/drawing/2014/main" id="{9BFB8AEC-9FF7-5AC7-F4F1-E2A8AC799F74}"/>
+                <a16:creationId xmlns:a16="http://schemas.microsoft.com/office/drawing/2014/main" id="{06A875DA-5373-CFBF-D374-AE91D1845500}"/>
               </a:ext>
             </a:extLst>
           </p:cNvPr>
@@ -12394,7 +12394,7 @@
           <p:cNvPr id="8" name="item_2_title">
             <a:extLst>
               <a:ext uri="{FF2B5EF4-FFF2-40B4-BE49-F238E27FC236}">
-                <a16:creationId xmlns:a16="http://schemas.microsoft.com/office/drawing/2014/main" id="{935E5351-CF44-6EAC-B577-2BCD5BF26445}"/>
+                <a16:creationId xmlns:a16="http://schemas.microsoft.com/office/drawing/2014/main" id="{990478DB-81E5-DA61-3972-5AF712167404}"/>
               </a:ext>
             </a:extLst>
           </p:cNvPr>
@@ -12425,7 +12425,7 @@
               </a:spcBef>
               <a:buFontTx/>
               <a:buNone/>
-              <a:defRPr sz="2200" b="1">
+              <a:defRPr sz="2000" b="1">
                 <a:solidFill>
                   <a:schemeClr val="accent1">
                     <a:lumMod val="50000"/>
@@ -12449,7 +12449,7 @@
           <p:cNvPr id="9" name="item_2">
             <a:extLst>
               <a:ext uri="{FF2B5EF4-FFF2-40B4-BE49-F238E27FC236}">
-                <a16:creationId xmlns:a16="http://schemas.microsoft.com/office/drawing/2014/main" id="{E01E8BA4-52AD-BE2A-45CF-067636B21124}"/>
+                <a16:creationId xmlns:a16="http://schemas.microsoft.com/office/drawing/2014/main" id="{ED5F1E1A-1D9B-AF38-D8EF-F810D0063F23}"/>
               </a:ext>
             </a:extLst>
           </p:cNvPr>
@@ -12497,7 +12497,7 @@
           <p:cNvPr id="10" name="item_3_title">
             <a:extLst>
               <a:ext uri="{FF2B5EF4-FFF2-40B4-BE49-F238E27FC236}">
-                <a16:creationId xmlns:a16="http://schemas.microsoft.com/office/drawing/2014/main" id="{87B66962-B8B6-7F81-94D5-9B67D29BB126}"/>
+                <a16:creationId xmlns:a16="http://schemas.microsoft.com/office/drawing/2014/main" id="{4EC1ED8A-3842-A7EE-9BE2-89677A3C5BF2}"/>
               </a:ext>
             </a:extLst>
           </p:cNvPr>
@@ -12528,7 +12528,7 @@
               </a:spcBef>
               <a:buFontTx/>
               <a:buNone/>
-              <a:defRPr sz="2200" b="1">
+              <a:defRPr sz="2000" b="1">
                 <a:solidFill>
                   <a:schemeClr val="accent1">
                     <a:lumMod val="50000"/>
@@ -12552,7 +12552,7 @@
           <p:cNvPr id="11" name="item_3">
             <a:extLst>
               <a:ext uri="{FF2B5EF4-FFF2-40B4-BE49-F238E27FC236}">
-                <a16:creationId xmlns:a16="http://schemas.microsoft.com/office/drawing/2014/main" id="{692D32E9-87F0-B5BB-F537-ECEEDB6375D1}"/>
+                <a16:creationId xmlns:a16="http://schemas.microsoft.com/office/drawing/2014/main" id="{8E3E78F2-C7E5-3D2B-83FD-E35990C94DEE}"/>
               </a:ext>
             </a:extLst>
           </p:cNvPr>
@@ -12600,7 +12600,7 @@
           <p:cNvPr id="12" name="item_4_title">
             <a:extLst>
               <a:ext uri="{FF2B5EF4-FFF2-40B4-BE49-F238E27FC236}">
-                <a16:creationId xmlns:a16="http://schemas.microsoft.com/office/drawing/2014/main" id="{C5B886DB-8A96-D1E5-22CF-F8FE7CC5E40E}"/>
+                <a16:creationId xmlns:a16="http://schemas.microsoft.com/office/drawing/2014/main" id="{4FD553DD-84DA-ACDD-5BAB-22B232A3C98D}"/>
               </a:ext>
             </a:extLst>
           </p:cNvPr>
@@ -12631,7 +12631,7 @@
               </a:spcBef>
               <a:buFontTx/>
               <a:buNone/>
-              <a:defRPr sz="2200" b="1">
+              <a:defRPr sz="2000" b="1">
                 <a:solidFill>
                   <a:schemeClr val="accent1">
                     <a:lumMod val="50000"/>
@@ -12655,7 +12655,7 @@
           <p:cNvPr id="13" name="item_4">
             <a:extLst>
               <a:ext uri="{FF2B5EF4-FFF2-40B4-BE49-F238E27FC236}">
-                <a16:creationId xmlns:a16="http://schemas.microsoft.com/office/drawing/2014/main" id="{1644DA2B-048C-34E0-6D76-81D2E108C189}"/>
+                <a16:creationId xmlns:a16="http://schemas.microsoft.com/office/drawing/2014/main" id="{F59F055C-1406-6FBE-C100-BF90168DE2B6}"/>
               </a:ext>
             </a:extLst>
           </p:cNvPr>
@@ -12703,7 +12703,7 @@
           <p:cNvPr id="14" name="source">
             <a:extLst>
               <a:ext uri="{FF2B5EF4-FFF2-40B4-BE49-F238E27FC236}">
-                <a16:creationId xmlns:a16="http://schemas.microsoft.com/office/drawing/2014/main" id="{7D658A9B-432C-E545-C6B7-224407BCB53A}"/>
+                <a16:creationId xmlns:a16="http://schemas.microsoft.com/office/drawing/2014/main" id="{B7E52026-9FC5-7DCD-C930-9CC7EC5DF901}"/>
               </a:ext>
             </a:extLst>
           </p:cNvPr>
@@ -12760,7 +12760,7 @@
     </p:spTree>
     <p:extLst>
       <p:ext uri="{BB962C8B-B14F-4D97-AF65-F5344CB8AC3E}">
-        <p14:creationId xmlns:p14="http://schemas.microsoft.com/office/powerpoint/2010/main" val="43886288"/>
+        <p14:creationId xmlns:p14="http://schemas.microsoft.com/office/powerpoint/2010/main" val="3809833524"/>
       </p:ext>
     </p:extLst>
   </p:cSld>
@@ -12840,7 +12840,7 @@
           <a:bodyPr/>
           <a:lstStyle/>
           <a:p>
-            <a:fld id="{784F70EA-3FD3-4955-90A7-9334D40F9408}" type="datetimeFigureOut">
+            <a:fld id="{9B28EAFD-CAE0-41EE-B184-026F7F5DC9D1}" type="datetimeFigureOut">
               <a:rPr lang="en-US" smtClean="0"/>
               <a:t>10/3/2026</a:t>
             </a:fld>
@@ -12882,7 +12882,7 @@
           <a:bodyPr/>
           <a:lstStyle/>
           <a:p>
-            <a:fld id="{41D0EC4C-452D-4CB3-8553-3AAC20353B0B}" type="slidenum">
+            <a:fld id="{DC138929-C395-43AB-82B0-A2EFC9DE35E2}" type="slidenum">
               <a:rPr lang="en-US" smtClean="0"/>
               <a:t>‹#›</a:t>
             </a:fld>
@@ -12895,7 +12895,7 @@
           <p:cNvPr id="6" name="marker_1">
             <a:extLst>
               <a:ext uri="{FF2B5EF4-FFF2-40B4-BE49-F238E27FC236}">
-                <a16:creationId xmlns:a16="http://schemas.microsoft.com/office/drawing/2014/main" id="{C75B5B14-2246-51D5-A178-9064EEE2AE74}"/>
+                <a16:creationId xmlns:a16="http://schemas.microsoft.com/office/drawing/2014/main" id="{49F88E94-38A4-D973-576A-46935F059387}"/>
               </a:ext>
             </a:extLst>
           </p:cNvPr>
@@ -12908,7 +12908,7 @@
         </p:nvSpPr>
         <p:spPr>
           <a:xfrm>
-            <a:off x="853676" y="2364972"/>
+            <a:off x="831633" y="2339424"/>
             <a:ext cx="484940" cy="562055"/>
           </a:xfrm>
           <a:prstGeom prst="ellipse">
@@ -12931,7 +12931,7 @@
               </a:spcBef>
               <a:buFontTx/>
               <a:buNone/>
-              <a:defRPr sz="2400" b="1">
+              <a:defRPr sz="2000" b="1">
                 <a:solidFill>
                   <a:schemeClr val="bg1"/>
                 </a:solidFill>
@@ -12953,7 +12953,7 @@
           <p:cNvPr id="7" name="item_1_title">
             <a:extLst>
               <a:ext uri="{FF2B5EF4-FFF2-40B4-BE49-F238E27FC236}">
-                <a16:creationId xmlns:a16="http://schemas.microsoft.com/office/drawing/2014/main" id="{141F47CD-CE96-ABE9-E10B-2486B7F7C3A1}"/>
+                <a16:creationId xmlns:a16="http://schemas.microsoft.com/office/drawing/2014/main" id="{45E08787-7540-078F-CCE5-4328CAE1F687}"/>
               </a:ext>
             </a:extLst>
           </p:cNvPr>
@@ -12966,8 +12966,8 @@
         </p:nvSpPr>
         <p:spPr>
           <a:xfrm>
-            <a:off x="1426788" y="2364972"/>
-            <a:ext cx="7670873" cy="356920"/>
+            <a:off x="1404745" y="2339424"/>
+            <a:ext cx="7714959" cy="371948"/>
           </a:xfrm>
           <a:prstGeom prst="rect">
             <a:avLst/>
@@ -12984,7 +12984,7 @@
               </a:spcBef>
               <a:buFontTx/>
               <a:buNone/>
-              <a:defRPr sz="2200" b="1">
+              <a:defRPr sz="2000" b="1">
                 <a:solidFill>
                   <a:schemeClr val="accent1">
                     <a:lumMod val="50000"/>
@@ -13008,7 +13008,7 @@
           <p:cNvPr id="8" name="item_1">
             <a:extLst>
               <a:ext uri="{FF2B5EF4-FFF2-40B4-BE49-F238E27FC236}">
-                <a16:creationId xmlns:a16="http://schemas.microsoft.com/office/drawing/2014/main" id="{E24A9D8E-3C63-BF35-C891-93B17E821C76}"/>
+                <a16:creationId xmlns:a16="http://schemas.microsoft.com/office/drawing/2014/main" id="{948B66F5-7C24-C5A2-ECBB-7E978D95DD3E}"/>
               </a:ext>
             </a:extLst>
           </p:cNvPr>
@@ -13021,8 +13021,8 @@
         </p:nvSpPr>
         <p:spPr>
           <a:xfrm>
-            <a:off x="1426788" y="2721892"/>
-            <a:ext cx="7670873" cy="856608"/>
+            <a:off x="1404745" y="2711373"/>
+            <a:ext cx="7714959" cy="892675"/>
           </a:xfrm>
           <a:prstGeom prst="rect">
             <a:avLst/>
@@ -13056,7 +13056,7 @@
           <p:cNvPr id="9" name="marker_2">
             <a:extLst>
               <a:ext uri="{FF2B5EF4-FFF2-40B4-BE49-F238E27FC236}">
-                <a16:creationId xmlns:a16="http://schemas.microsoft.com/office/drawing/2014/main" id="{D153178F-B12F-D62C-15F1-C1E107398054}"/>
+                <a16:creationId xmlns:a16="http://schemas.microsoft.com/office/drawing/2014/main" id="{B771404B-CD9F-A1E9-1FA7-0D578848E01F}"/>
               </a:ext>
             </a:extLst>
           </p:cNvPr>
@@ -13069,7 +13069,7 @@
         </p:nvSpPr>
         <p:spPr>
           <a:xfrm>
-            <a:off x="853676" y="4191651"/>
+            <a:off x="831633" y="4166104"/>
             <a:ext cx="484940" cy="562055"/>
           </a:xfrm>
           <a:prstGeom prst="ellipse">
@@ -13092,7 +13092,7 @@
               </a:spcBef>
               <a:buFontTx/>
               <a:buNone/>
-              <a:defRPr sz="2400" b="1">
+              <a:defRPr sz="2000" b="1">
                 <a:solidFill>
                   <a:schemeClr val="bg1"/>
                 </a:solidFill>
@@ -13114,7 +13114,7 @@
           <p:cNvPr id="10" name="item_2_title">
             <a:extLst>
               <a:ext uri="{FF2B5EF4-FFF2-40B4-BE49-F238E27FC236}">
-                <a16:creationId xmlns:a16="http://schemas.microsoft.com/office/drawing/2014/main" id="{A26E42BF-020D-86E3-9A62-314A74C74BE5}"/>
+                <a16:creationId xmlns:a16="http://schemas.microsoft.com/office/drawing/2014/main" id="{318966E5-F485-21CF-0A1A-A8C5885E13BE}"/>
               </a:ext>
             </a:extLst>
           </p:cNvPr>
@@ -13127,8 +13127,8 @@
         </p:nvSpPr>
         <p:spPr>
           <a:xfrm>
-            <a:off x="1426788" y="4191650"/>
-            <a:ext cx="7670873" cy="356920"/>
+            <a:off x="1404745" y="4166103"/>
+            <a:ext cx="7714959" cy="371948"/>
           </a:xfrm>
           <a:prstGeom prst="rect">
             <a:avLst/>
@@ -13145,7 +13145,7 @@
               </a:spcBef>
               <a:buFontTx/>
               <a:buNone/>
-              <a:defRPr sz="2200" b="1">
+              <a:defRPr sz="2000" b="1">
                 <a:solidFill>
                   <a:schemeClr val="accent1">
                     <a:lumMod val="50000"/>
@@ -13169,7 +13169,7 @@
           <p:cNvPr id="11" name="item_2">
             <a:extLst>
               <a:ext uri="{FF2B5EF4-FFF2-40B4-BE49-F238E27FC236}">
-                <a16:creationId xmlns:a16="http://schemas.microsoft.com/office/drawing/2014/main" id="{17B5DE12-3F42-D7D7-983B-8BDD5A7A42E1}"/>
+                <a16:creationId xmlns:a16="http://schemas.microsoft.com/office/drawing/2014/main" id="{6B9D9593-B324-72FB-A5FC-B33E2340130B}"/>
               </a:ext>
             </a:extLst>
           </p:cNvPr>
@@ -13182,8 +13182,8 @@
         </p:nvSpPr>
         <p:spPr>
           <a:xfrm>
-            <a:off x="1426788" y="4548570"/>
-            <a:ext cx="7670873" cy="856608"/>
+            <a:off x="1404745" y="4538052"/>
+            <a:ext cx="7714959" cy="892675"/>
           </a:xfrm>
           <a:prstGeom prst="rect">
             <a:avLst/>
@@ -13217,7 +13217,7 @@
           <p:cNvPr id="12" name="source">
             <a:extLst>
               <a:ext uri="{FF2B5EF4-FFF2-40B4-BE49-F238E27FC236}">
-                <a16:creationId xmlns:a16="http://schemas.microsoft.com/office/drawing/2014/main" id="{F00259E2-8D8C-5E11-E75E-B8AD78B68B0A}"/>
+                <a16:creationId xmlns:a16="http://schemas.microsoft.com/office/drawing/2014/main" id="{E0988A85-943B-1AE3-2730-1AF9A7CA0B96}"/>
               </a:ext>
             </a:extLst>
           </p:cNvPr>
@@ -13274,7 +13274,7 @@
     </p:spTree>
     <p:extLst>
       <p:ext uri="{BB962C8B-B14F-4D97-AF65-F5344CB8AC3E}">
-        <p14:creationId xmlns:p14="http://schemas.microsoft.com/office/powerpoint/2010/main" val="337903824"/>
+        <p14:creationId xmlns:p14="http://schemas.microsoft.com/office/powerpoint/2010/main" val="3775151875"/>
       </p:ext>
     </p:extLst>
   </p:cSld>
@@ -13354,7 +13354,7 @@
           <a:bodyPr/>
           <a:lstStyle/>
           <a:p>
-            <a:fld id="{784F70EA-3FD3-4955-90A7-9334D40F9408}" type="datetimeFigureOut">
+            <a:fld id="{9B28EAFD-CAE0-41EE-B184-026F7F5DC9D1}" type="datetimeFigureOut">
               <a:rPr lang="en-US" smtClean="0"/>
               <a:t>10/3/2026</a:t>
             </a:fld>
@@ -13396,7 +13396,7 @@
           <a:bodyPr/>
           <a:lstStyle/>
           <a:p>
-            <a:fld id="{41D0EC4C-452D-4CB3-8553-3AAC20353B0B}" type="slidenum">
+            <a:fld id="{DC138929-C395-43AB-82B0-A2EFC9DE35E2}" type="slidenum">
               <a:rPr lang="en-US" smtClean="0"/>
               <a:t>‹#›</a:t>
             </a:fld>
@@ -13409,7 +13409,7 @@
           <p:cNvPr id="6" name="item_1_title">
             <a:extLst>
               <a:ext uri="{FF2B5EF4-FFF2-40B4-BE49-F238E27FC236}">
-                <a16:creationId xmlns:a16="http://schemas.microsoft.com/office/drawing/2014/main" id="{D0A5F6A4-6F3B-74DC-6323-7D0F2A4CB0BA}"/>
+                <a16:creationId xmlns:a16="http://schemas.microsoft.com/office/drawing/2014/main" id="{E2F08745-ABCD-677E-D456-7B643E395AC0}"/>
               </a:ext>
             </a:extLst>
           </p:cNvPr>
@@ -13422,8 +13422,8 @@
         </p:nvSpPr>
         <p:spPr>
           <a:xfrm>
-            <a:off x="853677" y="2364972"/>
-            <a:ext cx="3857479" cy="356920"/>
+            <a:off x="831634" y="2339424"/>
+            <a:ext cx="3901565" cy="371948"/>
           </a:xfrm>
         </p:spPr>
         <p:txBody>
@@ -13437,7 +13437,7 @@
               </a:spcBef>
               <a:buFontTx/>
               <a:buNone/>
-              <a:defRPr sz="2200" b="1">
+              <a:defRPr sz="2000" b="1">
                 <a:solidFill>
                   <a:schemeClr val="accent1">
                     <a:lumMod val="50000"/>
@@ -13461,7 +13461,7 @@
           <p:cNvPr id="7" name="item_1">
             <a:extLst>
               <a:ext uri="{FF2B5EF4-FFF2-40B4-BE49-F238E27FC236}">
-                <a16:creationId xmlns:a16="http://schemas.microsoft.com/office/drawing/2014/main" id="{5AF5CFCE-BF85-318B-9E52-4F05BB13FBB8}"/>
+                <a16:creationId xmlns:a16="http://schemas.microsoft.com/office/drawing/2014/main" id="{DD3A32BE-64F3-EA4E-3810-75085DB69C24}"/>
               </a:ext>
             </a:extLst>
           </p:cNvPr>
@@ -13474,8 +13474,8 @@
         </p:nvSpPr>
         <p:spPr>
           <a:xfrm>
-            <a:off x="853677" y="2721892"/>
-            <a:ext cx="3857479" cy="856608"/>
+            <a:off x="831634" y="2711373"/>
+            <a:ext cx="3901565" cy="892675"/>
           </a:xfrm>
           <a:prstGeom prst="rect">
             <a:avLst/>
@@ -13509,7 +13509,7 @@
           <p:cNvPr id="8" name="item_2_title">
             <a:extLst>
               <a:ext uri="{FF2B5EF4-FFF2-40B4-BE49-F238E27FC236}">
-                <a16:creationId xmlns:a16="http://schemas.microsoft.com/office/drawing/2014/main" id="{15D48A9A-6D91-806B-85AE-186D47465F4E}"/>
+                <a16:creationId xmlns:a16="http://schemas.microsoft.com/office/drawing/2014/main" id="{C7F44616-FA26-7CEA-6201-603560ACBE14}"/>
               </a:ext>
             </a:extLst>
           </p:cNvPr>
@@ -13522,8 +13522,8 @@
         </p:nvSpPr>
         <p:spPr>
           <a:xfrm>
-            <a:off x="5240182" y="2364972"/>
-            <a:ext cx="3857479" cy="356920"/>
+            <a:off x="5218139" y="2339424"/>
+            <a:ext cx="3901565" cy="371948"/>
           </a:xfrm>
           <a:prstGeom prst="rect">
             <a:avLst/>
@@ -13540,7 +13540,7 @@
               </a:spcBef>
               <a:buFontTx/>
               <a:buNone/>
-              <a:defRPr sz="2200" b="1">
+              <a:defRPr sz="2000" b="1">
                 <a:solidFill>
                   <a:schemeClr val="accent1">
                     <a:lumMod val="50000"/>
@@ -13564,7 +13564,7 @@
           <p:cNvPr id="9" name="item_2">
             <a:extLst>
               <a:ext uri="{FF2B5EF4-FFF2-40B4-BE49-F238E27FC236}">
-                <a16:creationId xmlns:a16="http://schemas.microsoft.com/office/drawing/2014/main" id="{A617A693-92E6-72C2-2A00-C43035E546C4}"/>
+                <a16:creationId xmlns:a16="http://schemas.microsoft.com/office/drawing/2014/main" id="{5F201B5B-1F5E-B973-9170-A71DF4AFBAD6}"/>
               </a:ext>
             </a:extLst>
           </p:cNvPr>
@@ -13577,8 +13577,8 @@
         </p:nvSpPr>
         <p:spPr>
           <a:xfrm>
-            <a:off x="5240182" y="2721892"/>
-            <a:ext cx="3857479" cy="856608"/>
+            <a:off x="5218139" y="2711373"/>
+            <a:ext cx="3901565" cy="892675"/>
           </a:xfrm>
           <a:prstGeom prst="rect">
             <a:avLst/>
@@ -13612,7 +13612,7 @@
           <p:cNvPr id="10" name="item_3_title">
             <a:extLst>
               <a:ext uri="{FF2B5EF4-FFF2-40B4-BE49-F238E27FC236}">
-                <a16:creationId xmlns:a16="http://schemas.microsoft.com/office/drawing/2014/main" id="{D65A6CC7-1647-8146-DF4C-687AE9436963}"/>
+                <a16:creationId xmlns:a16="http://schemas.microsoft.com/office/drawing/2014/main" id="{C8DE643B-0BB7-02FE-8BDE-E8B462E84315}"/>
               </a:ext>
             </a:extLst>
           </p:cNvPr>
@@ -13625,8 +13625,8 @@
         </p:nvSpPr>
         <p:spPr>
           <a:xfrm>
-            <a:off x="853677" y="4191650"/>
-            <a:ext cx="3857479" cy="356920"/>
+            <a:off x="831634" y="4166103"/>
+            <a:ext cx="3901565" cy="371948"/>
           </a:xfrm>
           <a:prstGeom prst="rect">
             <a:avLst/>
@@ -13643,7 +13643,7 @@
               </a:spcBef>
               <a:buFontTx/>
               <a:buNone/>
-              <a:defRPr sz="2200" b="1">
+              <a:defRPr sz="2000" b="1">
                 <a:solidFill>
                   <a:schemeClr val="accent1">
                     <a:lumMod val="50000"/>
@@ -13667,7 +13667,7 @@
           <p:cNvPr id="11" name="item_3">
             <a:extLst>
               <a:ext uri="{FF2B5EF4-FFF2-40B4-BE49-F238E27FC236}">
-                <a16:creationId xmlns:a16="http://schemas.microsoft.com/office/drawing/2014/main" id="{C82CD0AB-03DA-F672-67AB-303A9A30C0EE}"/>
+                <a16:creationId xmlns:a16="http://schemas.microsoft.com/office/drawing/2014/main" id="{484A02B5-5B7C-3A92-804A-C540D305151D}"/>
               </a:ext>
             </a:extLst>
           </p:cNvPr>
@@ -13680,8 +13680,8 @@
         </p:nvSpPr>
         <p:spPr>
           <a:xfrm>
-            <a:off x="853677" y="4548570"/>
-            <a:ext cx="3857479" cy="856608"/>
+            <a:off x="831634" y="4538052"/>
+            <a:ext cx="3901565" cy="892675"/>
           </a:xfrm>
           <a:prstGeom prst="rect">
             <a:avLst/>
@@ -13715,7 +13715,7 @@
           <p:cNvPr id="12" name="item_4_title">
             <a:extLst>
               <a:ext uri="{FF2B5EF4-FFF2-40B4-BE49-F238E27FC236}">
-                <a16:creationId xmlns:a16="http://schemas.microsoft.com/office/drawing/2014/main" id="{354C1FBF-3A3C-7A8A-93DE-103ADB7F81C8}"/>
+                <a16:creationId xmlns:a16="http://schemas.microsoft.com/office/drawing/2014/main" id="{3BFE3AB4-4600-F79B-F96B-43BA01B48AE6}"/>
               </a:ext>
             </a:extLst>
           </p:cNvPr>
@@ -13728,8 +13728,8 @@
         </p:nvSpPr>
         <p:spPr>
           <a:xfrm>
-            <a:off x="5240182" y="4191650"/>
-            <a:ext cx="3857479" cy="356920"/>
+            <a:off x="5218139" y="4166103"/>
+            <a:ext cx="3901565" cy="371948"/>
           </a:xfrm>
           <a:prstGeom prst="rect">
             <a:avLst/>
@@ -13746,7 +13746,7 @@
               </a:spcBef>
               <a:buFontTx/>
               <a:buNone/>
-              <a:defRPr sz="2200" b="1">
+              <a:defRPr sz="2000" b="1">
                 <a:solidFill>
                   <a:schemeClr val="accent1">
                     <a:lumMod val="50000"/>
@@ -13770,7 +13770,7 @@
           <p:cNvPr id="13" name="item_4">
             <a:extLst>
               <a:ext uri="{FF2B5EF4-FFF2-40B4-BE49-F238E27FC236}">
-                <a16:creationId xmlns:a16="http://schemas.microsoft.com/office/drawing/2014/main" id="{67A1EBC6-E4DD-2CF9-2C9C-1FF680E52006}"/>
+                <a16:creationId xmlns:a16="http://schemas.microsoft.com/office/drawing/2014/main" id="{3D64AA5A-408F-81D3-49A1-A3DD5B199698}"/>
               </a:ext>
             </a:extLst>
           </p:cNvPr>
@@ -13783,8 +13783,8 @@
         </p:nvSpPr>
         <p:spPr>
           <a:xfrm>
-            <a:off x="5240182" y="4548570"/>
-            <a:ext cx="3857479" cy="856608"/>
+            <a:off x="5218139" y="4538052"/>
+            <a:ext cx="3901565" cy="892675"/>
           </a:xfrm>
           <a:prstGeom prst="rect">
             <a:avLst/>
@@ -13818,7 +13818,7 @@
           <p:cNvPr id="14" name="source">
             <a:extLst>
               <a:ext uri="{FF2B5EF4-FFF2-40B4-BE49-F238E27FC236}">
-                <a16:creationId xmlns:a16="http://schemas.microsoft.com/office/drawing/2014/main" id="{629F80FF-47A3-3AD8-BA5C-B67EBA323BBE}"/>
+                <a16:creationId xmlns:a16="http://schemas.microsoft.com/office/drawing/2014/main" id="{6BF8E44F-C389-AE5F-1366-4BFC001DBD1B}"/>
               </a:ext>
             </a:extLst>
           </p:cNvPr>
@@ -13875,7 +13875,7 @@
     </p:spTree>
     <p:extLst>
       <p:ext uri="{BB962C8B-B14F-4D97-AF65-F5344CB8AC3E}">
-        <p14:creationId xmlns:p14="http://schemas.microsoft.com/office/powerpoint/2010/main" val="817180400"/>
+        <p14:creationId xmlns:p14="http://schemas.microsoft.com/office/powerpoint/2010/main" val="3777466274"/>
       </p:ext>
     </p:extLst>
   </p:cSld>
@@ -13955,7 +13955,7 @@
           <a:bodyPr/>
           <a:lstStyle/>
           <a:p>
-            <a:fld id="{784F70EA-3FD3-4955-90A7-9334D40F9408}" type="datetimeFigureOut">
+            <a:fld id="{9B28EAFD-CAE0-41EE-B184-026F7F5DC9D1}" type="datetimeFigureOut">
               <a:rPr lang="en-US" smtClean="0"/>
               <a:t>10/3/2026</a:t>
             </a:fld>
@@ -13997,7 +13997,7 @@
           <a:bodyPr/>
           <a:lstStyle/>
           <a:p>
-            <a:fld id="{41D0EC4C-452D-4CB3-8553-3AAC20353B0B}" type="slidenum">
+            <a:fld id="{DC138929-C395-43AB-82B0-A2EFC9DE35E2}" type="slidenum">
               <a:rPr lang="en-US" smtClean="0"/>
               <a:t>‹#›</a:t>
             </a:fld>
@@ -14010,7 +14010,7 @@
           <p:cNvPr id="6" name="item_1_title">
             <a:extLst>
               <a:ext uri="{FF2B5EF4-FFF2-40B4-BE49-F238E27FC236}">
-                <a16:creationId xmlns:a16="http://schemas.microsoft.com/office/drawing/2014/main" id="{5E2377CC-458A-8EC1-1FF2-988DB8E30412}"/>
+                <a16:creationId xmlns:a16="http://schemas.microsoft.com/office/drawing/2014/main" id="{69A4D1D9-DDF8-0D51-DDC5-C43885543EED}"/>
               </a:ext>
             </a:extLst>
           </p:cNvPr>
@@ -14023,8 +14023,8 @@
         </p:nvSpPr>
         <p:spPr>
           <a:xfrm>
-            <a:off x="677335" y="2523639"/>
-            <a:ext cx="2016911" cy="907624"/>
+            <a:off x="831633" y="2664825"/>
+            <a:ext cx="1708312" cy="813500"/>
           </a:xfrm>
         </p:spPr>
         <p:txBody>
@@ -14038,7 +14038,7 @@
               </a:spcBef>
               <a:buFontTx/>
               <a:buNone/>
-              <a:defRPr sz="2200" b="1">
+              <a:defRPr sz="2000" b="1">
                 <a:solidFill>
                   <a:schemeClr val="accent1">
                     <a:lumMod val="50000"/>
@@ -14062,7 +14062,7 @@
           <p:cNvPr id="7" name="item_1">
             <a:extLst>
               <a:ext uri="{FF2B5EF4-FFF2-40B4-BE49-F238E27FC236}">
-                <a16:creationId xmlns:a16="http://schemas.microsoft.com/office/drawing/2014/main" id="{3C7D981C-DC2D-597C-5A29-A9468006F2FD}"/>
+                <a16:creationId xmlns:a16="http://schemas.microsoft.com/office/drawing/2014/main" id="{BE3C59BF-1BC4-88A3-F742-F60279412CEC}"/>
               </a:ext>
             </a:extLst>
           </p:cNvPr>
@@ -14075,8 +14075,8 @@
         </p:nvSpPr>
         <p:spPr>
           <a:xfrm>
-            <a:off x="677335" y="3431264"/>
-            <a:ext cx="2016911" cy="2178299"/>
+            <a:off x="831633" y="3478326"/>
+            <a:ext cx="1708312" cy="1952401"/>
           </a:xfrm>
           <a:prstGeom prst="rect">
             <a:avLst/>
@@ -14110,7 +14110,7 @@
           <p:cNvPr id="8" name="item_2_title">
             <a:extLst>
               <a:ext uri="{FF2B5EF4-FFF2-40B4-BE49-F238E27FC236}">
-                <a16:creationId xmlns:a16="http://schemas.microsoft.com/office/drawing/2014/main" id="{D4F71C01-B210-719F-3C9B-65802BC4EDD1}"/>
+                <a16:creationId xmlns:a16="http://schemas.microsoft.com/office/drawing/2014/main" id="{0554C8E1-9274-C601-8227-D53865BD6E4E}"/>
               </a:ext>
             </a:extLst>
           </p:cNvPr>
@@ -14123,8 +14123,8 @@
         </p:nvSpPr>
         <p:spPr>
           <a:xfrm>
-            <a:off x="2870588" y="2523639"/>
-            <a:ext cx="2016911" cy="907624"/>
+            <a:off x="3024886" y="2664825"/>
+            <a:ext cx="1708312" cy="813500"/>
           </a:xfrm>
           <a:prstGeom prst="rect">
             <a:avLst/>
@@ -14141,7 +14141,7 @@
               </a:spcBef>
               <a:buFontTx/>
               <a:buNone/>
-              <a:defRPr sz="2200" b="1">
+              <a:defRPr sz="2000" b="1">
                 <a:solidFill>
                   <a:schemeClr val="accent1">
                     <a:lumMod val="50000"/>
@@ -14165,7 +14165,7 @@
           <p:cNvPr id="9" name="item_2">
             <a:extLst>
               <a:ext uri="{FF2B5EF4-FFF2-40B4-BE49-F238E27FC236}">
-                <a16:creationId xmlns:a16="http://schemas.microsoft.com/office/drawing/2014/main" id="{CB240787-4AA4-36B5-B09B-56C28C5C2A9F}"/>
+                <a16:creationId xmlns:a16="http://schemas.microsoft.com/office/drawing/2014/main" id="{659D56B7-F730-FB12-846D-9D2447624037}"/>
               </a:ext>
             </a:extLst>
           </p:cNvPr>
@@ -14178,8 +14178,8 @@
         </p:nvSpPr>
         <p:spPr>
           <a:xfrm>
-            <a:off x="2870588" y="3431264"/>
-            <a:ext cx="2016911" cy="2178299"/>
+            <a:off x="3024886" y="3478326"/>
+            <a:ext cx="1708312" cy="1952401"/>
           </a:xfrm>
           <a:prstGeom prst="rect">
             <a:avLst/>
@@ -14213,7 +14213,7 @@
           <p:cNvPr id="10" name="item_3_title">
             <a:extLst>
               <a:ext uri="{FF2B5EF4-FFF2-40B4-BE49-F238E27FC236}">
-                <a16:creationId xmlns:a16="http://schemas.microsoft.com/office/drawing/2014/main" id="{CCDBEB55-E5C6-3D15-CDB0-2EC1E8BEA2F0}"/>
+                <a16:creationId xmlns:a16="http://schemas.microsoft.com/office/drawing/2014/main" id="{959AFF6E-49C4-DEBC-86C7-9E8F90223174}"/>
               </a:ext>
             </a:extLst>
           </p:cNvPr>
@@ -14226,8 +14226,8 @@
         </p:nvSpPr>
         <p:spPr>
           <a:xfrm>
-            <a:off x="5063840" y="2523639"/>
-            <a:ext cx="2016911" cy="907624"/>
+            <a:off x="5218138" y="2664825"/>
+            <a:ext cx="1708312" cy="813500"/>
           </a:xfrm>
           <a:prstGeom prst="rect">
             <a:avLst/>
@@ -14244,7 +14244,7 @@
               </a:spcBef>
               <a:buFontTx/>
               <a:buNone/>
-              <a:defRPr sz="2200" b="1">
+              <a:defRPr sz="2000" b="1">
                 <a:solidFill>
                   <a:schemeClr val="accent1">
                     <a:lumMod val="50000"/>
@@ -14268,7 +14268,7 @@
           <p:cNvPr id="11" name="item_3">
             <a:extLst>
               <a:ext uri="{FF2B5EF4-FFF2-40B4-BE49-F238E27FC236}">
-                <a16:creationId xmlns:a16="http://schemas.microsoft.com/office/drawing/2014/main" id="{E508DC04-CA6C-F840-9AA6-7625FBBD40D7}"/>
+                <a16:creationId xmlns:a16="http://schemas.microsoft.com/office/drawing/2014/main" id="{95C34511-5281-56AB-DF3F-C62EEA488C44}"/>
               </a:ext>
             </a:extLst>
           </p:cNvPr>
@@ -14281,8 +14281,8 @@
         </p:nvSpPr>
         <p:spPr>
           <a:xfrm>
-            <a:off x="5063840" y="3431264"/>
-            <a:ext cx="2016911" cy="2178299"/>
+            <a:off x="5218138" y="3478326"/>
+            <a:ext cx="1708312" cy="1952401"/>
           </a:xfrm>
           <a:prstGeom prst="rect">
             <a:avLst/>
@@ -14316,7 +14316,7 @@
           <p:cNvPr id="12" name="item_4_title">
             <a:extLst>
               <a:ext uri="{FF2B5EF4-FFF2-40B4-BE49-F238E27FC236}">
-                <a16:creationId xmlns:a16="http://schemas.microsoft.com/office/drawing/2014/main" id="{894927B4-5B80-66F3-B788-A833D73A134C}"/>
+                <a16:creationId xmlns:a16="http://schemas.microsoft.com/office/drawing/2014/main" id="{4778D9DB-FAFC-CC52-AF57-A80D2C5A7E05}"/>
               </a:ext>
             </a:extLst>
           </p:cNvPr>
@@ -14329,8 +14329,8 @@
         </p:nvSpPr>
         <p:spPr>
           <a:xfrm>
-            <a:off x="7257093" y="2523639"/>
-            <a:ext cx="2016911" cy="907624"/>
+            <a:off x="7411391" y="2664825"/>
+            <a:ext cx="1708312" cy="813500"/>
           </a:xfrm>
           <a:prstGeom prst="rect">
             <a:avLst/>
@@ -14347,7 +14347,7 @@
               </a:spcBef>
               <a:buFontTx/>
               <a:buNone/>
-              <a:defRPr sz="2200" b="1">
+              <a:defRPr sz="2000" b="1">
                 <a:solidFill>
                   <a:schemeClr val="accent1">
                     <a:lumMod val="50000"/>
@@ -14371,7 +14371,7 @@
           <p:cNvPr id="13" name="item_4">
             <a:extLst>
               <a:ext uri="{FF2B5EF4-FFF2-40B4-BE49-F238E27FC236}">
-                <a16:creationId xmlns:a16="http://schemas.microsoft.com/office/drawing/2014/main" id="{702BBD05-63BC-1408-7D52-549B83886B07}"/>
+                <a16:creationId xmlns:a16="http://schemas.microsoft.com/office/drawing/2014/main" id="{E8CBA108-BADB-A4D1-E651-90312ABCA6CE}"/>
               </a:ext>
             </a:extLst>
           </p:cNvPr>
@@ -14384,8 +14384,8 @@
         </p:nvSpPr>
         <p:spPr>
           <a:xfrm>
-            <a:off x="7257093" y="3431264"/>
-            <a:ext cx="2016911" cy="2178299"/>
+            <a:off x="7411391" y="3478326"/>
+            <a:ext cx="1708312" cy="1952401"/>
           </a:xfrm>
           <a:prstGeom prst="rect">
             <a:avLst/>
@@ -14419,7 +14419,7 @@
           <p:cNvPr id="14" name="source">
             <a:extLst>
               <a:ext uri="{FF2B5EF4-FFF2-40B4-BE49-F238E27FC236}">
-                <a16:creationId xmlns:a16="http://schemas.microsoft.com/office/drawing/2014/main" id="{B51AB059-C4AD-745A-FF3A-B7DCBCD8BEEF}"/>
+                <a16:creationId xmlns:a16="http://schemas.microsoft.com/office/drawing/2014/main" id="{8A21E6B1-2B94-4152-4EF4-183654D32612}"/>
               </a:ext>
             </a:extLst>
           </p:cNvPr>
@@ -14476,7 +14476,7 @@
     </p:spTree>
     <p:extLst>
       <p:ext uri="{BB962C8B-B14F-4D97-AF65-F5344CB8AC3E}">
-        <p14:creationId xmlns:p14="http://schemas.microsoft.com/office/powerpoint/2010/main" val="242437869"/>
+        <p14:creationId xmlns:p14="http://schemas.microsoft.com/office/powerpoint/2010/main" val="3539745342"/>
       </p:ext>
     </p:extLst>
   </p:cSld>
@@ -14556,7 +14556,7 @@
           <a:bodyPr/>
           <a:lstStyle/>
           <a:p>
-            <a:fld id="{784F70EA-3FD3-4955-90A7-9334D40F9408}" type="datetimeFigureOut">
+            <a:fld id="{9B28EAFD-CAE0-41EE-B184-026F7F5DC9D1}" type="datetimeFigureOut">
               <a:rPr lang="en-US" smtClean="0"/>
               <a:t>10/3/2026</a:t>
             </a:fld>
@@ -14598,7 +14598,7 @@
           <a:bodyPr/>
           <a:lstStyle/>
           <a:p>
-            <a:fld id="{41D0EC4C-452D-4CB3-8553-3AAC20353B0B}" type="slidenum">
+            <a:fld id="{DC138929-C395-43AB-82B0-A2EFC9DE35E2}" type="slidenum">
               <a:rPr lang="en-US" smtClean="0"/>
               <a:t>‹#›</a:t>
             </a:fld>
@@ -14611,7 +14611,7 @@
           <p:cNvPr id="6" name="kpi_value_1">
             <a:extLst>
               <a:ext uri="{FF2B5EF4-FFF2-40B4-BE49-F238E27FC236}">
-                <a16:creationId xmlns:a16="http://schemas.microsoft.com/office/drawing/2014/main" id="{D3C79730-7BDF-5B2B-2F8F-5FBBBEF7FAA5}"/>
+                <a16:creationId xmlns:a16="http://schemas.microsoft.com/office/drawing/2014/main" id="{BB1A3EDB-B256-E54D-F7C7-61F5288358C1}"/>
               </a:ext>
             </a:extLst>
           </p:cNvPr>
@@ -14624,8 +14624,8 @@
         </p:nvSpPr>
         <p:spPr>
           <a:xfrm>
-            <a:off x="853676" y="2364972"/>
-            <a:ext cx="4117584" cy="1884928"/>
+            <a:off x="831634" y="2339424"/>
+            <a:ext cx="4161669" cy="1916607"/>
           </a:xfrm>
         </p:spPr>
         <p:txBody>
@@ -14663,7 +14663,7 @@
           <p:cNvPr id="7" name="kpi_label_1">
             <a:extLst>
               <a:ext uri="{FF2B5EF4-FFF2-40B4-BE49-F238E27FC236}">
-                <a16:creationId xmlns:a16="http://schemas.microsoft.com/office/drawing/2014/main" id="{A4B1AD19-A614-6DF6-02B3-95632FE52B60}"/>
+                <a16:creationId xmlns:a16="http://schemas.microsoft.com/office/drawing/2014/main" id="{4C1B0D22-F175-4CD8-3C82-EC13BABE9F81}"/>
               </a:ext>
             </a:extLst>
           </p:cNvPr>
@@ -14676,209 +14676,8 @@
         </p:nvSpPr>
         <p:spPr>
           <a:xfrm>
-            <a:off x="853676" y="4310704"/>
-            <a:ext cx="4117584" cy="1094474"/>
-          </a:xfrm>
-          <a:prstGeom prst="rect">
-            <a:avLst/>
-          </a:prstGeom>
-        </p:spPr>
-        <p:txBody>
-          <a:bodyPr wrap="square" anchor="t">
-            <a:noAutofit/>
-          </a:bodyPr>
-          <a:lstStyle>
-            <a:lvl1pPr marL="0" indent="0">
-              <a:spcBef>
-                <a:spcPts val="0"/>
-              </a:spcBef>
-              <a:buFontTx/>
-              <a:buNone/>
-              <a:defRPr sz="1800"/>
-            </a:lvl1pPr>
-          </a:lstStyle>
-          <a:p>
-            <a:pPr lvl="0"/>
-            <a:r>
-              <a:rPr lang="en-US"/>
-              <a:t>kpi_label_1</a:t>
-            </a:r>
-          </a:p>
-        </p:txBody>
-      </p:sp>
-      <p:sp>
-        <p:nvSpPr>
-          <p:cNvPr id="8" name="quote">
-            <a:extLst>
-              <a:ext uri="{FF2B5EF4-FFF2-40B4-BE49-F238E27FC236}">
-                <a16:creationId xmlns:a16="http://schemas.microsoft.com/office/drawing/2014/main" id="{6E9EFDA8-4E64-A702-40E5-0EC1BBDB19B5}"/>
-              </a:ext>
-            </a:extLst>
-          </p:cNvPr>
-          <p:cNvSpPr>
-            <a:spLocks noGrp="1"/>
-          </p:cNvSpPr>
-          <p:nvPr>
-            <p:ph type="body" sz="quarter" idx="15" hasCustomPrompt="1"/>
-          </p:nvPr>
-        </p:nvSpPr>
-        <p:spPr>
-          <a:xfrm>
-            <a:off x="853676" y="2364972"/>
-            <a:ext cx="4117584" cy="2371360"/>
-          </a:xfrm>
-          <a:prstGeom prst="rect">
-            <a:avLst/>
-          </a:prstGeom>
-        </p:spPr>
-        <p:txBody>
-          <a:bodyPr wrap="square" anchor="t">
-            <a:noAutofit/>
-          </a:bodyPr>
-          <a:lstStyle>
-            <a:lvl1pPr marL="0" indent="0">
-              <a:spcBef>
-                <a:spcPts val="0"/>
-              </a:spcBef>
-              <a:buFontTx/>
-              <a:buNone/>
-              <a:defRPr sz="2400" i="1">
-                <a:latin typeface="+mj-lt"/>
-              </a:defRPr>
-            </a:lvl1pPr>
-          </a:lstStyle>
-          <a:p>
-            <a:pPr lvl="0"/>
-            <a:r>
-              <a:rPr lang="en-US"/>
-              <a:t>quote</a:t>
-            </a:r>
-          </a:p>
-        </p:txBody>
-      </p:sp>
-      <p:sp>
-        <p:nvSpPr>
-          <p:cNvPr id="9" name="attribution">
-            <a:extLst>
-              <a:ext uri="{FF2B5EF4-FFF2-40B4-BE49-F238E27FC236}">
-                <a16:creationId xmlns:a16="http://schemas.microsoft.com/office/drawing/2014/main" id="{4E96AF17-8E42-11D3-6870-0E2A763E323A}"/>
-              </a:ext>
-            </a:extLst>
-          </p:cNvPr>
-          <p:cNvSpPr>
-            <a:spLocks noGrp="1"/>
-          </p:cNvSpPr>
-          <p:nvPr>
-            <p:ph type="body" sz="quarter" idx="16" hasCustomPrompt="1"/>
-          </p:nvPr>
-        </p:nvSpPr>
-        <p:spPr>
-          <a:xfrm>
-            <a:off x="853676" y="4797138"/>
-            <a:ext cx="4117584" cy="608041"/>
-          </a:xfrm>
-          <a:prstGeom prst="rect">
-            <a:avLst/>
-          </a:prstGeom>
-        </p:spPr>
-        <p:txBody>
-          <a:bodyPr wrap="square" anchor="t">
-            <a:noAutofit/>
-          </a:bodyPr>
-          <a:lstStyle>
-            <a:lvl1pPr marL="0" indent="0">
-              <a:spcBef>
-                <a:spcPts val="0"/>
-              </a:spcBef>
-              <a:buFontTx/>
-              <a:buNone/>
-              <a:defRPr sz="1400"/>
-            </a:lvl1pPr>
-          </a:lstStyle>
-          <a:p>
-            <a:pPr lvl="0"/>
-            <a:r>
-              <a:rPr lang="en-US"/>
-              <a:t>attribution</a:t>
-            </a:r>
-          </a:p>
-        </p:txBody>
-      </p:sp>
-      <p:sp>
-        <p:nvSpPr>
-          <p:cNvPr id="10" name="item_1_title">
-            <a:extLst>
-              <a:ext uri="{FF2B5EF4-FFF2-40B4-BE49-F238E27FC236}">
-                <a16:creationId xmlns:a16="http://schemas.microsoft.com/office/drawing/2014/main" id="{46E2D88F-E1BB-6E27-B1DF-77EB2D0E384F}"/>
-              </a:ext>
-            </a:extLst>
-          </p:cNvPr>
-          <p:cNvSpPr>
-            <a:spLocks noGrp="1"/>
-          </p:cNvSpPr>
-          <p:nvPr>
-            <p:ph type="body" sz="quarter" idx="17" hasCustomPrompt="1"/>
-          </p:nvPr>
-        </p:nvSpPr>
-        <p:spPr>
-          <a:xfrm>
-            <a:off x="5491468" y="2160589"/>
-            <a:ext cx="3782534" cy="1014404"/>
-          </a:xfrm>
-          <a:prstGeom prst="rect">
-            <a:avLst/>
-          </a:prstGeom>
-        </p:spPr>
-        <p:txBody>
-          <a:bodyPr wrap="square" anchor="t">
-            <a:noAutofit/>
-          </a:bodyPr>
-          <a:lstStyle>
-            <a:lvl1pPr marL="0" indent="0">
-              <a:spcBef>
-                <a:spcPts val="0"/>
-              </a:spcBef>
-              <a:buFontTx/>
-              <a:buNone/>
-              <a:defRPr sz="2200" b="1">
-                <a:solidFill>
-                  <a:schemeClr val="accent1">
-                    <a:lumMod val="50000"/>
-                  </a:schemeClr>
-                </a:solidFill>
-                <a:latin typeface="+mj-lt"/>
-              </a:defRPr>
-            </a:lvl1pPr>
-          </a:lstStyle>
-          <a:p>
-            <a:pPr lvl="0"/>
-            <a:r>
-              <a:rPr lang="en-US"/>
-              <a:t>item_1_title</a:t>
-            </a:r>
-          </a:p>
-        </p:txBody>
-      </p:sp>
-      <p:sp>
-        <p:nvSpPr>
-          <p:cNvPr id="11" name="item_1">
-            <a:extLst>
-              <a:ext uri="{FF2B5EF4-FFF2-40B4-BE49-F238E27FC236}">
-                <a16:creationId xmlns:a16="http://schemas.microsoft.com/office/drawing/2014/main" id="{3593B4DE-9D46-6B63-92B3-56143C5812C9}"/>
-              </a:ext>
-            </a:extLst>
-          </p:cNvPr>
-          <p:cNvSpPr>
-            <a:spLocks noGrp="1"/>
-          </p:cNvSpPr>
-          <p:nvPr>
-            <p:ph type="body" sz="quarter" idx="18" hasCustomPrompt="1"/>
-          </p:nvPr>
-        </p:nvSpPr>
-        <p:spPr>
-          <a:xfrm>
-            <a:off x="5491468" y="3174993"/>
-            <a:ext cx="3782534" cy="2434569"/>
+            <a:off x="831634" y="4317858"/>
+            <a:ext cx="4161669" cy="1112869"/>
           </a:xfrm>
           <a:prstGeom prst="rect">
             <a:avLst/>
@@ -14902,6 +14701,207 @@
             <a:pPr lvl="0"/>
             <a:r>
               <a:rPr lang="en-US"/>
+              <a:t>kpi_label_1</a:t>
+            </a:r>
+          </a:p>
+        </p:txBody>
+      </p:sp>
+      <p:sp>
+        <p:nvSpPr>
+          <p:cNvPr id="8" name="quote">
+            <a:extLst>
+              <a:ext uri="{FF2B5EF4-FFF2-40B4-BE49-F238E27FC236}">
+                <a16:creationId xmlns:a16="http://schemas.microsoft.com/office/drawing/2014/main" id="{AB2CD1F5-455E-6C52-4D34-E5FC653A23B0}"/>
+              </a:ext>
+            </a:extLst>
+          </p:cNvPr>
+          <p:cNvSpPr>
+            <a:spLocks noGrp="1"/>
+          </p:cNvSpPr>
+          <p:nvPr>
+            <p:ph type="body" sz="quarter" idx="15" hasCustomPrompt="1"/>
+          </p:nvPr>
+        </p:nvSpPr>
+        <p:spPr>
+          <a:xfrm>
+            <a:off x="831634" y="2339425"/>
+            <a:ext cx="4161669" cy="2411215"/>
+          </a:xfrm>
+          <a:prstGeom prst="rect">
+            <a:avLst/>
+          </a:prstGeom>
+        </p:spPr>
+        <p:txBody>
+          <a:bodyPr wrap="square" anchor="t">
+            <a:noAutofit/>
+          </a:bodyPr>
+          <a:lstStyle>
+            <a:lvl1pPr marL="0" indent="0">
+              <a:spcBef>
+                <a:spcPts val="0"/>
+              </a:spcBef>
+              <a:buFontTx/>
+              <a:buNone/>
+              <a:defRPr sz="2000" i="1">
+                <a:latin typeface="+mj-lt"/>
+              </a:defRPr>
+            </a:lvl1pPr>
+          </a:lstStyle>
+          <a:p>
+            <a:pPr lvl="0"/>
+            <a:r>
+              <a:rPr lang="en-US"/>
+              <a:t>quote</a:t>
+            </a:r>
+          </a:p>
+        </p:txBody>
+      </p:sp>
+      <p:sp>
+        <p:nvSpPr>
+          <p:cNvPr id="9" name="attribution">
+            <a:extLst>
+              <a:ext uri="{FF2B5EF4-FFF2-40B4-BE49-F238E27FC236}">
+                <a16:creationId xmlns:a16="http://schemas.microsoft.com/office/drawing/2014/main" id="{923EE44A-896D-BB79-CC43-43E75939CA7D}"/>
+              </a:ext>
+            </a:extLst>
+          </p:cNvPr>
+          <p:cNvSpPr>
+            <a:spLocks noGrp="1"/>
+          </p:cNvSpPr>
+          <p:nvPr>
+            <p:ph type="body" sz="quarter" idx="16" hasCustomPrompt="1"/>
+          </p:nvPr>
+        </p:nvSpPr>
+        <p:spPr>
+          <a:xfrm>
+            <a:off x="831634" y="4812466"/>
+            <a:ext cx="4161669" cy="618260"/>
+          </a:xfrm>
+          <a:prstGeom prst="rect">
+            <a:avLst/>
+          </a:prstGeom>
+        </p:spPr>
+        <p:txBody>
+          <a:bodyPr wrap="square" anchor="t">
+            <a:noAutofit/>
+          </a:bodyPr>
+          <a:lstStyle>
+            <a:lvl1pPr marL="0" indent="0">
+              <a:spcBef>
+                <a:spcPts val="0"/>
+              </a:spcBef>
+              <a:buFontTx/>
+              <a:buNone/>
+              <a:defRPr sz="2000"/>
+            </a:lvl1pPr>
+          </a:lstStyle>
+          <a:p>
+            <a:pPr lvl="0"/>
+            <a:r>
+              <a:rPr lang="en-US"/>
+              <a:t>attribution</a:t>
+            </a:r>
+          </a:p>
+        </p:txBody>
+      </p:sp>
+      <p:sp>
+        <p:nvSpPr>
+          <p:cNvPr id="10" name="item_1_title">
+            <a:extLst>
+              <a:ext uri="{FF2B5EF4-FFF2-40B4-BE49-F238E27FC236}">
+                <a16:creationId xmlns:a16="http://schemas.microsoft.com/office/drawing/2014/main" id="{611F6BEC-2B51-AC17-401A-EA0259DDFED5}"/>
+              </a:ext>
+            </a:extLst>
+          </p:cNvPr>
+          <p:cNvSpPr>
+            <a:spLocks noGrp="1"/>
+          </p:cNvSpPr>
+          <p:nvPr>
+            <p:ph type="body" sz="quarter" idx="17" hasCustomPrompt="1"/>
+          </p:nvPr>
+        </p:nvSpPr>
+        <p:spPr>
+          <a:xfrm>
+            <a:off x="5491468" y="2160589"/>
+            <a:ext cx="3782534" cy="1014404"/>
+          </a:xfrm>
+          <a:prstGeom prst="rect">
+            <a:avLst/>
+          </a:prstGeom>
+        </p:spPr>
+        <p:txBody>
+          <a:bodyPr wrap="square" anchor="t">
+            <a:noAutofit/>
+          </a:bodyPr>
+          <a:lstStyle>
+            <a:lvl1pPr marL="0" indent="0">
+              <a:spcBef>
+                <a:spcPts val="0"/>
+              </a:spcBef>
+              <a:buFontTx/>
+              <a:buNone/>
+              <a:defRPr sz="2000" b="1">
+                <a:solidFill>
+                  <a:schemeClr val="accent1">
+                    <a:lumMod val="50000"/>
+                  </a:schemeClr>
+                </a:solidFill>
+                <a:latin typeface="+mj-lt"/>
+              </a:defRPr>
+            </a:lvl1pPr>
+          </a:lstStyle>
+          <a:p>
+            <a:pPr lvl="0"/>
+            <a:r>
+              <a:rPr lang="en-US"/>
+              <a:t>item_1_title</a:t>
+            </a:r>
+          </a:p>
+        </p:txBody>
+      </p:sp>
+      <p:sp>
+        <p:nvSpPr>
+          <p:cNvPr id="11" name="item_1">
+            <a:extLst>
+              <a:ext uri="{FF2B5EF4-FFF2-40B4-BE49-F238E27FC236}">
+                <a16:creationId xmlns:a16="http://schemas.microsoft.com/office/drawing/2014/main" id="{80C1BF98-1683-90AF-1878-E6D2BC91AE75}"/>
+              </a:ext>
+            </a:extLst>
+          </p:cNvPr>
+          <p:cNvSpPr>
+            <a:spLocks noGrp="1"/>
+          </p:cNvSpPr>
+          <p:nvPr>
+            <p:ph type="body" sz="quarter" idx="18" hasCustomPrompt="1"/>
+          </p:nvPr>
+        </p:nvSpPr>
+        <p:spPr>
+          <a:xfrm>
+            <a:off x="5491468" y="3174993"/>
+            <a:ext cx="3782534" cy="2434569"/>
+          </a:xfrm>
+          <a:prstGeom prst="rect">
+            <a:avLst/>
+          </a:prstGeom>
+        </p:spPr>
+        <p:txBody>
+          <a:bodyPr wrap="square" anchor="t">
+            <a:noAutofit/>
+          </a:bodyPr>
+          <a:lstStyle>
+            <a:lvl1pPr marL="0" indent="0">
+              <a:spcBef>
+                <a:spcPts val="0"/>
+              </a:spcBef>
+              <a:buFontTx/>
+              <a:buNone/>
+              <a:defRPr sz="2000"/>
+            </a:lvl1pPr>
+          </a:lstStyle>
+          <a:p>
+            <a:pPr lvl="0"/>
+            <a:r>
+              <a:rPr lang="en-US"/>
               <a:t>item_1</a:t>
             </a:r>
           </a:p>
@@ -14912,7 +14912,7 @@
           <p:cNvPr id="12" name="source">
             <a:extLst>
               <a:ext uri="{FF2B5EF4-FFF2-40B4-BE49-F238E27FC236}">
-                <a16:creationId xmlns:a16="http://schemas.microsoft.com/office/drawing/2014/main" id="{B8E5FE8A-4BA2-D333-83A1-8D467619FD30}"/>
+                <a16:creationId xmlns:a16="http://schemas.microsoft.com/office/drawing/2014/main" id="{09475A44-FC9E-714B-CF27-A11888F3D8AF}"/>
               </a:ext>
             </a:extLst>
           </p:cNvPr>
@@ -14969,7 +14969,7 @@
     </p:spTree>
     <p:extLst>
       <p:ext uri="{BB962C8B-B14F-4D97-AF65-F5344CB8AC3E}">
-        <p14:creationId xmlns:p14="http://schemas.microsoft.com/office/powerpoint/2010/main" val="3888156569"/>
+        <p14:creationId xmlns:p14="http://schemas.microsoft.com/office/powerpoint/2010/main" val="1025894851"/>
       </p:ext>
     </p:extLst>
   </p:cSld>
@@ -15049,7 +15049,7 @@
           <a:bodyPr/>
           <a:lstStyle/>
           <a:p>
-            <a:fld id="{784F70EA-3FD3-4955-90A7-9334D40F9408}" type="datetimeFigureOut">
+            <a:fld id="{9B28EAFD-CAE0-41EE-B184-026F7F5DC9D1}" type="datetimeFigureOut">
               <a:rPr lang="en-US" smtClean="0"/>
               <a:t>10/3/2026</a:t>
             </a:fld>
@@ -15091,7 +15091,7 @@
           <a:bodyPr/>
           <a:lstStyle/>
           <a:p>
-            <a:fld id="{41D0EC4C-452D-4CB3-8553-3AAC20353B0B}" type="slidenum">
+            <a:fld id="{DC138929-C395-43AB-82B0-A2EFC9DE35E2}" type="slidenum">
               <a:rPr lang="en-US" smtClean="0"/>
               <a:t>‹#›</a:t>
             </a:fld>
@@ -15104,7 +15104,7 @@
           <p:cNvPr id="6" name="item_1_title">
             <a:extLst>
               <a:ext uri="{FF2B5EF4-FFF2-40B4-BE49-F238E27FC236}">
-                <a16:creationId xmlns:a16="http://schemas.microsoft.com/office/drawing/2014/main" id="{0C886FCC-4ED6-5FD2-6503-EC0032BEF636}"/>
+                <a16:creationId xmlns:a16="http://schemas.microsoft.com/office/drawing/2014/main" id="{FE89813F-427F-C45B-6FA5-70DE74DEB68B}"/>
               </a:ext>
             </a:extLst>
           </p:cNvPr>
@@ -15117,8 +15117,8 @@
         </p:nvSpPr>
         <p:spPr>
           <a:xfrm>
-            <a:off x="853677" y="2364972"/>
-            <a:ext cx="2395311" cy="894178"/>
+            <a:off x="831633" y="2339424"/>
+            <a:ext cx="2439396" cy="909206"/>
           </a:xfrm>
         </p:spPr>
         <p:txBody>
@@ -15132,7 +15132,7 @@
               </a:spcBef>
               <a:buFontTx/>
               <a:buNone/>
-              <a:defRPr sz="2200" b="1">
+              <a:defRPr sz="2000" b="1">
                 <a:solidFill>
                   <a:schemeClr val="accent1">
                     <a:lumMod val="50000"/>
@@ -15156,7 +15156,7 @@
           <p:cNvPr id="7" name="item_1">
             <a:extLst>
               <a:ext uri="{FF2B5EF4-FFF2-40B4-BE49-F238E27FC236}">
-                <a16:creationId xmlns:a16="http://schemas.microsoft.com/office/drawing/2014/main" id="{CEE2ED00-6405-9C3C-E284-96865F8019F4}"/>
+                <a16:creationId xmlns:a16="http://schemas.microsoft.com/office/drawing/2014/main" id="{237F3821-D7F7-3C74-2B5A-B722DBEAA722}"/>
               </a:ext>
             </a:extLst>
           </p:cNvPr>
@@ -15169,8 +15169,8 @@
         </p:nvSpPr>
         <p:spPr>
           <a:xfrm>
-            <a:off x="853677" y="3259150"/>
-            <a:ext cx="2395311" cy="2146028"/>
+            <a:off x="831633" y="3248632"/>
+            <a:ext cx="2439396" cy="2182095"/>
           </a:xfrm>
           <a:prstGeom prst="rect">
             <a:avLst/>
@@ -15204,7 +15204,7 @@
           <p:cNvPr id="8" name="item_2_title">
             <a:extLst>
               <a:ext uri="{FF2B5EF4-FFF2-40B4-BE49-F238E27FC236}">
-                <a16:creationId xmlns:a16="http://schemas.microsoft.com/office/drawing/2014/main" id="{F0B4FB1B-2071-9804-36BC-B2037C009BCC}"/>
+                <a16:creationId xmlns:a16="http://schemas.microsoft.com/office/drawing/2014/main" id="{E3BBAFBA-A13C-FB6C-6556-9DD9E5426B30}"/>
               </a:ext>
             </a:extLst>
           </p:cNvPr>
@@ -15217,8 +15217,8 @@
         </p:nvSpPr>
         <p:spPr>
           <a:xfrm>
-            <a:off x="3778014" y="2364972"/>
-            <a:ext cx="2395311" cy="894178"/>
+            <a:off x="3755970" y="2339424"/>
+            <a:ext cx="2439396" cy="909206"/>
           </a:xfrm>
           <a:prstGeom prst="rect">
             <a:avLst/>
@@ -15235,7 +15235,7 @@
               </a:spcBef>
               <a:buFontTx/>
               <a:buNone/>
-              <a:defRPr sz="2200" b="1">
+              <a:defRPr sz="2000" b="1">
                 <a:solidFill>
                   <a:schemeClr val="accent1">
                     <a:lumMod val="50000"/>
@@ -15259,7 +15259,7 @@
           <p:cNvPr id="9" name="item_2">
             <a:extLst>
               <a:ext uri="{FF2B5EF4-FFF2-40B4-BE49-F238E27FC236}">
-                <a16:creationId xmlns:a16="http://schemas.microsoft.com/office/drawing/2014/main" id="{6E8F1D87-CF49-DBFC-73BD-895C7A77A9F7}"/>
+                <a16:creationId xmlns:a16="http://schemas.microsoft.com/office/drawing/2014/main" id="{4B127999-86E3-22F8-D75E-31F7783F4A77}"/>
               </a:ext>
             </a:extLst>
           </p:cNvPr>
@@ -15272,8 +15272,8 @@
         </p:nvSpPr>
         <p:spPr>
           <a:xfrm>
-            <a:off x="3778014" y="3259150"/>
-            <a:ext cx="2395311" cy="2146028"/>
+            <a:off x="3755970" y="3248632"/>
+            <a:ext cx="2439396" cy="2182095"/>
           </a:xfrm>
           <a:prstGeom prst="rect">
             <a:avLst/>
@@ -15307,7 +15307,7 @@
           <p:cNvPr id="10" name="item_3_title">
             <a:extLst>
               <a:ext uri="{FF2B5EF4-FFF2-40B4-BE49-F238E27FC236}">
-                <a16:creationId xmlns:a16="http://schemas.microsoft.com/office/drawing/2014/main" id="{CA5D61F0-7E2F-F437-0F68-2A0016C6F7AA}"/>
+                <a16:creationId xmlns:a16="http://schemas.microsoft.com/office/drawing/2014/main" id="{909ED97C-7B5E-C98C-D123-9BC552775D5E}"/>
               </a:ext>
             </a:extLst>
           </p:cNvPr>
@@ -15320,8 +15320,8 @@
         </p:nvSpPr>
         <p:spPr>
           <a:xfrm>
-            <a:off x="6702350" y="2364972"/>
-            <a:ext cx="2395311" cy="894178"/>
+            <a:off x="6680306" y="2339424"/>
+            <a:ext cx="2439396" cy="909206"/>
           </a:xfrm>
           <a:prstGeom prst="rect">
             <a:avLst/>
@@ -15338,7 +15338,7 @@
               </a:spcBef>
               <a:buFontTx/>
               <a:buNone/>
-              <a:defRPr sz="2200" b="1">
+              <a:defRPr sz="2000" b="1">
                 <a:solidFill>
                   <a:schemeClr val="accent1">
                     <a:lumMod val="50000"/>
@@ -15362,7 +15362,7 @@
           <p:cNvPr id="11" name="item_3">
             <a:extLst>
               <a:ext uri="{FF2B5EF4-FFF2-40B4-BE49-F238E27FC236}">
-                <a16:creationId xmlns:a16="http://schemas.microsoft.com/office/drawing/2014/main" id="{F5C507DA-57BE-239B-25FE-78EA4C1FDD7C}"/>
+                <a16:creationId xmlns:a16="http://schemas.microsoft.com/office/drawing/2014/main" id="{B0BCB1F6-0ACB-51D2-4741-9211146740F3}"/>
               </a:ext>
             </a:extLst>
           </p:cNvPr>
@@ -15375,8 +15375,8 @@
         </p:nvSpPr>
         <p:spPr>
           <a:xfrm>
-            <a:off x="6702350" y="3259150"/>
-            <a:ext cx="2395311" cy="2146028"/>
+            <a:off x="6680306" y="3248632"/>
+            <a:ext cx="2439396" cy="2182095"/>
           </a:xfrm>
           <a:prstGeom prst="rect">
             <a:avLst/>
@@ -15410,7 +15410,7 @@
           <p:cNvPr id="12" name="source">
             <a:extLst>
               <a:ext uri="{FF2B5EF4-FFF2-40B4-BE49-F238E27FC236}">
-                <a16:creationId xmlns:a16="http://schemas.microsoft.com/office/drawing/2014/main" id="{D230492E-25A9-FA98-1CE1-AAE6351D3E8D}"/>
+                <a16:creationId xmlns:a16="http://schemas.microsoft.com/office/drawing/2014/main" id="{C7E3D9A6-4C9F-F0EB-79AD-EAB2162049E3}"/>
               </a:ext>
             </a:extLst>
           </p:cNvPr>
@@ -15467,7 +15467,7 @@
     </p:spTree>
     <p:extLst>
       <p:ext uri="{BB962C8B-B14F-4D97-AF65-F5344CB8AC3E}">
-        <p14:creationId xmlns:p14="http://schemas.microsoft.com/office/powerpoint/2010/main" val="2484131887"/>
+        <p14:creationId xmlns:p14="http://schemas.microsoft.com/office/powerpoint/2010/main" val="1828681274"/>
       </p:ext>
     </p:extLst>
   </p:cSld>
@@ -15547,7 +15547,7 @@
           <a:bodyPr/>
           <a:lstStyle/>
           <a:p>
-            <a:fld id="{784F70EA-3FD3-4955-90A7-9334D40F9408}" type="datetimeFigureOut">
+            <a:fld id="{9B28EAFD-CAE0-41EE-B184-026F7F5DC9D1}" type="datetimeFigureOut">
               <a:rPr lang="en-US" smtClean="0"/>
               <a:t>10/3/2026</a:t>
             </a:fld>
@@ -15589,7 +15589,7 @@
           <a:bodyPr/>
           <a:lstStyle/>
           <a:p>
-            <a:fld id="{41D0EC4C-452D-4CB3-8553-3AAC20353B0B}" type="slidenum">
+            <a:fld id="{DC138929-C395-43AB-82B0-A2EFC9DE35E2}" type="slidenum">
               <a:rPr lang="en-US" smtClean="0"/>
               <a:t>‹#›</a:t>
             </a:fld>
@@ -15602,7 +15602,7 @@
           <p:cNvPr id="6" name="marker_1">
             <a:extLst>
               <a:ext uri="{FF2B5EF4-FFF2-40B4-BE49-F238E27FC236}">
-                <a16:creationId xmlns:a16="http://schemas.microsoft.com/office/drawing/2014/main" id="{D3213B91-5BE2-968D-4386-B52048E24A45}"/>
+                <a16:creationId xmlns:a16="http://schemas.microsoft.com/office/drawing/2014/main" id="{EF7D5E49-F8F1-4F70-4169-24E4FA4E13A5}"/>
               </a:ext>
             </a:extLst>
           </p:cNvPr>
@@ -15615,7 +15615,7 @@
         </p:nvSpPr>
         <p:spPr>
           <a:xfrm>
-            <a:off x="853676" y="2364972"/>
+            <a:off x="831633" y="2339424"/>
             <a:ext cx="484940" cy="562055"/>
           </a:xfrm>
           <a:prstGeom prst="ellipse">
@@ -15638,7 +15638,7 @@
               </a:spcBef>
               <a:buFontTx/>
               <a:buNone/>
-              <a:defRPr sz="2400" b="1">
+              <a:defRPr sz="2000" b="1">
                 <a:solidFill>
                   <a:schemeClr val="bg1"/>
                 </a:solidFill>
@@ -15660,7 +15660,7 @@
           <p:cNvPr id="7" name="item_1_title">
             <a:extLst>
               <a:ext uri="{FF2B5EF4-FFF2-40B4-BE49-F238E27FC236}">
-                <a16:creationId xmlns:a16="http://schemas.microsoft.com/office/drawing/2014/main" id="{9AE2E6DB-0B93-A60C-BE52-D387D9A9129E}"/>
+                <a16:creationId xmlns:a16="http://schemas.microsoft.com/office/drawing/2014/main" id="{F7E06579-2990-AB83-1CE1-ED5E71851358}"/>
               </a:ext>
             </a:extLst>
           </p:cNvPr>
@@ -15673,8 +15673,8 @@
         </p:nvSpPr>
         <p:spPr>
           <a:xfrm>
-            <a:off x="1426788" y="2364972"/>
-            <a:ext cx="7670873" cy="356920"/>
+            <a:off x="1404745" y="2339424"/>
+            <a:ext cx="7714959" cy="371948"/>
           </a:xfrm>
           <a:prstGeom prst="rect">
             <a:avLst/>
@@ -15691,7 +15691,7 @@
               </a:spcBef>
               <a:buFontTx/>
               <a:buNone/>
-              <a:defRPr sz="2200" b="1">
+              <a:defRPr sz="2000" b="1">
                 <a:solidFill>
                   <a:schemeClr val="accent1">
                     <a:lumMod val="50000"/>
@@ -15715,7 +15715,7 @@
           <p:cNvPr id="8" name="item_1">
             <a:extLst>
               <a:ext uri="{FF2B5EF4-FFF2-40B4-BE49-F238E27FC236}">
-                <a16:creationId xmlns:a16="http://schemas.microsoft.com/office/drawing/2014/main" id="{AA216BC5-162A-A2C7-5F74-24A65EC92419}"/>
+                <a16:creationId xmlns:a16="http://schemas.microsoft.com/office/drawing/2014/main" id="{7D913E91-0EC9-4CFF-BF3E-02325A67D36A}"/>
               </a:ext>
             </a:extLst>
           </p:cNvPr>
@@ -15728,8 +15728,8 @@
         </p:nvSpPr>
         <p:spPr>
           <a:xfrm>
-            <a:off x="1426788" y="2721892"/>
-            <a:ext cx="7670873" cy="856608"/>
+            <a:off x="1404745" y="2711373"/>
+            <a:ext cx="7714959" cy="892675"/>
           </a:xfrm>
           <a:prstGeom prst="rect">
             <a:avLst/>
@@ -15763,7 +15763,7 @@
           <p:cNvPr id="9" name="marker_2">
             <a:extLst>
               <a:ext uri="{FF2B5EF4-FFF2-40B4-BE49-F238E27FC236}">
-                <a16:creationId xmlns:a16="http://schemas.microsoft.com/office/drawing/2014/main" id="{1C3AABC9-D4C9-B9E0-9EAD-4D077E7C6D3A}"/>
+                <a16:creationId xmlns:a16="http://schemas.microsoft.com/office/drawing/2014/main" id="{00336728-F8C3-B8C2-33D2-E607918C8419}"/>
               </a:ext>
             </a:extLst>
           </p:cNvPr>
@@ -15776,7 +15776,7 @@
         </p:nvSpPr>
         <p:spPr>
           <a:xfrm>
-            <a:off x="853676" y="4191651"/>
+            <a:off x="831633" y="4166104"/>
             <a:ext cx="484940" cy="562055"/>
           </a:xfrm>
           <a:prstGeom prst="ellipse">
@@ -15799,7 +15799,7 @@
               </a:spcBef>
               <a:buFontTx/>
               <a:buNone/>
-              <a:defRPr sz="2400" b="1">
+              <a:defRPr sz="2000" b="1">
                 <a:solidFill>
                   <a:schemeClr val="bg1"/>
                 </a:solidFill>
@@ -15821,7 +15821,7 @@
           <p:cNvPr id="10" name="item_2_title">
             <a:extLst>
               <a:ext uri="{FF2B5EF4-FFF2-40B4-BE49-F238E27FC236}">
-                <a16:creationId xmlns:a16="http://schemas.microsoft.com/office/drawing/2014/main" id="{9C9E1CBF-D7A1-DB80-81B6-FEE8BE49C4D8}"/>
+                <a16:creationId xmlns:a16="http://schemas.microsoft.com/office/drawing/2014/main" id="{B87BD4DE-4290-C1EC-8A4D-2D76C4C262F0}"/>
               </a:ext>
             </a:extLst>
           </p:cNvPr>
@@ -15834,8 +15834,8 @@
         </p:nvSpPr>
         <p:spPr>
           <a:xfrm>
-            <a:off x="1426788" y="4191650"/>
-            <a:ext cx="7670873" cy="356920"/>
+            <a:off x="1404745" y="4166103"/>
+            <a:ext cx="7714959" cy="371948"/>
           </a:xfrm>
           <a:prstGeom prst="rect">
             <a:avLst/>
@@ -15852,7 +15852,7 @@
               </a:spcBef>
               <a:buFontTx/>
               <a:buNone/>
-              <a:defRPr sz="2200" b="1">
+              <a:defRPr sz="2000" b="1">
                 <a:solidFill>
                   <a:schemeClr val="accent1">
                     <a:lumMod val="50000"/>
@@ -15876,7 +15876,7 @@
           <p:cNvPr id="11" name="item_2">
             <a:extLst>
               <a:ext uri="{FF2B5EF4-FFF2-40B4-BE49-F238E27FC236}">
-                <a16:creationId xmlns:a16="http://schemas.microsoft.com/office/drawing/2014/main" id="{0AAC2CE4-9033-2245-1265-85845686F0F3}"/>
+                <a16:creationId xmlns:a16="http://schemas.microsoft.com/office/drawing/2014/main" id="{DDBD4D36-19B7-96B0-55F4-BFD82143DC7B}"/>
               </a:ext>
             </a:extLst>
           </p:cNvPr>
@@ -15889,8 +15889,8 @@
         </p:nvSpPr>
         <p:spPr>
           <a:xfrm>
-            <a:off x="1426788" y="4548570"/>
-            <a:ext cx="7670873" cy="856608"/>
+            <a:off x="1404745" y="4538052"/>
+            <a:ext cx="7714959" cy="892675"/>
           </a:xfrm>
           <a:prstGeom prst="rect">
             <a:avLst/>
@@ -15924,7 +15924,7 @@
           <p:cNvPr id="12" name="source">
             <a:extLst>
               <a:ext uri="{FF2B5EF4-FFF2-40B4-BE49-F238E27FC236}">
-                <a16:creationId xmlns:a16="http://schemas.microsoft.com/office/drawing/2014/main" id="{99D7CDCF-42D4-C348-9146-339120C37D8E}"/>
+                <a16:creationId xmlns:a16="http://schemas.microsoft.com/office/drawing/2014/main" id="{A1AB353D-2EA0-6C88-1B7E-D7BF3D6F5BF3}"/>
               </a:ext>
             </a:extLst>
           </p:cNvPr>
@@ -15981,7 +15981,7 @@
     </p:spTree>
     <p:extLst>
       <p:ext uri="{BB962C8B-B14F-4D97-AF65-F5344CB8AC3E}">
-        <p14:creationId xmlns:p14="http://schemas.microsoft.com/office/powerpoint/2010/main" val="3776418644"/>
+        <p14:creationId xmlns:p14="http://schemas.microsoft.com/office/powerpoint/2010/main" val="824709409"/>
       </p:ext>
     </p:extLst>
   </p:cSld>
@@ -16061,7 +16061,7 @@
           <a:bodyPr/>
           <a:lstStyle/>
           <a:p>
-            <a:fld id="{784F70EA-3FD3-4955-90A7-9334D40F9408}" type="datetimeFigureOut">
+            <a:fld id="{9B28EAFD-CAE0-41EE-B184-026F7F5DC9D1}" type="datetimeFigureOut">
               <a:rPr lang="en-US" smtClean="0"/>
               <a:t>10/3/2026</a:t>
             </a:fld>
@@ -16103,7 +16103,7 @@
           <a:bodyPr/>
           <a:lstStyle/>
           <a:p>
-            <a:fld id="{41D0EC4C-452D-4CB3-8553-3AAC20353B0B}" type="slidenum">
+            <a:fld id="{DC138929-C395-43AB-82B0-A2EFC9DE35E2}" type="slidenum">
               <a:rPr lang="en-US" smtClean="0"/>
               <a:t>‹#›</a:t>
             </a:fld>
@@ -16116,7 +16116,7 @@
           <p:cNvPr id="6" name="kpi_value_1">
             <a:extLst>
               <a:ext uri="{FF2B5EF4-FFF2-40B4-BE49-F238E27FC236}">
-                <a16:creationId xmlns:a16="http://schemas.microsoft.com/office/drawing/2014/main" id="{60B0639C-9744-8FED-AF73-6864162DC326}"/>
+                <a16:creationId xmlns:a16="http://schemas.microsoft.com/office/drawing/2014/main" id="{996724A5-29B0-D2C2-0F35-42D80733010C}"/>
               </a:ext>
             </a:extLst>
           </p:cNvPr>
@@ -16129,8 +16129,8 @@
         </p:nvSpPr>
         <p:spPr>
           <a:xfrm>
-            <a:off x="853676" y="2364972"/>
-            <a:ext cx="4117584" cy="1884928"/>
+            <a:off x="831634" y="2339424"/>
+            <a:ext cx="4161669" cy="1916607"/>
           </a:xfrm>
         </p:spPr>
         <p:txBody>
@@ -16168,7 +16168,7 @@
           <p:cNvPr id="7" name="kpi_label_1">
             <a:extLst>
               <a:ext uri="{FF2B5EF4-FFF2-40B4-BE49-F238E27FC236}">
-                <a16:creationId xmlns:a16="http://schemas.microsoft.com/office/drawing/2014/main" id="{2F092C9A-D361-6190-9BA1-44F8E2A424ED}"/>
+                <a16:creationId xmlns:a16="http://schemas.microsoft.com/office/drawing/2014/main" id="{EFD8027E-668E-391F-AA32-F81A6C4FE316}"/>
               </a:ext>
             </a:extLst>
           </p:cNvPr>
@@ -16181,209 +16181,8 @@
         </p:nvSpPr>
         <p:spPr>
           <a:xfrm>
-            <a:off x="853676" y="4310704"/>
-            <a:ext cx="4117584" cy="1094474"/>
-          </a:xfrm>
-          <a:prstGeom prst="rect">
-            <a:avLst/>
-          </a:prstGeom>
-        </p:spPr>
-        <p:txBody>
-          <a:bodyPr wrap="square" anchor="t">
-            <a:noAutofit/>
-          </a:bodyPr>
-          <a:lstStyle>
-            <a:lvl1pPr marL="0" indent="0">
-              <a:spcBef>
-                <a:spcPts val="0"/>
-              </a:spcBef>
-              <a:buFontTx/>
-              <a:buNone/>
-              <a:defRPr sz="1800"/>
-            </a:lvl1pPr>
-          </a:lstStyle>
-          <a:p>
-            <a:pPr lvl="0"/>
-            <a:r>
-              <a:rPr lang="en-US"/>
-              <a:t>kpi_label_1</a:t>
-            </a:r>
-          </a:p>
-        </p:txBody>
-      </p:sp>
-      <p:sp>
-        <p:nvSpPr>
-          <p:cNvPr id="8" name="quote">
-            <a:extLst>
-              <a:ext uri="{FF2B5EF4-FFF2-40B4-BE49-F238E27FC236}">
-                <a16:creationId xmlns:a16="http://schemas.microsoft.com/office/drawing/2014/main" id="{DF393430-AA5C-75F5-8058-EDA6362B5AE3}"/>
-              </a:ext>
-            </a:extLst>
-          </p:cNvPr>
-          <p:cNvSpPr>
-            <a:spLocks noGrp="1"/>
-          </p:cNvSpPr>
-          <p:nvPr>
-            <p:ph type="body" sz="quarter" idx="15" hasCustomPrompt="1"/>
-          </p:nvPr>
-        </p:nvSpPr>
-        <p:spPr>
-          <a:xfrm>
-            <a:off x="853676" y="2364972"/>
-            <a:ext cx="4117584" cy="2371360"/>
-          </a:xfrm>
-          <a:prstGeom prst="rect">
-            <a:avLst/>
-          </a:prstGeom>
-        </p:spPr>
-        <p:txBody>
-          <a:bodyPr wrap="square" anchor="t">
-            <a:noAutofit/>
-          </a:bodyPr>
-          <a:lstStyle>
-            <a:lvl1pPr marL="0" indent="0">
-              <a:spcBef>
-                <a:spcPts val="0"/>
-              </a:spcBef>
-              <a:buFontTx/>
-              <a:buNone/>
-              <a:defRPr sz="2400" i="1">
-                <a:latin typeface="+mj-lt"/>
-              </a:defRPr>
-            </a:lvl1pPr>
-          </a:lstStyle>
-          <a:p>
-            <a:pPr lvl="0"/>
-            <a:r>
-              <a:rPr lang="en-US"/>
-              <a:t>quote</a:t>
-            </a:r>
-          </a:p>
-        </p:txBody>
-      </p:sp>
-      <p:sp>
-        <p:nvSpPr>
-          <p:cNvPr id="9" name="attribution">
-            <a:extLst>
-              <a:ext uri="{FF2B5EF4-FFF2-40B4-BE49-F238E27FC236}">
-                <a16:creationId xmlns:a16="http://schemas.microsoft.com/office/drawing/2014/main" id="{1B182188-45B4-F2EF-16FB-DD880CD0506F}"/>
-              </a:ext>
-            </a:extLst>
-          </p:cNvPr>
-          <p:cNvSpPr>
-            <a:spLocks noGrp="1"/>
-          </p:cNvSpPr>
-          <p:nvPr>
-            <p:ph type="body" sz="quarter" idx="16" hasCustomPrompt="1"/>
-          </p:nvPr>
-        </p:nvSpPr>
-        <p:spPr>
-          <a:xfrm>
-            <a:off x="853676" y="4797138"/>
-            <a:ext cx="4117584" cy="608041"/>
-          </a:xfrm>
-          <a:prstGeom prst="rect">
-            <a:avLst/>
-          </a:prstGeom>
-        </p:spPr>
-        <p:txBody>
-          <a:bodyPr wrap="square" anchor="t">
-            <a:noAutofit/>
-          </a:bodyPr>
-          <a:lstStyle>
-            <a:lvl1pPr marL="0" indent="0">
-              <a:spcBef>
-                <a:spcPts val="0"/>
-              </a:spcBef>
-              <a:buFontTx/>
-              <a:buNone/>
-              <a:defRPr sz="1400"/>
-            </a:lvl1pPr>
-          </a:lstStyle>
-          <a:p>
-            <a:pPr lvl="0"/>
-            <a:r>
-              <a:rPr lang="en-US"/>
-              <a:t>attribution</a:t>
-            </a:r>
-          </a:p>
-        </p:txBody>
-      </p:sp>
-      <p:sp>
-        <p:nvSpPr>
-          <p:cNvPr id="10" name="item_1_title">
-            <a:extLst>
-              <a:ext uri="{FF2B5EF4-FFF2-40B4-BE49-F238E27FC236}">
-                <a16:creationId xmlns:a16="http://schemas.microsoft.com/office/drawing/2014/main" id="{9781FAA8-961B-2FBA-099D-6596164B0F25}"/>
-              </a:ext>
-            </a:extLst>
-          </p:cNvPr>
-          <p:cNvSpPr>
-            <a:spLocks noGrp="1"/>
-          </p:cNvSpPr>
-          <p:nvPr>
-            <p:ph type="body" sz="quarter" idx="17" hasCustomPrompt="1"/>
-          </p:nvPr>
-        </p:nvSpPr>
-        <p:spPr>
-          <a:xfrm>
-            <a:off x="5491468" y="2160589"/>
-            <a:ext cx="3782534" cy="1014404"/>
-          </a:xfrm>
-          <a:prstGeom prst="rect">
-            <a:avLst/>
-          </a:prstGeom>
-        </p:spPr>
-        <p:txBody>
-          <a:bodyPr wrap="square" anchor="t">
-            <a:noAutofit/>
-          </a:bodyPr>
-          <a:lstStyle>
-            <a:lvl1pPr marL="0" indent="0">
-              <a:spcBef>
-                <a:spcPts val="0"/>
-              </a:spcBef>
-              <a:buFontTx/>
-              <a:buNone/>
-              <a:defRPr sz="2200" b="1">
-                <a:solidFill>
-                  <a:schemeClr val="accent1">
-                    <a:lumMod val="50000"/>
-                  </a:schemeClr>
-                </a:solidFill>
-                <a:latin typeface="+mj-lt"/>
-              </a:defRPr>
-            </a:lvl1pPr>
-          </a:lstStyle>
-          <a:p>
-            <a:pPr lvl="0"/>
-            <a:r>
-              <a:rPr lang="en-US"/>
-              <a:t>item_1_title</a:t>
-            </a:r>
-          </a:p>
-        </p:txBody>
-      </p:sp>
-      <p:sp>
-        <p:nvSpPr>
-          <p:cNvPr id="11" name="item_1">
-            <a:extLst>
-              <a:ext uri="{FF2B5EF4-FFF2-40B4-BE49-F238E27FC236}">
-                <a16:creationId xmlns:a16="http://schemas.microsoft.com/office/drawing/2014/main" id="{36806ED9-1CB5-8795-B6C8-B8B59DBFD932}"/>
-              </a:ext>
-            </a:extLst>
-          </p:cNvPr>
-          <p:cNvSpPr>
-            <a:spLocks noGrp="1"/>
-          </p:cNvSpPr>
-          <p:nvPr>
-            <p:ph type="body" sz="quarter" idx="18" hasCustomPrompt="1"/>
-          </p:nvPr>
-        </p:nvSpPr>
-        <p:spPr>
-          <a:xfrm>
-            <a:off x="5491468" y="3174993"/>
-            <a:ext cx="3782534" cy="2434569"/>
+            <a:off x="831634" y="4317858"/>
+            <a:ext cx="4161669" cy="1112869"/>
           </a:xfrm>
           <a:prstGeom prst="rect">
             <a:avLst/>
@@ -16407,6 +16206,207 @@
             <a:pPr lvl="0"/>
             <a:r>
               <a:rPr lang="en-US"/>
+              <a:t>kpi_label_1</a:t>
+            </a:r>
+          </a:p>
+        </p:txBody>
+      </p:sp>
+      <p:sp>
+        <p:nvSpPr>
+          <p:cNvPr id="8" name="quote">
+            <a:extLst>
+              <a:ext uri="{FF2B5EF4-FFF2-40B4-BE49-F238E27FC236}">
+                <a16:creationId xmlns:a16="http://schemas.microsoft.com/office/drawing/2014/main" id="{A7A38644-888C-C974-D14C-FD003191A98C}"/>
+              </a:ext>
+            </a:extLst>
+          </p:cNvPr>
+          <p:cNvSpPr>
+            <a:spLocks noGrp="1"/>
+          </p:cNvSpPr>
+          <p:nvPr>
+            <p:ph type="body" sz="quarter" idx="15" hasCustomPrompt="1"/>
+          </p:nvPr>
+        </p:nvSpPr>
+        <p:spPr>
+          <a:xfrm>
+            <a:off x="831634" y="2339425"/>
+            <a:ext cx="4161669" cy="2411215"/>
+          </a:xfrm>
+          <a:prstGeom prst="rect">
+            <a:avLst/>
+          </a:prstGeom>
+        </p:spPr>
+        <p:txBody>
+          <a:bodyPr wrap="square" anchor="t">
+            <a:noAutofit/>
+          </a:bodyPr>
+          <a:lstStyle>
+            <a:lvl1pPr marL="0" indent="0">
+              <a:spcBef>
+                <a:spcPts val="0"/>
+              </a:spcBef>
+              <a:buFontTx/>
+              <a:buNone/>
+              <a:defRPr sz="2000" i="1">
+                <a:latin typeface="+mj-lt"/>
+              </a:defRPr>
+            </a:lvl1pPr>
+          </a:lstStyle>
+          <a:p>
+            <a:pPr lvl="0"/>
+            <a:r>
+              <a:rPr lang="en-US"/>
+              <a:t>quote</a:t>
+            </a:r>
+          </a:p>
+        </p:txBody>
+      </p:sp>
+      <p:sp>
+        <p:nvSpPr>
+          <p:cNvPr id="9" name="attribution">
+            <a:extLst>
+              <a:ext uri="{FF2B5EF4-FFF2-40B4-BE49-F238E27FC236}">
+                <a16:creationId xmlns:a16="http://schemas.microsoft.com/office/drawing/2014/main" id="{BD81D588-3863-4069-212F-C8F0575F6F91}"/>
+              </a:ext>
+            </a:extLst>
+          </p:cNvPr>
+          <p:cNvSpPr>
+            <a:spLocks noGrp="1"/>
+          </p:cNvSpPr>
+          <p:nvPr>
+            <p:ph type="body" sz="quarter" idx="16" hasCustomPrompt="1"/>
+          </p:nvPr>
+        </p:nvSpPr>
+        <p:spPr>
+          <a:xfrm>
+            <a:off x="831634" y="4812466"/>
+            <a:ext cx="4161669" cy="618260"/>
+          </a:xfrm>
+          <a:prstGeom prst="rect">
+            <a:avLst/>
+          </a:prstGeom>
+        </p:spPr>
+        <p:txBody>
+          <a:bodyPr wrap="square" anchor="t">
+            <a:noAutofit/>
+          </a:bodyPr>
+          <a:lstStyle>
+            <a:lvl1pPr marL="0" indent="0">
+              <a:spcBef>
+                <a:spcPts val="0"/>
+              </a:spcBef>
+              <a:buFontTx/>
+              <a:buNone/>
+              <a:defRPr sz="2000"/>
+            </a:lvl1pPr>
+          </a:lstStyle>
+          <a:p>
+            <a:pPr lvl="0"/>
+            <a:r>
+              <a:rPr lang="en-US"/>
+              <a:t>attribution</a:t>
+            </a:r>
+          </a:p>
+        </p:txBody>
+      </p:sp>
+      <p:sp>
+        <p:nvSpPr>
+          <p:cNvPr id="10" name="item_1_title">
+            <a:extLst>
+              <a:ext uri="{FF2B5EF4-FFF2-40B4-BE49-F238E27FC236}">
+                <a16:creationId xmlns:a16="http://schemas.microsoft.com/office/drawing/2014/main" id="{E3A47A66-43A1-67EC-7241-8B806CBFF8C0}"/>
+              </a:ext>
+            </a:extLst>
+          </p:cNvPr>
+          <p:cNvSpPr>
+            <a:spLocks noGrp="1"/>
+          </p:cNvSpPr>
+          <p:nvPr>
+            <p:ph type="body" sz="quarter" idx="17" hasCustomPrompt="1"/>
+          </p:nvPr>
+        </p:nvSpPr>
+        <p:spPr>
+          <a:xfrm>
+            <a:off x="5491468" y="2160589"/>
+            <a:ext cx="3782534" cy="1014404"/>
+          </a:xfrm>
+          <a:prstGeom prst="rect">
+            <a:avLst/>
+          </a:prstGeom>
+        </p:spPr>
+        <p:txBody>
+          <a:bodyPr wrap="square" anchor="t">
+            <a:noAutofit/>
+          </a:bodyPr>
+          <a:lstStyle>
+            <a:lvl1pPr marL="0" indent="0">
+              <a:spcBef>
+                <a:spcPts val="0"/>
+              </a:spcBef>
+              <a:buFontTx/>
+              <a:buNone/>
+              <a:defRPr sz="2000" b="1">
+                <a:solidFill>
+                  <a:schemeClr val="accent1">
+                    <a:lumMod val="50000"/>
+                  </a:schemeClr>
+                </a:solidFill>
+                <a:latin typeface="+mj-lt"/>
+              </a:defRPr>
+            </a:lvl1pPr>
+          </a:lstStyle>
+          <a:p>
+            <a:pPr lvl="0"/>
+            <a:r>
+              <a:rPr lang="en-US"/>
+              <a:t>item_1_title</a:t>
+            </a:r>
+          </a:p>
+        </p:txBody>
+      </p:sp>
+      <p:sp>
+        <p:nvSpPr>
+          <p:cNvPr id="11" name="item_1">
+            <a:extLst>
+              <a:ext uri="{FF2B5EF4-FFF2-40B4-BE49-F238E27FC236}">
+                <a16:creationId xmlns:a16="http://schemas.microsoft.com/office/drawing/2014/main" id="{A490488F-025C-1428-8C2E-FACCDC3C26BE}"/>
+              </a:ext>
+            </a:extLst>
+          </p:cNvPr>
+          <p:cNvSpPr>
+            <a:spLocks noGrp="1"/>
+          </p:cNvSpPr>
+          <p:nvPr>
+            <p:ph type="body" sz="quarter" idx="18" hasCustomPrompt="1"/>
+          </p:nvPr>
+        </p:nvSpPr>
+        <p:spPr>
+          <a:xfrm>
+            <a:off x="5491468" y="3174993"/>
+            <a:ext cx="3782534" cy="2434569"/>
+          </a:xfrm>
+          <a:prstGeom prst="rect">
+            <a:avLst/>
+          </a:prstGeom>
+        </p:spPr>
+        <p:txBody>
+          <a:bodyPr wrap="square" anchor="t">
+            <a:noAutofit/>
+          </a:bodyPr>
+          <a:lstStyle>
+            <a:lvl1pPr marL="0" indent="0">
+              <a:spcBef>
+                <a:spcPts val="0"/>
+              </a:spcBef>
+              <a:buFontTx/>
+              <a:buNone/>
+              <a:defRPr sz="2000"/>
+            </a:lvl1pPr>
+          </a:lstStyle>
+          <a:p>
+            <a:pPr lvl="0"/>
+            <a:r>
+              <a:rPr lang="en-US"/>
               <a:t>item_1</a:t>
             </a:r>
           </a:p>
@@ -16417,7 +16417,7 @@
           <p:cNvPr id="12" name="source">
             <a:extLst>
               <a:ext uri="{FF2B5EF4-FFF2-40B4-BE49-F238E27FC236}">
-                <a16:creationId xmlns:a16="http://schemas.microsoft.com/office/drawing/2014/main" id="{FC3457E2-1DFE-CF00-3855-C50E2EEC736A}"/>
+                <a16:creationId xmlns:a16="http://schemas.microsoft.com/office/drawing/2014/main" id="{2AD94E48-9E19-2C3C-0C1A-C3A2B6B886B9}"/>
               </a:ext>
             </a:extLst>
           </p:cNvPr>
@@ -16474,7 +16474,7 @@
     </p:spTree>
     <p:extLst>
       <p:ext uri="{BB962C8B-B14F-4D97-AF65-F5344CB8AC3E}">
-        <p14:creationId xmlns:p14="http://schemas.microsoft.com/office/powerpoint/2010/main" val="2970213743"/>
+        <p14:creationId xmlns:p14="http://schemas.microsoft.com/office/powerpoint/2010/main" val="1812786360"/>
       </p:ext>
     </p:extLst>
   </p:cSld>
@@ -16554,7 +16554,7 @@
           <a:bodyPr/>
           <a:lstStyle/>
           <a:p>
-            <a:fld id="{784F70EA-3FD3-4955-90A7-9334D40F9408}" type="datetimeFigureOut">
+            <a:fld id="{9B28EAFD-CAE0-41EE-B184-026F7F5DC9D1}" type="datetimeFigureOut">
               <a:rPr lang="en-US" smtClean="0"/>
               <a:t>10/3/2026</a:t>
             </a:fld>
@@ -16596,7 +16596,7 @@
           <a:bodyPr/>
           <a:lstStyle/>
           <a:p>
-            <a:fld id="{41D0EC4C-452D-4CB3-8553-3AAC20353B0B}" type="slidenum">
+            <a:fld id="{DC138929-C395-43AB-82B0-A2EFC9DE35E2}" type="slidenum">
               <a:rPr lang="en-US" smtClean="0"/>
               <a:t>‹#›</a:t>
             </a:fld>
@@ -16609,7 +16609,7 @@
           <p:cNvPr id="6" name="marker_1">
             <a:extLst>
               <a:ext uri="{FF2B5EF4-FFF2-40B4-BE49-F238E27FC236}">
-                <a16:creationId xmlns:a16="http://schemas.microsoft.com/office/drawing/2014/main" id="{81C18253-35BA-F582-28B8-6CC188A3A7C7}"/>
+                <a16:creationId xmlns:a16="http://schemas.microsoft.com/office/drawing/2014/main" id="{5048BB32-8642-D8DD-BBE3-D6838CBDCBD2}"/>
               </a:ext>
             </a:extLst>
           </p:cNvPr>
@@ -16645,7 +16645,7 @@
               </a:spcBef>
               <a:buFontTx/>
               <a:buNone/>
-              <a:defRPr sz="2400" b="1">
+              <a:defRPr sz="2000" b="1">
                 <a:solidFill>
                   <a:schemeClr val="bg1"/>
                 </a:solidFill>
@@ -16667,7 +16667,7 @@
           <p:cNvPr id="7" name="item_1">
             <a:extLst>
               <a:ext uri="{FF2B5EF4-FFF2-40B4-BE49-F238E27FC236}">
-                <a16:creationId xmlns:a16="http://schemas.microsoft.com/office/drawing/2014/main" id="{86219CC1-4141-F85F-96A2-20162B54C864}"/>
+                <a16:creationId xmlns:a16="http://schemas.microsoft.com/office/drawing/2014/main" id="{2E8993F3-32F3-053D-EB2B-021FDE9548FE}"/>
               </a:ext>
             </a:extLst>
           </p:cNvPr>
@@ -16715,7 +16715,7 @@
           <p:cNvPr id="8" name="marker_2">
             <a:extLst>
               <a:ext uri="{FF2B5EF4-FFF2-40B4-BE49-F238E27FC236}">
-                <a16:creationId xmlns:a16="http://schemas.microsoft.com/office/drawing/2014/main" id="{BD99F41C-03A9-43ED-C9F0-5C1BF1D8622B}"/>
+                <a16:creationId xmlns:a16="http://schemas.microsoft.com/office/drawing/2014/main" id="{1C9EA889-79B5-70C7-60AE-0FA844E93415}"/>
               </a:ext>
             </a:extLst>
           </p:cNvPr>
@@ -16751,7 +16751,7 @@
               </a:spcBef>
               <a:buFontTx/>
               <a:buNone/>
-              <a:defRPr sz="2400" b="1">
+              <a:defRPr sz="2000" b="1">
                 <a:solidFill>
                   <a:schemeClr val="bg1"/>
                 </a:solidFill>
@@ -16773,7 +16773,7 @@
           <p:cNvPr id="9" name="item_2">
             <a:extLst>
               <a:ext uri="{FF2B5EF4-FFF2-40B4-BE49-F238E27FC236}">
-                <a16:creationId xmlns:a16="http://schemas.microsoft.com/office/drawing/2014/main" id="{7DA6094E-333C-B4E5-B1AA-127B67C28726}"/>
+                <a16:creationId xmlns:a16="http://schemas.microsoft.com/office/drawing/2014/main" id="{A994C450-01C5-B1FC-729C-D0B741B83B8F}"/>
               </a:ext>
             </a:extLst>
           </p:cNvPr>
@@ -16821,7 +16821,7 @@
           <p:cNvPr id="10" name="marker_3">
             <a:extLst>
               <a:ext uri="{FF2B5EF4-FFF2-40B4-BE49-F238E27FC236}">
-                <a16:creationId xmlns:a16="http://schemas.microsoft.com/office/drawing/2014/main" id="{8CB71822-9AC9-13D5-2074-760087FBC7AB}"/>
+                <a16:creationId xmlns:a16="http://schemas.microsoft.com/office/drawing/2014/main" id="{8A1A81EE-4626-EAF2-C507-2600141E2E51}"/>
               </a:ext>
             </a:extLst>
           </p:cNvPr>
@@ -16857,7 +16857,7 @@
               </a:spcBef>
               <a:buFontTx/>
               <a:buNone/>
-              <a:defRPr sz="2400" b="1">
+              <a:defRPr sz="2000" b="1">
                 <a:solidFill>
                   <a:schemeClr val="bg1"/>
                 </a:solidFill>
@@ -16879,7 +16879,7 @@
           <p:cNvPr id="11" name="item_3">
             <a:extLst>
               <a:ext uri="{FF2B5EF4-FFF2-40B4-BE49-F238E27FC236}">
-                <a16:creationId xmlns:a16="http://schemas.microsoft.com/office/drawing/2014/main" id="{0549B251-62A5-6418-AD09-097B00A903A6}"/>
+                <a16:creationId xmlns:a16="http://schemas.microsoft.com/office/drawing/2014/main" id="{3AF60BF7-528A-402E-943D-3EBF06BE3D6B}"/>
               </a:ext>
             </a:extLst>
           </p:cNvPr>
@@ -16927,7 +16927,7 @@
           <p:cNvPr id="12" name="marker_4">
             <a:extLst>
               <a:ext uri="{FF2B5EF4-FFF2-40B4-BE49-F238E27FC236}">
-                <a16:creationId xmlns:a16="http://schemas.microsoft.com/office/drawing/2014/main" id="{25AE8B7C-6086-9C71-F0FC-DED9006D8819}"/>
+                <a16:creationId xmlns:a16="http://schemas.microsoft.com/office/drawing/2014/main" id="{E9CBD91B-63E2-E1F6-3203-7A12B0989557}"/>
               </a:ext>
             </a:extLst>
           </p:cNvPr>
@@ -16963,7 +16963,7 @@
               </a:spcBef>
               <a:buFontTx/>
               <a:buNone/>
-              <a:defRPr sz="2400" b="1">
+              <a:defRPr sz="2000" b="1">
                 <a:solidFill>
                   <a:schemeClr val="bg1"/>
                 </a:solidFill>
@@ -16985,7 +16985,7 @@
           <p:cNvPr id="13" name="item_4">
             <a:extLst>
               <a:ext uri="{FF2B5EF4-FFF2-40B4-BE49-F238E27FC236}">
-                <a16:creationId xmlns:a16="http://schemas.microsoft.com/office/drawing/2014/main" id="{5483B9AC-E15F-2AE7-14DE-CCA9B369A339}"/>
+                <a16:creationId xmlns:a16="http://schemas.microsoft.com/office/drawing/2014/main" id="{52597F6B-2DD9-8ADF-E514-BEE80540DA06}"/>
               </a:ext>
             </a:extLst>
           </p:cNvPr>
@@ -17033,7 +17033,7 @@
           <p:cNvPr id="14" name="source">
             <a:extLst>
               <a:ext uri="{FF2B5EF4-FFF2-40B4-BE49-F238E27FC236}">
-                <a16:creationId xmlns:a16="http://schemas.microsoft.com/office/drawing/2014/main" id="{FCC34063-3233-999A-9518-DC256BF5DD7B}"/>
+                <a16:creationId xmlns:a16="http://schemas.microsoft.com/office/drawing/2014/main" id="{81E41D64-DB4E-849E-F987-5D7C285E4851}"/>
               </a:ext>
             </a:extLst>
           </p:cNvPr>
@@ -17090,7 +17090,7 @@
     </p:spTree>
     <p:extLst>
       <p:ext uri="{BB962C8B-B14F-4D97-AF65-F5344CB8AC3E}">
-        <p14:creationId xmlns:p14="http://schemas.microsoft.com/office/powerpoint/2010/main" val="1441894506"/>
+        <p14:creationId xmlns:p14="http://schemas.microsoft.com/office/powerpoint/2010/main" val="3033326919"/>
       </p:ext>
     </p:extLst>
   </p:cSld>
@@ -17170,7 +17170,7 @@
           <a:bodyPr/>
           <a:lstStyle/>
           <a:p>
-            <a:fld id="{784F70EA-3FD3-4955-90A7-9334D40F9408}" type="datetimeFigureOut">
+            <a:fld id="{9B28EAFD-CAE0-41EE-B184-026F7F5DC9D1}" type="datetimeFigureOut">
               <a:rPr lang="en-US" smtClean="0"/>
               <a:t>10/3/2026</a:t>
             </a:fld>
@@ -17212,7 +17212,7 @@
           <a:bodyPr/>
           <a:lstStyle/>
           <a:p>
-            <a:fld id="{41D0EC4C-452D-4CB3-8553-3AAC20353B0B}" type="slidenum">
+            <a:fld id="{DC138929-C395-43AB-82B0-A2EFC9DE35E2}" type="slidenum">
               <a:rPr lang="en-US" smtClean="0"/>
               <a:t>‹#›</a:t>
             </a:fld>
@@ -17225,7 +17225,7 @@
           <p:cNvPr id="6" name="decisions_title">
             <a:extLst>
               <a:ext uri="{FF2B5EF4-FFF2-40B4-BE49-F238E27FC236}">
-                <a16:creationId xmlns:a16="http://schemas.microsoft.com/office/drawing/2014/main" id="{28645386-DFEF-5373-3BEB-6E5D81D65E2B}"/>
+                <a16:creationId xmlns:a16="http://schemas.microsoft.com/office/drawing/2014/main" id="{7FFA45E4-AC68-66D4-974C-9AF6FE62EB7A}"/>
               </a:ext>
             </a:extLst>
           </p:cNvPr>
@@ -17238,8 +17238,8 @@
         </p:nvSpPr>
         <p:spPr>
           <a:xfrm>
-            <a:off x="853676" y="4641294"/>
-            <a:ext cx="1882450" cy="763884"/>
+            <a:off x="831634" y="4615747"/>
+            <a:ext cx="2080835" cy="814980"/>
           </a:xfrm>
         </p:spPr>
         <p:txBody>
@@ -17277,7 +17277,7 @@
           <p:cNvPr id="7" name="decisions">
             <a:extLst>
               <a:ext uri="{FF2B5EF4-FFF2-40B4-BE49-F238E27FC236}">
-                <a16:creationId xmlns:a16="http://schemas.microsoft.com/office/drawing/2014/main" id="{ADB79720-29E8-7409-6B72-AD432E7174C0}"/>
+                <a16:creationId xmlns:a16="http://schemas.microsoft.com/office/drawing/2014/main" id="{190A4227-D43A-530B-1FF4-6033F574FDDA}"/>
               </a:ext>
             </a:extLst>
           </p:cNvPr>
@@ -17290,8 +17290,8 @@
         </p:nvSpPr>
         <p:spPr>
           <a:xfrm>
-            <a:off x="3174776" y="4641294"/>
-            <a:ext cx="5922884" cy="763884"/>
+            <a:off x="2998435" y="4615747"/>
+            <a:ext cx="6121269" cy="814980"/>
           </a:xfrm>
           <a:prstGeom prst="rect">
             <a:avLst/>
@@ -17303,7 +17303,7 @@
           </a:bodyPr>
           <a:lstStyle>
             <a:lvl1pPr>
-              <a:defRPr sz="1800"/>
+              <a:defRPr sz="2000"/>
             </a:lvl1pPr>
           </a:lstStyle>
           <a:p>
@@ -17320,7 +17320,7 @@
           <p:cNvPr id="8" name="item_1_title">
             <a:extLst>
               <a:ext uri="{FF2B5EF4-FFF2-40B4-BE49-F238E27FC236}">
-                <a16:creationId xmlns:a16="http://schemas.microsoft.com/office/drawing/2014/main" id="{D123F00F-5751-F2D5-7571-90F7C0A6722E}"/>
+                <a16:creationId xmlns:a16="http://schemas.microsoft.com/office/drawing/2014/main" id="{43FC763F-8E40-8032-8392-49ED8883BC3F}"/>
               </a:ext>
             </a:extLst>
           </p:cNvPr>
@@ -17333,8 +17333,8 @@
         </p:nvSpPr>
         <p:spPr>
           <a:xfrm>
-            <a:off x="853677" y="2364973"/>
-            <a:ext cx="2395311" cy="488417"/>
+            <a:off x="831633" y="2339425"/>
+            <a:ext cx="2439396" cy="503445"/>
           </a:xfrm>
           <a:prstGeom prst="rect">
             <a:avLst/>
@@ -17351,7 +17351,7 @@
               </a:spcBef>
               <a:buFontTx/>
               <a:buNone/>
-              <a:defRPr sz="2200" b="1">
+              <a:defRPr sz="2000" b="1">
                 <a:solidFill>
                   <a:schemeClr val="accent1">
                     <a:lumMod val="50000"/>
@@ -17375,7 +17375,7 @@
           <p:cNvPr id="9" name="item_1">
             <a:extLst>
               <a:ext uri="{FF2B5EF4-FFF2-40B4-BE49-F238E27FC236}">
-                <a16:creationId xmlns:a16="http://schemas.microsoft.com/office/drawing/2014/main" id="{BE0667D0-DBAF-7965-D7BF-47086A1A7966}"/>
+                <a16:creationId xmlns:a16="http://schemas.microsoft.com/office/drawing/2014/main" id="{565A141F-96E1-41DA-0E99-BDFE3036ABCA}"/>
               </a:ext>
             </a:extLst>
           </p:cNvPr>
@@ -17388,8 +17388,8 @@
         </p:nvSpPr>
         <p:spPr>
           <a:xfrm>
-            <a:off x="853677" y="2853389"/>
-            <a:ext cx="2395311" cy="1172200"/>
+            <a:off x="831633" y="2842869"/>
+            <a:ext cx="2439396" cy="1208268"/>
           </a:xfrm>
           <a:prstGeom prst="rect">
             <a:avLst/>
@@ -17423,7 +17423,7 @@
           <p:cNvPr id="10" name="item_2_title">
             <a:extLst>
               <a:ext uri="{FF2B5EF4-FFF2-40B4-BE49-F238E27FC236}">
-                <a16:creationId xmlns:a16="http://schemas.microsoft.com/office/drawing/2014/main" id="{E56B19E9-7302-C435-80DB-5B684C227BF6}"/>
+                <a16:creationId xmlns:a16="http://schemas.microsoft.com/office/drawing/2014/main" id="{F32FBA0F-D286-1E30-253A-76B749143CBA}"/>
               </a:ext>
             </a:extLst>
           </p:cNvPr>
@@ -17436,8 +17436,8 @@
         </p:nvSpPr>
         <p:spPr>
           <a:xfrm>
-            <a:off x="3778014" y="2364973"/>
-            <a:ext cx="2395311" cy="488417"/>
+            <a:off x="3755970" y="2339425"/>
+            <a:ext cx="2439396" cy="503445"/>
           </a:xfrm>
           <a:prstGeom prst="rect">
             <a:avLst/>
@@ -17454,7 +17454,7 @@
               </a:spcBef>
               <a:buFontTx/>
               <a:buNone/>
-              <a:defRPr sz="2200" b="1">
+              <a:defRPr sz="2000" b="1">
                 <a:solidFill>
                   <a:schemeClr val="accent1">
                     <a:lumMod val="50000"/>
@@ -17478,7 +17478,7 @@
           <p:cNvPr id="11" name="item_2">
             <a:extLst>
               <a:ext uri="{FF2B5EF4-FFF2-40B4-BE49-F238E27FC236}">
-                <a16:creationId xmlns:a16="http://schemas.microsoft.com/office/drawing/2014/main" id="{055AADB7-5D38-7183-5730-E9009F05EBD2}"/>
+                <a16:creationId xmlns:a16="http://schemas.microsoft.com/office/drawing/2014/main" id="{1DA0BA2D-A92C-43AF-F4AF-01EDC2ACD3E6}"/>
               </a:ext>
             </a:extLst>
           </p:cNvPr>
@@ -17491,8 +17491,8 @@
         </p:nvSpPr>
         <p:spPr>
           <a:xfrm>
-            <a:off x="3778014" y="2853389"/>
-            <a:ext cx="2395311" cy="1172200"/>
+            <a:off x="3755970" y="2842869"/>
+            <a:ext cx="2439396" cy="1208268"/>
           </a:xfrm>
           <a:prstGeom prst="rect">
             <a:avLst/>
@@ -17526,7 +17526,7 @@
           <p:cNvPr id="12" name="item_3_title">
             <a:extLst>
               <a:ext uri="{FF2B5EF4-FFF2-40B4-BE49-F238E27FC236}">
-                <a16:creationId xmlns:a16="http://schemas.microsoft.com/office/drawing/2014/main" id="{78583213-8D27-82C7-E9C8-7513AF1D68DE}"/>
+                <a16:creationId xmlns:a16="http://schemas.microsoft.com/office/drawing/2014/main" id="{46AC90BC-CF7D-C61A-611A-47EA2FFC51A0}"/>
               </a:ext>
             </a:extLst>
           </p:cNvPr>
@@ -17539,8 +17539,8 @@
         </p:nvSpPr>
         <p:spPr>
           <a:xfrm>
-            <a:off x="6702350" y="2364973"/>
-            <a:ext cx="2395311" cy="488417"/>
+            <a:off x="6680306" y="2339425"/>
+            <a:ext cx="2439396" cy="503445"/>
           </a:xfrm>
           <a:prstGeom prst="rect">
             <a:avLst/>
@@ -17557,7 +17557,7 @@
               </a:spcBef>
               <a:buFontTx/>
               <a:buNone/>
-              <a:defRPr sz="2200" b="1">
+              <a:defRPr sz="2000" b="1">
                 <a:solidFill>
                   <a:schemeClr val="accent1">
                     <a:lumMod val="50000"/>
@@ -17581,7 +17581,7 @@
           <p:cNvPr id="13" name="item_3">
             <a:extLst>
               <a:ext uri="{FF2B5EF4-FFF2-40B4-BE49-F238E27FC236}">
-                <a16:creationId xmlns:a16="http://schemas.microsoft.com/office/drawing/2014/main" id="{0738175B-0AFB-6057-B731-F4B7654326D6}"/>
+                <a16:creationId xmlns:a16="http://schemas.microsoft.com/office/drawing/2014/main" id="{BDBF522C-DF9B-AB3E-8E1B-4A2AA8F6DEEA}"/>
               </a:ext>
             </a:extLst>
           </p:cNvPr>
@@ -17594,8 +17594,8 @@
         </p:nvSpPr>
         <p:spPr>
           <a:xfrm>
-            <a:off x="6702350" y="2853389"/>
-            <a:ext cx="2395311" cy="1172200"/>
+            <a:off x="6680306" y="2842869"/>
+            <a:ext cx="2439396" cy="1208268"/>
           </a:xfrm>
           <a:prstGeom prst="rect">
             <a:avLst/>
@@ -17629,7 +17629,7 @@
           <p:cNvPr id="14" name="source">
             <a:extLst>
               <a:ext uri="{FF2B5EF4-FFF2-40B4-BE49-F238E27FC236}">
-                <a16:creationId xmlns:a16="http://schemas.microsoft.com/office/drawing/2014/main" id="{913ADC88-72DF-C349-C9DA-E3EA7667276E}"/>
+                <a16:creationId xmlns:a16="http://schemas.microsoft.com/office/drawing/2014/main" id="{1EBCF797-4BDB-E565-FEC4-F2CB27FE1953}"/>
               </a:ext>
             </a:extLst>
           </p:cNvPr>
@@ -17686,7 +17686,7 @@
     </p:spTree>
     <p:extLst>
       <p:ext uri="{BB962C8B-B14F-4D97-AF65-F5344CB8AC3E}">
-        <p14:creationId xmlns:p14="http://schemas.microsoft.com/office/powerpoint/2010/main" val="467091605"/>
+        <p14:creationId xmlns:p14="http://schemas.microsoft.com/office/powerpoint/2010/main" val="1091771121"/>
       </p:ext>
     </p:extLst>
   </p:cSld>
@@ -17766,7 +17766,7 @@
           <a:bodyPr/>
           <a:lstStyle/>
           <a:p>
-            <a:fld id="{784F70EA-3FD3-4955-90A7-9334D40F9408}" type="datetimeFigureOut">
+            <a:fld id="{9B28EAFD-CAE0-41EE-B184-026F7F5DC9D1}" type="datetimeFigureOut">
               <a:rPr lang="en-US" smtClean="0"/>
               <a:t>10/3/2026</a:t>
             </a:fld>
@@ -17808,7 +17808,7 @@
           <a:bodyPr/>
           <a:lstStyle/>
           <a:p>
-            <a:fld id="{41D0EC4C-452D-4CB3-8553-3AAC20353B0B}" type="slidenum">
+            <a:fld id="{DC138929-C395-43AB-82B0-A2EFC9DE35E2}" type="slidenum">
               <a:rPr lang="en-US" smtClean="0"/>
               <a:t>‹#›</a:t>
             </a:fld>
@@ -17821,7 +17821,7 @@
           <p:cNvPr id="6" name="body">
             <a:extLst>
               <a:ext uri="{FF2B5EF4-FFF2-40B4-BE49-F238E27FC236}">
-                <a16:creationId xmlns:a16="http://schemas.microsoft.com/office/drawing/2014/main" id="{36D3F77A-9319-8899-D6C1-4AA1CCCCB7AB}"/>
+                <a16:creationId xmlns:a16="http://schemas.microsoft.com/office/drawing/2014/main" id="{F35B5624-C383-1BE9-C933-6B756D72253E}"/>
               </a:ext>
             </a:extLst>
           </p:cNvPr>
@@ -17861,7 +17861,7 @@
           <p:cNvPr id="7" name="kpi_value_1">
             <a:extLst>
               <a:ext uri="{FF2B5EF4-FFF2-40B4-BE49-F238E27FC236}">
-                <a16:creationId xmlns:a16="http://schemas.microsoft.com/office/drawing/2014/main" id="{97B1DEDF-5FE4-8235-AACA-42A1B7DAA060}"/>
+                <a16:creationId xmlns:a16="http://schemas.microsoft.com/office/drawing/2014/main" id="{9A99EDFF-3CA3-937F-6C1F-2F690C02AD14}"/>
               </a:ext>
             </a:extLst>
           </p:cNvPr>
@@ -17874,8 +17874,8 @@
         </p:nvSpPr>
         <p:spPr>
           <a:xfrm>
-            <a:off x="853677" y="2364973"/>
-            <a:ext cx="3857479" cy="1422291"/>
+            <a:off x="831634" y="2339424"/>
+            <a:ext cx="3901565" cy="1455138"/>
           </a:xfrm>
           <a:prstGeom prst="rect">
             <a:avLst/>
@@ -17892,7 +17892,7 @@
               </a:spcBef>
               <a:buFontTx/>
               <a:buNone/>
-              <a:defRPr sz="8400" b="1">
+              <a:defRPr sz="6000" b="1">
                 <a:solidFill>
                   <a:schemeClr val="accent1">
                     <a:lumMod val="50000"/>
@@ -17916,7 +17916,7 @@
           <p:cNvPr id="8" name="kpi_label_1">
             <a:extLst>
               <a:ext uri="{FF2B5EF4-FFF2-40B4-BE49-F238E27FC236}">
-                <a16:creationId xmlns:a16="http://schemas.microsoft.com/office/drawing/2014/main" id="{01E64536-7F0E-4465-F029-F990A1220148}"/>
+                <a16:creationId xmlns:a16="http://schemas.microsoft.com/office/drawing/2014/main" id="{C1B24EAE-8030-97A5-C344-98AF7435544C}"/>
               </a:ext>
             </a:extLst>
           </p:cNvPr>
@@ -17929,8 +17929,8 @@
         </p:nvSpPr>
         <p:spPr>
           <a:xfrm>
-            <a:off x="853677" y="3787263"/>
-            <a:ext cx="3857479" cy="790162"/>
+            <a:off x="831634" y="3794563"/>
+            <a:ext cx="3901565" cy="808410"/>
           </a:xfrm>
           <a:prstGeom prst="rect">
             <a:avLst/>
@@ -17947,7 +17947,7 @@
               </a:spcBef>
               <a:buFontTx/>
               <a:buNone/>
-              <a:defRPr sz="1800"/>
+              <a:defRPr sz="2000"/>
             </a:lvl1pPr>
           </a:lstStyle>
           <a:p>
@@ -17964,7 +17964,7 @@
           <p:cNvPr id="9" name="kpi_value_2">
             <a:extLst>
               <a:ext uri="{FF2B5EF4-FFF2-40B4-BE49-F238E27FC236}">
-                <a16:creationId xmlns:a16="http://schemas.microsoft.com/office/drawing/2014/main" id="{5E0F4EC9-6331-4018-E015-3E0ED5B03BFC}"/>
+                <a16:creationId xmlns:a16="http://schemas.microsoft.com/office/drawing/2014/main" id="{879F9B46-C37D-7059-A1CE-EFF590BD856E}"/>
               </a:ext>
             </a:extLst>
           </p:cNvPr>
@@ -17977,8 +17977,8 @@
         </p:nvSpPr>
         <p:spPr>
           <a:xfrm>
-            <a:off x="5240182" y="2364973"/>
-            <a:ext cx="3857479" cy="1422291"/>
+            <a:off x="5218139" y="2339424"/>
+            <a:ext cx="3901565" cy="1455138"/>
           </a:xfrm>
           <a:prstGeom prst="rect">
             <a:avLst/>
@@ -17995,7 +17995,7 @@
               </a:spcBef>
               <a:buFontTx/>
               <a:buNone/>
-              <a:defRPr sz="8400" b="1">
+              <a:defRPr sz="6000" b="1">
                 <a:solidFill>
                   <a:schemeClr val="accent1">
                     <a:lumMod val="50000"/>
@@ -18019,7 +18019,7 @@
           <p:cNvPr id="10" name="kpi_label_2">
             <a:extLst>
               <a:ext uri="{FF2B5EF4-FFF2-40B4-BE49-F238E27FC236}">
-                <a16:creationId xmlns:a16="http://schemas.microsoft.com/office/drawing/2014/main" id="{C2812B43-FD21-07DD-89A3-44AFBC031776}"/>
+                <a16:creationId xmlns:a16="http://schemas.microsoft.com/office/drawing/2014/main" id="{A6606685-A0AF-53E5-F1E9-D241D876D64D}"/>
               </a:ext>
             </a:extLst>
           </p:cNvPr>
@@ -18032,8 +18032,8 @@
         </p:nvSpPr>
         <p:spPr>
           <a:xfrm>
-            <a:off x="5240182" y="3787263"/>
-            <a:ext cx="3857479" cy="790162"/>
+            <a:off x="5218139" y="3794563"/>
+            <a:ext cx="3901565" cy="808410"/>
           </a:xfrm>
           <a:prstGeom prst="rect">
             <a:avLst/>
@@ -18050,7 +18050,7 @@
               </a:spcBef>
               <a:buFontTx/>
               <a:buNone/>
-              <a:defRPr sz="1800"/>
+              <a:defRPr sz="2000"/>
             </a:lvl1pPr>
           </a:lstStyle>
           <a:p>
@@ -18067,7 +18067,7 @@
           <p:cNvPr id="11" name="source">
             <a:extLst>
               <a:ext uri="{FF2B5EF4-FFF2-40B4-BE49-F238E27FC236}">
-                <a16:creationId xmlns:a16="http://schemas.microsoft.com/office/drawing/2014/main" id="{902C3573-4992-2183-C0DC-0ED6EA9D52D8}"/>
+                <a16:creationId xmlns:a16="http://schemas.microsoft.com/office/drawing/2014/main" id="{93D2B5FE-08B6-1BC7-F41F-36F0C4A0AACD}"/>
               </a:ext>
             </a:extLst>
           </p:cNvPr>
@@ -18124,7 +18124,7 @@
     </p:spTree>
     <p:extLst>
       <p:ext uri="{BB962C8B-B14F-4D97-AF65-F5344CB8AC3E}">
-        <p14:creationId xmlns:p14="http://schemas.microsoft.com/office/powerpoint/2010/main" val="761703762"/>
+        <p14:creationId xmlns:p14="http://schemas.microsoft.com/office/powerpoint/2010/main" val="155601991"/>
       </p:ext>
     </p:extLst>
   </p:cSld>
@@ -18204,7 +18204,7 @@
           <a:bodyPr/>
           <a:lstStyle/>
           <a:p>
-            <a:fld id="{784F70EA-3FD3-4955-90A7-9334D40F9408}" type="datetimeFigureOut">
+            <a:fld id="{9B28EAFD-CAE0-41EE-B184-026F7F5DC9D1}" type="datetimeFigureOut">
               <a:rPr lang="en-US" smtClean="0"/>
               <a:t>10/3/2026</a:t>
             </a:fld>
@@ -18246,7 +18246,7 @@
           <a:bodyPr/>
           <a:lstStyle/>
           <a:p>
-            <a:fld id="{41D0EC4C-452D-4CB3-8553-3AAC20353B0B}" type="slidenum">
+            <a:fld id="{DC138929-C395-43AB-82B0-A2EFC9DE35E2}" type="slidenum">
               <a:rPr lang="en-US" smtClean="0"/>
               <a:t>‹#›</a:t>
             </a:fld>
@@ -18259,7 +18259,7 @@
           <p:cNvPr id="6" name="body">
             <a:extLst>
               <a:ext uri="{FF2B5EF4-FFF2-40B4-BE49-F238E27FC236}">
-                <a16:creationId xmlns:a16="http://schemas.microsoft.com/office/drawing/2014/main" id="{ADB5435D-D744-7167-CBF2-E8DC7B073E47}"/>
+                <a16:creationId xmlns:a16="http://schemas.microsoft.com/office/drawing/2014/main" id="{22F4AEC6-8FBC-1C92-CF33-56A9EF12B031}"/>
               </a:ext>
             </a:extLst>
           </p:cNvPr>
@@ -18299,7 +18299,7 @@
           <p:cNvPr id="7" name="kpi_value_1">
             <a:extLst>
               <a:ext uri="{FF2B5EF4-FFF2-40B4-BE49-F238E27FC236}">
-                <a16:creationId xmlns:a16="http://schemas.microsoft.com/office/drawing/2014/main" id="{9AA71C1D-BC2C-9798-1133-8412A651460E}"/>
+                <a16:creationId xmlns:a16="http://schemas.microsoft.com/office/drawing/2014/main" id="{505947D9-DB0F-3427-C864-67371CCF614C}"/>
               </a:ext>
             </a:extLst>
           </p:cNvPr>
@@ -18312,8 +18312,8 @@
         </p:nvSpPr>
         <p:spPr>
           <a:xfrm>
-            <a:off x="853677" y="2364973"/>
-            <a:ext cx="1664227" cy="1422291"/>
+            <a:off x="831633" y="2339424"/>
+            <a:ext cx="1708312" cy="1455138"/>
           </a:xfrm>
           <a:prstGeom prst="rect">
             <a:avLst/>
@@ -18354,7 +18354,7 @@
           <p:cNvPr id="8" name="kpi_label_1">
             <a:extLst>
               <a:ext uri="{FF2B5EF4-FFF2-40B4-BE49-F238E27FC236}">
-                <a16:creationId xmlns:a16="http://schemas.microsoft.com/office/drawing/2014/main" id="{842B365E-D30B-DD55-FB3D-E84BC1160719}"/>
+                <a16:creationId xmlns:a16="http://schemas.microsoft.com/office/drawing/2014/main" id="{15EC1951-65CC-1973-E46B-E5A30900A2FC}"/>
               </a:ext>
             </a:extLst>
           </p:cNvPr>
@@ -18367,8 +18367,8 @@
         </p:nvSpPr>
         <p:spPr>
           <a:xfrm>
-            <a:off x="853677" y="3787263"/>
-            <a:ext cx="1664227" cy="790162"/>
+            <a:off x="831633" y="3794563"/>
+            <a:ext cx="1708312" cy="808410"/>
           </a:xfrm>
           <a:prstGeom prst="rect">
             <a:avLst/>
@@ -18385,7 +18385,7 @@
               </a:spcBef>
               <a:buFontTx/>
               <a:buNone/>
-              <a:defRPr sz="1800"/>
+              <a:defRPr sz="2000"/>
             </a:lvl1pPr>
           </a:lstStyle>
           <a:p>
@@ -18402,7 +18402,7 @@
           <p:cNvPr id="9" name="kpi_value_2">
             <a:extLst>
               <a:ext uri="{FF2B5EF4-FFF2-40B4-BE49-F238E27FC236}">
-                <a16:creationId xmlns:a16="http://schemas.microsoft.com/office/drawing/2014/main" id="{42590E39-1B43-CBAA-0C18-75362753E161}"/>
+                <a16:creationId xmlns:a16="http://schemas.microsoft.com/office/drawing/2014/main" id="{6FD04245-8DA1-EE77-56BC-91AFBB232E40}"/>
               </a:ext>
             </a:extLst>
           </p:cNvPr>
@@ -18415,8 +18415,8 @@
         </p:nvSpPr>
         <p:spPr>
           <a:xfrm>
-            <a:off x="3046930" y="2364973"/>
-            <a:ext cx="1664227" cy="1422291"/>
+            <a:off x="3024886" y="2339424"/>
+            <a:ext cx="1708312" cy="1455138"/>
           </a:xfrm>
           <a:prstGeom prst="rect">
             <a:avLst/>
@@ -18457,7 +18457,7 @@
           <p:cNvPr id="10" name="kpi_label_2">
             <a:extLst>
               <a:ext uri="{FF2B5EF4-FFF2-40B4-BE49-F238E27FC236}">
-                <a16:creationId xmlns:a16="http://schemas.microsoft.com/office/drawing/2014/main" id="{3EBA7BB1-52FD-A56A-B075-A4C552CFC815}"/>
+                <a16:creationId xmlns:a16="http://schemas.microsoft.com/office/drawing/2014/main" id="{3B3B38A6-24CE-7EF6-496B-3BE10F6152BB}"/>
               </a:ext>
             </a:extLst>
           </p:cNvPr>
@@ -18470,8 +18470,8 @@
         </p:nvSpPr>
         <p:spPr>
           <a:xfrm>
-            <a:off x="3046930" y="3787263"/>
-            <a:ext cx="1664227" cy="790162"/>
+            <a:off x="3024886" y="3794563"/>
+            <a:ext cx="1708312" cy="808410"/>
           </a:xfrm>
           <a:prstGeom prst="rect">
             <a:avLst/>
@@ -18488,7 +18488,7 @@
               </a:spcBef>
               <a:buFontTx/>
               <a:buNone/>
-              <a:defRPr sz="1800"/>
+              <a:defRPr sz="2000"/>
             </a:lvl1pPr>
           </a:lstStyle>
           <a:p>
@@ -18505,7 +18505,7 @@
           <p:cNvPr id="11" name="kpi_value_3">
             <a:extLst>
               <a:ext uri="{FF2B5EF4-FFF2-40B4-BE49-F238E27FC236}">
-                <a16:creationId xmlns:a16="http://schemas.microsoft.com/office/drawing/2014/main" id="{C0F904BE-955B-07C3-2DA7-4326DDEAF1F3}"/>
+                <a16:creationId xmlns:a16="http://schemas.microsoft.com/office/drawing/2014/main" id="{B203646C-6CA1-7097-75B3-4F99C0B355C0}"/>
               </a:ext>
             </a:extLst>
           </p:cNvPr>
@@ -18518,8 +18518,8 @@
         </p:nvSpPr>
         <p:spPr>
           <a:xfrm>
-            <a:off x="5240182" y="2364973"/>
-            <a:ext cx="1664227" cy="1422291"/>
+            <a:off x="5218138" y="2339424"/>
+            <a:ext cx="1708312" cy="1455138"/>
           </a:xfrm>
           <a:prstGeom prst="rect">
             <a:avLst/>
@@ -18560,7 +18560,7 @@
           <p:cNvPr id="12" name="kpi_label_3">
             <a:extLst>
               <a:ext uri="{FF2B5EF4-FFF2-40B4-BE49-F238E27FC236}">
-                <a16:creationId xmlns:a16="http://schemas.microsoft.com/office/drawing/2014/main" id="{8B8DCFDE-71C5-D7D4-7293-B46F8B59673D}"/>
+                <a16:creationId xmlns:a16="http://schemas.microsoft.com/office/drawing/2014/main" id="{FBF3165E-21E8-4FCF-B64B-E1C884663BE5}"/>
               </a:ext>
             </a:extLst>
           </p:cNvPr>
@@ -18573,8 +18573,8 @@
         </p:nvSpPr>
         <p:spPr>
           <a:xfrm>
-            <a:off x="5240182" y="3787263"/>
-            <a:ext cx="1664227" cy="790162"/>
+            <a:off x="5218138" y="3794563"/>
+            <a:ext cx="1708312" cy="808410"/>
           </a:xfrm>
           <a:prstGeom prst="rect">
             <a:avLst/>
@@ -18591,7 +18591,7 @@
               </a:spcBef>
               <a:buFontTx/>
               <a:buNone/>
-              <a:defRPr sz="1800"/>
+              <a:defRPr sz="2000"/>
             </a:lvl1pPr>
           </a:lstStyle>
           <a:p>
@@ -18608,7 +18608,7 @@
           <p:cNvPr id="13" name="kpi_value_4">
             <a:extLst>
               <a:ext uri="{FF2B5EF4-FFF2-40B4-BE49-F238E27FC236}">
-                <a16:creationId xmlns:a16="http://schemas.microsoft.com/office/drawing/2014/main" id="{3194DA05-8902-AF62-0964-E3284B964F07}"/>
+                <a16:creationId xmlns:a16="http://schemas.microsoft.com/office/drawing/2014/main" id="{0BC842A2-3CB4-8077-E559-77137EEB2274}"/>
               </a:ext>
             </a:extLst>
           </p:cNvPr>
@@ -18621,8 +18621,8 @@
         </p:nvSpPr>
         <p:spPr>
           <a:xfrm>
-            <a:off x="7433434" y="2364973"/>
-            <a:ext cx="1664227" cy="1422291"/>
+            <a:off x="7411391" y="2339424"/>
+            <a:ext cx="1708312" cy="1455138"/>
           </a:xfrm>
           <a:prstGeom prst="rect">
             <a:avLst/>
@@ -18663,7 +18663,7 @@
           <p:cNvPr id="14" name="kpi_label_4">
             <a:extLst>
               <a:ext uri="{FF2B5EF4-FFF2-40B4-BE49-F238E27FC236}">
-                <a16:creationId xmlns:a16="http://schemas.microsoft.com/office/drawing/2014/main" id="{EF4CF60F-CC8E-1B16-8B46-16B85F82907D}"/>
+                <a16:creationId xmlns:a16="http://schemas.microsoft.com/office/drawing/2014/main" id="{418091BF-7F0C-66C8-9A1C-1F9C528E15BB}"/>
               </a:ext>
             </a:extLst>
           </p:cNvPr>
@@ -18676,8 +18676,8 @@
         </p:nvSpPr>
         <p:spPr>
           <a:xfrm>
-            <a:off x="7433434" y="3787263"/>
-            <a:ext cx="1664227" cy="790162"/>
+            <a:off x="7411391" y="3794563"/>
+            <a:ext cx="1708312" cy="808410"/>
           </a:xfrm>
           <a:prstGeom prst="rect">
             <a:avLst/>
@@ -18694,7 +18694,7 @@
               </a:spcBef>
               <a:buFontTx/>
               <a:buNone/>
-              <a:defRPr sz="1800"/>
+              <a:defRPr sz="2000"/>
             </a:lvl1pPr>
           </a:lstStyle>
           <a:p>
@@ -18711,7 +18711,7 @@
           <p:cNvPr id="15" name="source">
             <a:extLst>
               <a:ext uri="{FF2B5EF4-FFF2-40B4-BE49-F238E27FC236}">
-                <a16:creationId xmlns:a16="http://schemas.microsoft.com/office/drawing/2014/main" id="{19D6F4B3-4F8C-92BA-13E6-A23E041D22DE}"/>
+                <a16:creationId xmlns:a16="http://schemas.microsoft.com/office/drawing/2014/main" id="{32F5F41C-19DC-2756-DEE0-62CCC081B992}"/>
               </a:ext>
             </a:extLst>
           </p:cNvPr>
@@ -18768,7 +18768,7 @@
     </p:spTree>
     <p:extLst>
       <p:ext uri="{BB962C8B-B14F-4D97-AF65-F5344CB8AC3E}">
-        <p14:creationId xmlns:p14="http://schemas.microsoft.com/office/powerpoint/2010/main" val="4287587338"/>
+        <p14:creationId xmlns:p14="http://schemas.microsoft.com/office/powerpoint/2010/main" val="3016973795"/>
       </p:ext>
     </p:extLst>
   </p:cSld>
@@ -18848,7 +18848,7 @@
           <a:bodyPr/>
           <a:lstStyle/>
           <a:p>
-            <a:fld id="{784F70EA-3FD3-4955-90A7-9334D40F9408}" type="datetimeFigureOut">
+            <a:fld id="{9B28EAFD-CAE0-41EE-B184-026F7F5DC9D1}" type="datetimeFigureOut">
               <a:rPr lang="en-US" smtClean="0"/>
               <a:t>10/3/2026</a:t>
             </a:fld>
@@ -18890,7 +18890,7 @@
           <a:bodyPr/>
           <a:lstStyle/>
           <a:p>
-            <a:fld id="{41D0EC4C-452D-4CB3-8553-3AAC20353B0B}" type="slidenum">
+            <a:fld id="{DC138929-C395-43AB-82B0-A2EFC9DE35E2}" type="slidenum">
               <a:rPr lang="en-US" smtClean="0"/>
               <a:t>‹#›</a:t>
             </a:fld>
@@ -18903,7 +18903,7 @@
           <p:cNvPr id="6" name="body">
             <a:extLst>
               <a:ext uri="{FF2B5EF4-FFF2-40B4-BE49-F238E27FC236}">
-                <a16:creationId xmlns:a16="http://schemas.microsoft.com/office/drawing/2014/main" id="{19613704-CE2C-7977-7B70-C09DECEE407E}"/>
+                <a16:creationId xmlns:a16="http://schemas.microsoft.com/office/drawing/2014/main" id="{715BDADA-2D40-A30F-7F9B-75B268EEE0DD}"/>
               </a:ext>
             </a:extLst>
           </p:cNvPr>
@@ -18943,7 +18943,7 @@
           <p:cNvPr id="7" name="quote">
             <a:extLst>
               <a:ext uri="{FF2B5EF4-FFF2-40B4-BE49-F238E27FC236}">
-                <a16:creationId xmlns:a16="http://schemas.microsoft.com/office/drawing/2014/main" id="{F7B907A7-702D-D00A-8833-B755D4739896}"/>
+                <a16:creationId xmlns:a16="http://schemas.microsoft.com/office/drawing/2014/main" id="{FDC91263-B709-7FB1-4482-DEF1025E33F5}"/>
               </a:ext>
             </a:extLst>
           </p:cNvPr>
@@ -18956,8 +18956,8 @@
         </p:nvSpPr>
         <p:spPr>
           <a:xfrm>
-            <a:off x="6011678" y="2364973"/>
-            <a:ext cx="3085983" cy="2350411"/>
+            <a:off x="5989635" y="2339425"/>
+            <a:ext cx="3130069" cy="2580343"/>
           </a:xfrm>
           <a:prstGeom prst="rect">
             <a:avLst/>
@@ -18974,7 +18974,7 @@
               </a:spcBef>
               <a:buFontTx/>
               <a:buNone/>
-              <a:defRPr sz="2400" i="1">
+              <a:defRPr sz="2000" i="1">
                 <a:latin typeface="+mj-lt"/>
               </a:defRPr>
             </a:lvl1pPr>
@@ -18993,7 +18993,7 @@
           <p:cNvPr id="8" name="attribution">
             <a:extLst>
               <a:ext uri="{FF2B5EF4-FFF2-40B4-BE49-F238E27FC236}">
-                <a16:creationId xmlns:a16="http://schemas.microsoft.com/office/drawing/2014/main" id="{E12F45BB-1160-33FF-4F19-1D4480A2C5F1}"/>
+                <a16:creationId xmlns:a16="http://schemas.microsoft.com/office/drawing/2014/main" id="{0A696CC4-AAB1-D923-7468-349034C29866}"/>
               </a:ext>
             </a:extLst>
           </p:cNvPr>
@@ -19006,8 +19006,8 @@
         </p:nvSpPr>
         <p:spPr>
           <a:xfrm>
-            <a:off x="6011678" y="5124151"/>
-            <a:ext cx="3085983" cy="281027"/>
+            <a:off x="5989635" y="4919768"/>
+            <a:ext cx="3130069" cy="510959"/>
           </a:xfrm>
           <a:prstGeom prst="rect">
             <a:avLst/>
@@ -19024,7 +19024,7 @@
               </a:spcBef>
               <a:buFontTx/>
               <a:buNone/>
-              <a:defRPr sz="1400"/>
+              <a:defRPr sz="2000"/>
             </a:lvl1pPr>
           </a:lstStyle>
           <a:p>
@@ -19041,7 +19041,7 @@
           <p:cNvPr id="9" name="source">
             <a:extLst>
               <a:ext uri="{FF2B5EF4-FFF2-40B4-BE49-F238E27FC236}">
-                <a16:creationId xmlns:a16="http://schemas.microsoft.com/office/drawing/2014/main" id="{465A9F39-0D93-0B64-58F2-CF1AF8E8AE69}"/>
+                <a16:creationId xmlns:a16="http://schemas.microsoft.com/office/drawing/2014/main" id="{2AA56A1F-F71D-7401-ED17-6F2F2DBC4D24}"/>
               </a:ext>
             </a:extLst>
           </p:cNvPr>
@@ -19098,7 +19098,7 @@
     </p:spTree>
     <p:extLst>
       <p:ext uri="{BB962C8B-B14F-4D97-AF65-F5344CB8AC3E}">
-        <p14:creationId xmlns:p14="http://schemas.microsoft.com/office/powerpoint/2010/main" val="3242977552"/>
+        <p14:creationId xmlns:p14="http://schemas.microsoft.com/office/powerpoint/2010/main" val="919687439"/>
       </p:ext>
     </p:extLst>
   </p:cSld>
@@ -19178,7 +19178,7 @@
           <a:bodyPr/>
           <a:lstStyle/>
           <a:p>
-            <a:fld id="{784F70EA-3FD3-4955-90A7-9334D40F9408}" type="datetimeFigureOut">
+            <a:fld id="{9B28EAFD-CAE0-41EE-B184-026F7F5DC9D1}" type="datetimeFigureOut">
               <a:rPr lang="en-US" smtClean="0"/>
               <a:t>10/3/2026</a:t>
             </a:fld>
@@ -19220,7 +19220,7 @@
           <a:bodyPr/>
           <a:lstStyle/>
           <a:p>
-            <a:fld id="{41D0EC4C-452D-4CB3-8553-3AAC20353B0B}" type="slidenum">
+            <a:fld id="{DC138929-C395-43AB-82B0-A2EFC9DE35E2}" type="slidenum">
               <a:rPr lang="en-US" smtClean="0"/>
               <a:t>‹#›</a:t>
             </a:fld>
@@ -19233,7 +19233,7 @@
           <p:cNvPr id="6" name="item_1_title">
             <a:extLst>
               <a:ext uri="{FF2B5EF4-FFF2-40B4-BE49-F238E27FC236}">
-                <a16:creationId xmlns:a16="http://schemas.microsoft.com/office/drawing/2014/main" id="{D31253C9-478C-63A8-A1B6-7DC3DC7ECEB9}"/>
+                <a16:creationId xmlns:a16="http://schemas.microsoft.com/office/drawing/2014/main" id="{E8D1AC18-169F-AFF9-0915-E7C2FEA6A648}"/>
               </a:ext>
             </a:extLst>
           </p:cNvPr>
@@ -19246,8 +19246,8 @@
         </p:nvSpPr>
         <p:spPr>
           <a:xfrm>
-            <a:off x="853677" y="2364972"/>
-            <a:ext cx="2395311" cy="894178"/>
+            <a:off x="831633" y="2339424"/>
+            <a:ext cx="2439396" cy="909206"/>
           </a:xfrm>
         </p:spPr>
         <p:txBody>
@@ -19261,7 +19261,7 @@
               </a:spcBef>
               <a:buFontTx/>
               <a:buNone/>
-              <a:defRPr sz="2200" b="1">
+              <a:defRPr sz="2000" b="1">
                 <a:solidFill>
                   <a:schemeClr val="accent1">
                     <a:lumMod val="50000"/>
@@ -19285,7 +19285,7 @@
           <p:cNvPr id="7" name="item_1">
             <a:extLst>
               <a:ext uri="{FF2B5EF4-FFF2-40B4-BE49-F238E27FC236}">
-                <a16:creationId xmlns:a16="http://schemas.microsoft.com/office/drawing/2014/main" id="{55819703-6376-0CA7-4491-383B1400EF0B}"/>
+                <a16:creationId xmlns:a16="http://schemas.microsoft.com/office/drawing/2014/main" id="{A1BF2C1A-E07B-DC57-7A3F-2AD7083800E3}"/>
               </a:ext>
             </a:extLst>
           </p:cNvPr>
@@ -19298,8 +19298,8 @@
         </p:nvSpPr>
         <p:spPr>
           <a:xfrm>
-            <a:off x="853677" y="3259150"/>
-            <a:ext cx="2395311" cy="2146028"/>
+            <a:off x="831633" y="3248632"/>
+            <a:ext cx="2439396" cy="2182095"/>
           </a:xfrm>
           <a:prstGeom prst="rect">
             <a:avLst/>
@@ -19333,7 +19333,7 @@
           <p:cNvPr id="8" name="item_2_title">
             <a:extLst>
               <a:ext uri="{FF2B5EF4-FFF2-40B4-BE49-F238E27FC236}">
-                <a16:creationId xmlns:a16="http://schemas.microsoft.com/office/drawing/2014/main" id="{538235FD-263B-D384-DE1F-F78F8167F3B0}"/>
+                <a16:creationId xmlns:a16="http://schemas.microsoft.com/office/drawing/2014/main" id="{A0F58861-9CF8-019D-CC74-D4B8711D7031}"/>
               </a:ext>
             </a:extLst>
           </p:cNvPr>
@@ -19346,8 +19346,8 @@
         </p:nvSpPr>
         <p:spPr>
           <a:xfrm>
-            <a:off x="3778014" y="2364972"/>
-            <a:ext cx="2395311" cy="894178"/>
+            <a:off x="3755970" y="2339424"/>
+            <a:ext cx="2439396" cy="909206"/>
           </a:xfrm>
           <a:prstGeom prst="rect">
             <a:avLst/>
@@ -19364,7 +19364,7 @@
               </a:spcBef>
               <a:buFontTx/>
               <a:buNone/>
-              <a:defRPr sz="2200" b="1">
+              <a:defRPr sz="2000" b="1">
                 <a:solidFill>
                   <a:schemeClr val="accent1">
                     <a:lumMod val="50000"/>
@@ -19388,7 +19388,7 @@
           <p:cNvPr id="9" name="item_2">
             <a:extLst>
               <a:ext uri="{FF2B5EF4-FFF2-40B4-BE49-F238E27FC236}">
-                <a16:creationId xmlns:a16="http://schemas.microsoft.com/office/drawing/2014/main" id="{ABA9567C-39BE-11D1-6790-7528A7093A9F}"/>
+                <a16:creationId xmlns:a16="http://schemas.microsoft.com/office/drawing/2014/main" id="{7B692F37-7571-FBCE-EA2E-9FA75B4FF301}"/>
               </a:ext>
             </a:extLst>
           </p:cNvPr>
@@ -19401,8 +19401,8 @@
         </p:nvSpPr>
         <p:spPr>
           <a:xfrm>
-            <a:off x="3778014" y="3259150"/>
-            <a:ext cx="2395311" cy="2146028"/>
+            <a:off x="3755970" y="3248632"/>
+            <a:ext cx="2439396" cy="2182095"/>
           </a:xfrm>
           <a:prstGeom prst="rect">
             <a:avLst/>
@@ -19436,7 +19436,7 @@
           <p:cNvPr id="10" name="item_3_title">
             <a:extLst>
               <a:ext uri="{FF2B5EF4-FFF2-40B4-BE49-F238E27FC236}">
-                <a16:creationId xmlns:a16="http://schemas.microsoft.com/office/drawing/2014/main" id="{2BB64DCD-6764-E791-C8C1-B3C262D1B7BC}"/>
+                <a16:creationId xmlns:a16="http://schemas.microsoft.com/office/drawing/2014/main" id="{085B27EB-A88D-36B2-B980-7EBEFDC5557A}"/>
               </a:ext>
             </a:extLst>
           </p:cNvPr>
@@ -19449,8 +19449,8 @@
         </p:nvSpPr>
         <p:spPr>
           <a:xfrm>
-            <a:off x="6702350" y="2364972"/>
-            <a:ext cx="2395311" cy="894178"/>
+            <a:off x="6680306" y="2339424"/>
+            <a:ext cx="2439396" cy="909206"/>
           </a:xfrm>
           <a:prstGeom prst="rect">
             <a:avLst/>
@@ -19467,7 +19467,7 @@
               </a:spcBef>
               <a:buFontTx/>
               <a:buNone/>
-              <a:defRPr sz="2200" b="1">
+              <a:defRPr sz="2000" b="1">
                 <a:solidFill>
                   <a:schemeClr val="accent1">
                     <a:lumMod val="50000"/>
@@ -19491,7 +19491,7 @@
           <p:cNvPr id="11" name="item_3">
             <a:extLst>
               <a:ext uri="{FF2B5EF4-FFF2-40B4-BE49-F238E27FC236}">
-                <a16:creationId xmlns:a16="http://schemas.microsoft.com/office/drawing/2014/main" id="{A7E292C7-2889-23BF-F4B7-3D1C9F39180D}"/>
+                <a16:creationId xmlns:a16="http://schemas.microsoft.com/office/drawing/2014/main" id="{E4B63A3A-0BA3-223A-FCA6-8D4AB9DF229A}"/>
               </a:ext>
             </a:extLst>
           </p:cNvPr>
@@ -19504,8 +19504,8 @@
         </p:nvSpPr>
         <p:spPr>
           <a:xfrm>
-            <a:off x="6702350" y="3259150"/>
-            <a:ext cx="2395311" cy="2146028"/>
+            <a:off x="6680306" y="3248632"/>
+            <a:ext cx="2439396" cy="2182095"/>
           </a:xfrm>
           <a:prstGeom prst="rect">
             <a:avLst/>
@@ -19539,7 +19539,7 @@
           <p:cNvPr id="12" name="source">
             <a:extLst>
               <a:ext uri="{FF2B5EF4-FFF2-40B4-BE49-F238E27FC236}">
-                <a16:creationId xmlns:a16="http://schemas.microsoft.com/office/drawing/2014/main" id="{E23076AC-588C-38DE-EC90-7C480EAED4D9}"/>
+                <a16:creationId xmlns:a16="http://schemas.microsoft.com/office/drawing/2014/main" id="{D030BCA8-E4E0-06FF-856E-FE1FC7B5B53B}"/>
               </a:ext>
             </a:extLst>
           </p:cNvPr>
@@ -19596,7 +19596,7 @@
     </p:spTree>
     <p:extLst>
       <p:ext uri="{BB962C8B-B14F-4D97-AF65-F5344CB8AC3E}">
-        <p14:creationId xmlns:p14="http://schemas.microsoft.com/office/powerpoint/2010/main" val="4134660921"/>
+        <p14:creationId xmlns:p14="http://schemas.microsoft.com/office/powerpoint/2010/main" val="4285676372"/>
       </p:ext>
     </p:extLst>
   </p:cSld>
@@ -19676,7 +19676,7 @@
           <a:bodyPr/>
           <a:lstStyle/>
           <a:p>
-            <a:fld id="{784F70EA-3FD3-4955-90A7-9334D40F9408}" type="datetimeFigureOut">
+            <a:fld id="{9B28EAFD-CAE0-41EE-B184-026F7F5DC9D1}" type="datetimeFigureOut">
               <a:rPr lang="en-US" smtClean="0"/>
               <a:t>10/3/2026</a:t>
             </a:fld>
@@ -19718,7 +19718,7 @@
           <a:bodyPr/>
           <a:lstStyle/>
           <a:p>
-            <a:fld id="{41D0EC4C-452D-4CB3-8553-3AAC20353B0B}" type="slidenum">
+            <a:fld id="{DC138929-C395-43AB-82B0-A2EFC9DE35E2}" type="slidenum">
               <a:rPr lang="en-US" smtClean="0"/>
               <a:t>‹#›</a:t>
             </a:fld>
@@ -19731,7 +19731,7 @@
           <p:cNvPr id="6" name="item_1_title">
             <a:extLst>
               <a:ext uri="{FF2B5EF4-FFF2-40B4-BE49-F238E27FC236}">
-                <a16:creationId xmlns:a16="http://schemas.microsoft.com/office/drawing/2014/main" id="{80C4F868-1FD2-3365-AF91-5BF98C8AAF1C}"/>
+                <a16:creationId xmlns:a16="http://schemas.microsoft.com/office/drawing/2014/main" id="{50E2293E-E3A0-16A6-1F17-CC7F1BFCAEE1}"/>
               </a:ext>
             </a:extLst>
           </p:cNvPr>
@@ -19744,8 +19744,8 @@
         </p:nvSpPr>
         <p:spPr>
           <a:xfrm>
-            <a:off x="853677" y="2364972"/>
-            <a:ext cx="3857479" cy="894178"/>
+            <a:off x="831634" y="2339424"/>
+            <a:ext cx="3901565" cy="909206"/>
           </a:xfrm>
         </p:spPr>
         <p:txBody>
@@ -19759,7 +19759,7 @@
               </a:spcBef>
               <a:buFontTx/>
               <a:buNone/>
-              <a:defRPr sz="2200" b="1">
+              <a:defRPr sz="2000" b="1">
                 <a:solidFill>
                   <a:schemeClr val="accent1">
                     <a:lumMod val="50000"/>
@@ -19783,7 +19783,7 @@
           <p:cNvPr id="7" name="item_1">
             <a:extLst>
               <a:ext uri="{FF2B5EF4-FFF2-40B4-BE49-F238E27FC236}">
-                <a16:creationId xmlns:a16="http://schemas.microsoft.com/office/drawing/2014/main" id="{30EF6BB9-AC7E-42EB-F751-2F58E4515006}"/>
+                <a16:creationId xmlns:a16="http://schemas.microsoft.com/office/drawing/2014/main" id="{D3230C8F-B138-B166-2F74-53034CF5E9C1}"/>
               </a:ext>
             </a:extLst>
           </p:cNvPr>
@@ -19796,8 +19796,8 @@
         </p:nvSpPr>
         <p:spPr>
           <a:xfrm>
-            <a:off x="853677" y="3259150"/>
-            <a:ext cx="3857479" cy="2146028"/>
+            <a:off x="831634" y="3248632"/>
+            <a:ext cx="3901565" cy="2182095"/>
           </a:xfrm>
           <a:prstGeom prst="rect">
             <a:avLst/>
@@ -19831,7 +19831,7 @@
           <p:cNvPr id="8" name="item_2_title">
             <a:extLst>
               <a:ext uri="{FF2B5EF4-FFF2-40B4-BE49-F238E27FC236}">
-                <a16:creationId xmlns:a16="http://schemas.microsoft.com/office/drawing/2014/main" id="{A2140EC1-D81E-3734-5A39-2B2F9346AB46}"/>
+                <a16:creationId xmlns:a16="http://schemas.microsoft.com/office/drawing/2014/main" id="{AC6FC47F-222D-F5F8-2F32-EFA40FC709F6}"/>
               </a:ext>
             </a:extLst>
           </p:cNvPr>
@@ -19844,8 +19844,8 @@
         </p:nvSpPr>
         <p:spPr>
           <a:xfrm>
-            <a:off x="5240182" y="2364972"/>
-            <a:ext cx="3857479" cy="894178"/>
+            <a:off x="5218139" y="2339424"/>
+            <a:ext cx="3901565" cy="909206"/>
           </a:xfrm>
           <a:prstGeom prst="rect">
             <a:avLst/>
@@ -19862,7 +19862,7 @@
               </a:spcBef>
               <a:buFontTx/>
               <a:buNone/>
-              <a:defRPr sz="2200" b="1">
+              <a:defRPr sz="2000" b="1">
                 <a:solidFill>
                   <a:schemeClr val="accent1">
                     <a:lumMod val="50000"/>
@@ -19886,7 +19886,7 @@
           <p:cNvPr id="9" name="item_2">
             <a:extLst>
               <a:ext uri="{FF2B5EF4-FFF2-40B4-BE49-F238E27FC236}">
-                <a16:creationId xmlns:a16="http://schemas.microsoft.com/office/drawing/2014/main" id="{B1C54C58-B4ED-2CDE-3220-A86272633D8F}"/>
+                <a16:creationId xmlns:a16="http://schemas.microsoft.com/office/drawing/2014/main" id="{1374BC66-BF96-4D5E-6139-24905531E282}"/>
               </a:ext>
             </a:extLst>
           </p:cNvPr>
@@ -19899,8 +19899,8 @@
         </p:nvSpPr>
         <p:spPr>
           <a:xfrm>
-            <a:off x="5240182" y="3259150"/>
-            <a:ext cx="3857479" cy="2146028"/>
+            <a:off x="5218139" y="3248632"/>
+            <a:ext cx="3901565" cy="2182095"/>
           </a:xfrm>
           <a:prstGeom prst="rect">
             <a:avLst/>
@@ -19934,7 +19934,7 @@
           <p:cNvPr id="10" name="source">
             <a:extLst>
               <a:ext uri="{FF2B5EF4-FFF2-40B4-BE49-F238E27FC236}">
-                <a16:creationId xmlns:a16="http://schemas.microsoft.com/office/drawing/2014/main" id="{78813348-8A77-7BF3-62E5-106B6EC7C54D}"/>
+                <a16:creationId xmlns:a16="http://schemas.microsoft.com/office/drawing/2014/main" id="{5BEF09E1-1558-D3CB-6285-B2E2D92FA40E}"/>
               </a:ext>
             </a:extLst>
           </p:cNvPr>
@@ -19991,7 +19991,7 @@
     </p:spTree>
     <p:extLst>
       <p:ext uri="{BB962C8B-B14F-4D97-AF65-F5344CB8AC3E}">
-        <p14:creationId xmlns:p14="http://schemas.microsoft.com/office/powerpoint/2010/main" val="2538042708"/>
+        <p14:creationId xmlns:p14="http://schemas.microsoft.com/office/powerpoint/2010/main" val="569036267"/>
       </p:ext>
     </p:extLst>
   </p:cSld>
@@ -20071,7 +20071,7 @@
           <a:bodyPr/>
           <a:lstStyle/>
           <a:p>
-            <a:fld id="{784F70EA-3FD3-4955-90A7-9334D40F9408}" type="datetimeFigureOut">
+            <a:fld id="{9B28EAFD-CAE0-41EE-B184-026F7F5DC9D1}" type="datetimeFigureOut">
               <a:rPr lang="en-US" smtClean="0"/>
               <a:t>10/3/2026</a:t>
             </a:fld>
@@ -20113,7 +20113,7 @@
           <a:bodyPr/>
           <a:lstStyle/>
           <a:p>
-            <a:fld id="{41D0EC4C-452D-4CB3-8553-3AAC20353B0B}" type="slidenum">
+            <a:fld id="{DC138929-C395-43AB-82B0-A2EFC9DE35E2}" type="slidenum">
               <a:rPr lang="en-US" smtClean="0"/>
               <a:t>‹#›</a:t>
             </a:fld>
@@ -20126,7 +20126,7 @@
           <p:cNvPr id="6" name="chart">
             <a:extLst>
               <a:ext uri="{FF2B5EF4-FFF2-40B4-BE49-F238E27FC236}">
-                <a16:creationId xmlns:a16="http://schemas.microsoft.com/office/drawing/2014/main" id="{CBE46C67-4685-1ADC-E944-82DC26292E31}"/>
+                <a16:creationId xmlns:a16="http://schemas.microsoft.com/office/drawing/2014/main" id="{F9F9B432-9736-1EFB-127B-4FC4E423C695}"/>
               </a:ext>
             </a:extLst>
           </p:cNvPr>
@@ -20156,7 +20156,7 @@
           <p:cNvPr id="7" name="body">
             <a:extLst>
               <a:ext uri="{FF2B5EF4-FFF2-40B4-BE49-F238E27FC236}">
-                <a16:creationId xmlns:a16="http://schemas.microsoft.com/office/drawing/2014/main" id="{27792140-1CB3-EC16-10A2-866FB5C6C33B}"/>
+                <a16:creationId xmlns:a16="http://schemas.microsoft.com/office/drawing/2014/main" id="{3B7EEE9C-1944-0E3C-F192-AE4AB3C2B3B6}"/>
               </a:ext>
             </a:extLst>
           </p:cNvPr>
@@ -20199,7 +20199,7 @@
           <p:cNvPr id="8" name="source">
             <a:extLst>
               <a:ext uri="{FF2B5EF4-FFF2-40B4-BE49-F238E27FC236}">
-                <a16:creationId xmlns:a16="http://schemas.microsoft.com/office/drawing/2014/main" id="{61668AB6-5F5E-0AD8-89FF-46B04BBA5DE7}"/>
+                <a16:creationId xmlns:a16="http://schemas.microsoft.com/office/drawing/2014/main" id="{79AA6E03-4034-327C-B98B-CE0AE279E536}"/>
               </a:ext>
             </a:extLst>
           </p:cNvPr>
@@ -20256,7 +20256,7 @@
     </p:spTree>
     <p:extLst>
       <p:ext uri="{BB962C8B-B14F-4D97-AF65-F5344CB8AC3E}">
-        <p14:creationId xmlns:p14="http://schemas.microsoft.com/office/powerpoint/2010/main" val="4219095167"/>
+        <p14:creationId xmlns:p14="http://schemas.microsoft.com/office/powerpoint/2010/main" val="3170335286"/>
       </p:ext>
     </p:extLst>
   </p:cSld>
@@ -20336,7 +20336,7 @@
           <a:bodyPr/>
           <a:lstStyle/>
           <a:p>
-            <a:fld id="{784F70EA-3FD3-4955-90A7-9334D40F9408}" type="datetimeFigureOut">
+            <a:fld id="{9B28EAFD-CAE0-41EE-B184-026F7F5DC9D1}" type="datetimeFigureOut">
               <a:rPr lang="en-US" smtClean="0"/>
               <a:t>10/3/2026</a:t>
             </a:fld>
@@ -20378,7 +20378,7 @@
           <a:bodyPr/>
           <a:lstStyle/>
           <a:p>
-            <a:fld id="{41D0EC4C-452D-4CB3-8553-3AAC20353B0B}" type="slidenum">
+            <a:fld id="{DC138929-C395-43AB-82B0-A2EFC9DE35E2}" type="slidenum">
               <a:rPr lang="en-US" smtClean="0"/>
               <a:t>‹#›</a:t>
             </a:fld>
@@ -20391,7 +20391,7 @@
           <p:cNvPr id="6" name="item_1_title">
             <a:extLst>
               <a:ext uri="{FF2B5EF4-FFF2-40B4-BE49-F238E27FC236}">
-                <a16:creationId xmlns:a16="http://schemas.microsoft.com/office/drawing/2014/main" id="{10673AEF-AD48-3C33-75BC-252E4FE55998}"/>
+                <a16:creationId xmlns:a16="http://schemas.microsoft.com/office/drawing/2014/main" id="{15B87A22-9122-1AD4-797B-8D2C717B95A0}"/>
               </a:ext>
             </a:extLst>
           </p:cNvPr>
@@ -20404,8 +20404,8 @@
         </p:nvSpPr>
         <p:spPr>
           <a:xfrm>
-            <a:off x="853677" y="2364972"/>
-            <a:ext cx="3857479" cy="356920"/>
+            <a:off x="831634" y="2339424"/>
+            <a:ext cx="3901565" cy="371948"/>
           </a:xfrm>
         </p:spPr>
         <p:txBody>
@@ -20419,7 +20419,7 @@
               </a:spcBef>
               <a:buFontTx/>
               <a:buNone/>
-              <a:defRPr sz="2200" b="1">
+              <a:defRPr sz="2000" b="1">
                 <a:solidFill>
                   <a:schemeClr val="accent1">
                     <a:lumMod val="50000"/>
@@ -20443,7 +20443,7 @@
           <p:cNvPr id="7" name="item_1">
             <a:extLst>
               <a:ext uri="{FF2B5EF4-FFF2-40B4-BE49-F238E27FC236}">
-                <a16:creationId xmlns:a16="http://schemas.microsoft.com/office/drawing/2014/main" id="{00251825-17F7-F360-BC63-DA3C59ADDFCD}"/>
+                <a16:creationId xmlns:a16="http://schemas.microsoft.com/office/drawing/2014/main" id="{2A642D02-F9F9-A367-A1DC-2258293BBF7B}"/>
               </a:ext>
             </a:extLst>
           </p:cNvPr>
@@ -20456,8 +20456,8 @@
         </p:nvSpPr>
         <p:spPr>
           <a:xfrm>
-            <a:off x="853677" y="2721892"/>
-            <a:ext cx="3857479" cy="856608"/>
+            <a:off x="831634" y="2711373"/>
+            <a:ext cx="3901565" cy="892675"/>
           </a:xfrm>
           <a:prstGeom prst="rect">
             <a:avLst/>
@@ -20491,7 +20491,7 @@
           <p:cNvPr id="8" name="item_2_title">
             <a:extLst>
               <a:ext uri="{FF2B5EF4-FFF2-40B4-BE49-F238E27FC236}">
-                <a16:creationId xmlns:a16="http://schemas.microsoft.com/office/drawing/2014/main" id="{F4923C26-5E4A-53E3-4C53-F01274FD1717}"/>
+                <a16:creationId xmlns:a16="http://schemas.microsoft.com/office/drawing/2014/main" id="{47D8965F-265B-A844-45BE-2334F39B8056}"/>
               </a:ext>
             </a:extLst>
           </p:cNvPr>
@@ -20504,8 +20504,8 @@
         </p:nvSpPr>
         <p:spPr>
           <a:xfrm>
-            <a:off x="5240182" y="2364972"/>
-            <a:ext cx="3857479" cy="356920"/>
+            <a:off x="5218139" y="2339424"/>
+            <a:ext cx="3901565" cy="371948"/>
           </a:xfrm>
           <a:prstGeom prst="rect">
             <a:avLst/>
@@ -20522,7 +20522,7 @@
               </a:spcBef>
               <a:buFontTx/>
               <a:buNone/>
-              <a:defRPr sz="2200" b="1">
+              <a:defRPr sz="2000" b="1">
                 <a:solidFill>
                   <a:schemeClr val="accent1">
                     <a:lumMod val="50000"/>
@@ -20546,7 +20546,7 @@
           <p:cNvPr id="9" name="item_2">
             <a:extLst>
               <a:ext uri="{FF2B5EF4-FFF2-40B4-BE49-F238E27FC236}">
-                <a16:creationId xmlns:a16="http://schemas.microsoft.com/office/drawing/2014/main" id="{2C4488FF-8685-C5B3-D095-21725E5AE3FB}"/>
+                <a16:creationId xmlns:a16="http://schemas.microsoft.com/office/drawing/2014/main" id="{E69EBA2C-1A06-D67B-942C-5288BE85871D}"/>
               </a:ext>
             </a:extLst>
           </p:cNvPr>
@@ -20559,8 +20559,8 @@
         </p:nvSpPr>
         <p:spPr>
           <a:xfrm>
-            <a:off x="5240182" y="2721892"/>
-            <a:ext cx="3857479" cy="856608"/>
+            <a:off x="5218139" y="2711373"/>
+            <a:ext cx="3901565" cy="892675"/>
           </a:xfrm>
           <a:prstGeom prst="rect">
             <a:avLst/>
@@ -20594,7 +20594,7 @@
           <p:cNvPr id="10" name="item_3_title">
             <a:extLst>
               <a:ext uri="{FF2B5EF4-FFF2-40B4-BE49-F238E27FC236}">
-                <a16:creationId xmlns:a16="http://schemas.microsoft.com/office/drawing/2014/main" id="{D3E069F0-CE8A-A56E-C6BA-BFB60F4B681E}"/>
+                <a16:creationId xmlns:a16="http://schemas.microsoft.com/office/drawing/2014/main" id="{3D7D8AAC-90FF-4634-3CAE-C2C7F45D94F2}"/>
               </a:ext>
             </a:extLst>
           </p:cNvPr>
@@ -20607,8 +20607,8 @@
         </p:nvSpPr>
         <p:spPr>
           <a:xfrm>
-            <a:off x="853677" y="4191650"/>
-            <a:ext cx="3857479" cy="356920"/>
+            <a:off x="831634" y="4166103"/>
+            <a:ext cx="3901565" cy="371948"/>
           </a:xfrm>
           <a:prstGeom prst="rect">
             <a:avLst/>
@@ -20625,7 +20625,7 @@
               </a:spcBef>
               <a:buFontTx/>
               <a:buNone/>
-              <a:defRPr sz="2200" b="1">
+              <a:defRPr sz="2000" b="1">
                 <a:solidFill>
                   <a:schemeClr val="accent1">
                     <a:lumMod val="50000"/>
@@ -20649,7 +20649,7 @@
           <p:cNvPr id="11" name="item_3">
             <a:extLst>
               <a:ext uri="{FF2B5EF4-FFF2-40B4-BE49-F238E27FC236}">
-                <a16:creationId xmlns:a16="http://schemas.microsoft.com/office/drawing/2014/main" id="{E1A5BA53-8C56-5BC7-8AED-52DCF965F16B}"/>
+                <a16:creationId xmlns:a16="http://schemas.microsoft.com/office/drawing/2014/main" id="{E96703F2-1695-8FB6-95CF-25A02F551DDE}"/>
               </a:ext>
             </a:extLst>
           </p:cNvPr>
@@ -20662,8 +20662,8 @@
         </p:nvSpPr>
         <p:spPr>
           <a:xfrm>
-            <a:off x="853677" y="4548570"/>
-            <a:ext cx="3857479" cy="856608"/>
+            <a:off x="831634" y="4538052"/>
+            <a:ext cx="3901565" cy="892675"/>
           </a:xfrm>
           <a:prstGeom prst="rect">
             <a:avLst/>
@@ -20697,7 +20697,7 @@
           <p:cNvPr id="12" name="item_4_title">
             <a:extLst>
               <a:ext uri="{FF2B5EF4-FFF2-40B4-BE49-F238E27FC236}">
-                <a16:creationId xmlns:a16="http://schemas.microsoft.com/office/drawing/2014/main" id="{4BDF35C9-BBC4-42F8-63E2-0A4CF7385E47}"/>
+                <a16:creationId xmlns:a16="http://schemas.microsoft.com/office/drawing/2014/main" id="{E6EB824B-72FA-EBC4-E031-2CB10AC1B54D}"/>
               </a:ext>
             </a:extLst>
           </p:cNvPr>
@@ -20710,8 +20710,8 @@
         </p:nvSpPr>
         <p:spPr>
           <a:xfrm>
-            <a:off x="5240182" y="4191650"/>
-            <a:ext cx="3857479" cy="356920"/>
+            <a:off x="5218139" y="4166103"/>
+            <a:ext cx="3901565" cy="371948"/>
           </a:xfrm>
           <a:prstGeom prst="rect">
             <a:avLst/>
@@ -20728,7 +20728,7 @@
               </a:spcBef>
               <a:buFontTx/>
               <a:buNone/>
-              <a:defRPr sz="2200" b="1">
+              <a:defRPr sz="2000" b="1">
                 <a:solidFill>
                   <a:schemeClr val="accent1">
                     <a:lumMod val="50000"/>
@@ -20752,7 +20752,7 @@
           <p:cNvPr id="13" name="item_4">
             <a:extLst>
               <a:ext uri="{FF2B5EF4-FFF2-40B4-BE49-F238E27FC236}">
-                <a16:creationId xmlns:a16="http://schemas.microsoft.com/office/drawing/2014/main" id="{C7734960-BD81-19F0-4C23-D76E32EE9E22}"/>
+                <a16:creationId xmlns:a16="http://schemas.microsoft.com/office/drawing/2014/main" id="{BD8DC353-AAF1-0283-8EC8-E13E0462D444}"/>
               </a:ext>
             </a:extLst>
           </p:cNvPr>
@@ -20765,8 +20765,8 @@
         </p:nvSpPr>
         <p:spPr>
           <a:xfrm>
-            <a:off x="5240182" y="4548570"/>
-            <a:ext cx="3857479" cy="856608"/>
+            <a:off x="5218139" y="4538052"/>
+            <a:ext cx="3901565" cy="892675"/>
           </a:xfrm>
           <a:prstGeom prst="rect">
             <a:avLst/>
@@ -20800,7 +20800,7 @@
           <p:cNvPr id="14" name="source">
             <a:extLst>
               <a:ext uri="{FF2B5EF4-FFF2-40B4-BE49-F238E27FC236}">
-                <a16:creationId xmlns:a16="http://schemas.microsoft.com/office/drawing/2014/main" id="{00F0C471-572B-EFFE-6780-9603F39F6FB8}"/>
+                <a16:creationId xmlns:a16="http://schemas.microsoft.com/office/drawing/2014/main" id="{320DB34D-6B0D-99D4-2B1D-641BE1DBCC62}"/>
               </a:ext>
             </a:extLst>
           </p:cNvPr>
@@ -20857,7 +20857,7 @@
     </p:spTree>
     <p:extLst>
       <p:ext uri="{BB962C8B-B14F-4D97-AF65-F5344CB8AC3E}">
-        <p14:creationId xmlns:p14="http://schemas.microsoft.com/office/powerpoint/2010/main" val="3537035342"/>
+        <p14:creationId xmlns:p14="http://schemas.microsoft.com/office/powerpoint/2010/main" val="3097110718"/>
       </p:ext>
     </p:extLst>
   </p:cSld>
@@ -21548,7 +21548,7 @@
             </a:lvl1pPr>
           </a:lstStyle>
           <a:p>
-            <a:fld id="{784F70EA-3FD3-4955-90A7-9334D40F9408}" type="datetimeFigureOut">
+            <a:fld id="{9B28EAFD-CAE0-41EE-B184-026F7F5DC9D1}" type="datetimeFigureOut">
               <a:rPr lang="en-US" smtClean="0"/>
               <a:t>10/3/2026</a:t>
             </a:fld>
@@ -21624,7 +21624,7 @@
             </a:lvl1pPr>
           </a:lstStyle>
           <a:p>
-            <a:fld id="{41D0EC4C-452D-4CB3-8553-3AAC20353B0B}" type="slidenum">
+            <a:fld id="{DC138929-C395-43AB-82B0-A2EFC9DE35E2}" type="slidenum">
               <a:rPr lang="en-US" smtClean="0"/>
               <a:t>‹#›</a:t>
             </a:fld>
@@ -21635,7 +21635,7 @@
     </p:spTree>
     <p:extLst>
       <p:ext uri="{BB962C8B-B14F-4D97-AF65-F5344CB8AC3E}">
-        <p14:creationId xmlns:p14="http://schemas.microsoft.com/office/powerpoint/2010/main" val="2330024668"/>
+        <p14:creationId xmlns:p14="http://schemas.microsoft.com/office/powerpoint/2010/main" val="2346815650"/>
       </p:ext>
     </p:extLst>
   </p:cSld>
